--- a/docs/Ikenna_Odoh_NovaWallet_Case_Study.pptx
+++ b/docs/Ikenna_Odoh_NovaWallet_Case_Study.pptx
@@ -16,9 +16,10 @@
     <p:sldId id="264" r:id="rId10"/>
     <p:sldId id="265" r:id="rId11"/>
     <p:sldId id="266" r:id="rId12"/>
+    <p:sldId id="267" r:id="rId13"/>
   </p:sldIdLst>
   <p:notesMasterIdLst>
-    <p:notesMasterId r:id="rId13"/>
+    <p:notesMasterId r:id="rId14"/>
   </p:notesMasterIdLst>
   <p:sldSz cx="9144000" cy="5143500"/>
   <p:notesSz cx="5143500" cy="9144000"/>
@@ -955,7 +956,7 @@
           <a:p>
             <a:r>
               <a:rPr lang="en-US" dirty="0"/>
-              <a:t>I used Claude Code as the implementer and treated myself as the reviewer. Three real misses: an innocent-looking Produces attribute that broke the Problem Details contract; business declines being logged as server errors, which in a bank means alert fatigue; and tests asserting insufficient funds with amounts that actually tripped the daily limit. Also caught before they bit: EF returning a stale tracked wallet after a lock, and timestamp precision breaking the audit hash chain. All of it is written up in AI_USAGE.md.</a:t>
+              <a:t>A green test suite only means something if it goes red for the right reason. So I deleted FOR UPDATE and re-ran: 199 of 200 transfers 'succeeded' out of a thousand naira — classic lost updates — and four of five concurrency tests failed. Removing the lock ordering produced real Postgres deadlocks. Both were restored and the full suite is green.</a:t>
             </a:r>
             <a:endParaRPr lang="en-US" dirty="0"/>
           </a:p>
@@ -1043,7 +1044,7 @@
           <a:p>
             <a:r>
               <a:rPr lang="en-US" dirty="0"/>
-              <a:t>Every choice has a cost: row locks serialise writes on a very hot wallet, cached declines mean a new key after a top-up, and migrate-on-startup is a demo convenience. Next I'd add KYC tier limits, reconciliation and key expiry, reversals as compensating entries, and production-grade eventing and identity. Happy to run it live — compose up, Swagger, and the smoke script — or modify code.</a:t>
+              <a:t>I used Claude Code as the implementer and treated myself as the reviewer. Three real misses: an innocent-looking Produces attribute that broke the Problem Details contract; business declines being logged as server errors, which in a bank means alert fatigue; and a smoke-test check that passed for the wrong reason because macOS's old bash split an inline JSON body into three failed requests. Also: tests asserting insufficient funds with amounts that tripped the daily limit, and an error message leaking internal class names. Also caught before they bit: EF returning a stale tracked wallet after a lock, and timestamp precision breaking the audit hash chain. All of it is written up in AI_USAGE.md.</a:t>
             </a:r>
             <a:endParaRPr lang="en-US" dirty="0"/>
           </a:p>
@@ -1067,6 +1068,94 @@
             <a:fld id="{F7021451-1387-4CA6-816F-3879F97B5CBC}" type="slidenum">
               <a:rPr lang="en-US"/>
               <a:t>11</a:t>
+            </a:fld>
+            <a:endParaRPr lang="en-US"/>
+          </a:p>
+        </p:txBody>
+      </p:sp>
+    </p:spTree>
+    <p:extLst>
+      <p:ext uri="{BB962C8B-B14F-4D97-AF65-F5344CB8AC3E}">
+        <p14:creationId xmlns:p14="http://schemas.microsoft.com/office/powerpoint/2010/main" val="1024086991"/>
+      </p:ext>
+    </p:extLst>
+  </p:cSld>
+  <p:clrMapOvr>
+    <a:masterClrMapping/>
+  </p:clrMapOvr>
+</p:notes>
+</file>
+
+<file path=ppt/notesSlides/notesSlide12.xml><?xml version="1.0" encoding="utf-8"?>
+<p:notes xmlns:a="http://schemas.openxmlformats.org/drawingml/2006/main" xmlns:r="http://schemas.openxmlformats.org/officeDocument/2006/relationships" xmlns:p="http://schemas.openxmlformats.org/presentationml/2006/main">
+  <p:cSld>
+    <p:spTree>
+      <p:nvGrpSpPr>
+        <p:cNvPr id="1" name=""/>
+        <p:cNvGrpSpPr/>
+        <p:nvPr/>
+      </p:nvGrpSpPr>
+      <p:grpSpPr>
+        <a:xfrm>
+          <a:off x="0" y="0"/>
+          <a:ext cx="0" cy="0"/>
+          <a:chOff x="0" y="0"/>
+          <a:chExt cx="0" cy="0"/>
+        </a:xfrm>
+      </p:grpSpPr>
+      <p:sp>
+        <p:nvSpPr>
+          <p:cNvPr id="2" name="Slide Image Placeholder 1"/>
+          <p:cNvSpPr>
+            <a:spLocks noGrp="1" noRot="1" noChangeAspect="1"/>
+          </p:cNvSpPr>
+          <p:nvPr>
+            <p:ph type="sldImg"/>
+          </p:nvPr>
+        </p:nvSpPr>
+        <p:spPr/>
+      </p:sp>
+      <p:sp>
+        <p:nvSpPr>
+          <p:cNvPr id="3" name="Notes Placeholder 2"/>
+          <p:cNvSpPr>
+            <a:spLocks noGrp="1"/>
+          </p:cNvSpPr>
+          <p:nvPr>
+            <p:ph type="body" idx="1"/>
+          </p:nvPr>
+        </p:nvSpPr>
+        <p:spPr/>
+        <p:txBody>
+          <a:bodyPr/>
+          <a:lstStyle/>
+          <a:p>
+            <a:r>
+              <a:rPr lang="en-US" dirty="0"/>
+              <a:t>Every choice has a cost: row locks serialise writes on a very hot wallet, cached declines mean a new key after a top-up, and migrate-on-startup is a demo convenience. Next I'd add KYC tier limits, reconciliation and key expiry, reversals as compensating entries, and production-grade eventing and identity. Happy to run it live — compose up, Swagger, and the smoke script — or modify code.</a:t>
+            </a:r>
+            <a:endParaRPr lang="en-US" dirty="0"/>
+          </a:p>
+        </p:txBody>
+      </p:sp>
+      <p:sp>
+        <p:nvSpPr>
+          <p:cNvPr id="4" name="Slide Number Placeholder 3"/>
+          <p:cNvSpPr>
+            <a:spLocks noGrp="1"/>
+          </p:cNvSpPr>
+          <p:nvPr>
+            <p:ph type="sldNum" sz="quarter" idx="10"/>
+          </p:nvPr>
+        </p:nvSpPr>
+        <p:spPr/>
+        <p:txBody>
+          <a:bodyPr/>
+          <a:lstStyle/>
+          <a:p>
+            <a:fld id="{F7021451-1387-4CA6-816F-3879F97B5CBC}" type="slidenum">
+              <a:rPr lang="en-US"/>
+              <a:t>12</a:t>
             </a:fld>
             <a:endParaRPr lang="en-US"/>
           </a:p>
@@ -1219,7 +1308,7 @@
           <a:p>
             <a:r>
               <a:rPr lang="en-US" dirty="0"/>
-              <a:t>The headline: 200 transfers fired at the same instant against a thousand-naira wallet — exactly ten succeed, every time, balance lands on zero, and the ledger agrees. 91 tests in total, 46 of them against real Postgres. All four stretch goals are in as well.</a:t>
+              <a:t>The headline: 200 transfers fired at the same instant against a thousand-naira wallet — exactly ten succeed, every time, balance lands on zero, and the ledger agrees. 148 tests in total, half of them against real Postgres. All four stretch goals are in, plus real sign-in and an admin flow.</a:t>
             </a:r>
             <a:endParaRPr lang="en-US" dirty="0"/>
           </a:p>
@@ -1659,7 +1748,7 @@
           <a:p>
             <a:r>
               <a:rPr lang="en-US" dirty="0"/>
-              <a:t>Security: the token check is strict and pinned to one algorithm, and there is a test that an alg-none operator token is refused. Secrets come from the environment; startup fails on a short key. The mock issuer only exists behind a flag. For NDPA, the ledger stores no personal identifiers and never logs bodies. The USSD channel is exactly why idempotency matters, and tiered KYC limits would plug into the same limit policy.</a:t>
+              <a:t>The brief allowed a mock token issuer, but I wanted a real flow. Customers register and sign in; passwords are PBKDF2-hashed. Access tokens live 15 minutes, refresh tokens rotate, and replaying an old refresh token revokes the whole session because that's what theft looks like. The key point for a bank: a JWT is normally valid until it expires, so on every request I check the user is still active and the token's version matches, so disabling someone takes effect on their very next call. Admins credit wallets, read audit trails, manage users and freeze wallets, all recorded in an append-only log. I proved the two critical safeguards the same way as the ledger: remove the per-request check and four tests fail; remove the row lock on refresh and ten concurrent refreshes all succeed.</a:t>
             </a:r>
             <a:endParaRPr lang="en-US" dirty="0"/>
           </a:p>
@@ -1747,7 +1836,7 @@
           <a:p>
             <a:r>
               <a:rPr lang="en-US" dirty="0"/>
-              <a:t>A green test suite only means something if it goes red for the right reason. So I deleted FOR UPDATE and re-ran: 199 of 200 transfers 'succeeded' out of a thousand naira — classic lost updates — and four of five concurrency tests failed. Removing the lock ordering produced real Postgres deadlocks. Both were restored and the full suite is green.</a:t>
+              <a:t>Security: the token check is strict and pinned to one algorithm, and there is a test that an alg-none admin token is refused. Secrets come from the environment; startup fails on a short key. The mock issuer only exists behind a flag. For NDPA, the ledger stores no personal identifiers and never logs bodies. The USSD channel is exactly why idempotency matters, and tiered KYC limits would plug into the same limit policy.</a:t>
             </a:r>
             <a:endParaRPr lang="en-US" dirty="0"/>
           </a:p>
@@ -2446,7 +2535,7 @@
                 <a:ea typeface="Calibri" pitchFamily="34" charset="-122"/>
                 <a:cs typeface="Calibri" pitchFamily="34" charset="-120"/>
               </a:rPr>
-              <a:t>AI FLUENCY &amp; JUDGEMENT</a:t>
+              <a:t>EVIDENCE</a:t>
             </a:r>
             <a:endParaRPr lang="en-US" sz="1000" dirty="0"/>
           </a:p>
@@ -2485,438 +2574,31 @@
                 <a:ea typeface="Cambria" pitchFamily="34" charset="-122"/>
                 <a:cs typeface="Cambria" pitchFamily="34" charset="-120"/>
               </a:rPr>
-              <a:t>AI wrote fast; checks caught its mistakes</a:t>
+              <a:t>The tests fail when the safety is removed</a:t>
             </a:r>
             <a:endParaRPr lang="en-US" sz="2400" dirty="0"/>
           </a:p>
         </p:txBody>
       </p:sp>
-      <p:sp>
-        <p:nvSpPr>
-          <p:cNvPr id="4" name="Shape 2"/>
-          <p:cNvSpPr/>
-          <p:nvPr/>
-        </p:nvSpPr>
-        <p:spPr>
-          <a:xfrm>
-            <a:off x="457200" y="1325880"/>
-            <a:ext cx="2468880" cy="3291840"/>
-          </a:xfrm>
-          <a:prstGeom prst="roundRect">
-            <a:avLst>
-              <a:gd name="adj" fmla="val 2963"/>
-            </a:avLst>
-          </a:prstGeom>
-          <a:solidFill>
-            <a:srgbClr val="0B1F3A"/>
-          </a:solidFill>
-          <a:ln w="12700">
-            <a:solidFill>
-              <a:srgbClr val="0B1F3A"/>
-            </a:solidFill>
-            <a:prstDash val="solid"/>
-          </a:ln>
-        </p:spPr>
-      </p:sp>
-      <p:sp>
-        <p:nvSpPr>
-          <p:cNvPr id="5" name="Shape 3"/>
-          <p:cNvSpPr/>
-          <p:nvPr/>
-        </p:nvSpPr>
-        <p:spPr>
-          <a:xfrm>
-            <a:off x="640080" y="1463040"/>
-            <a:ext cx="502920" cy="502920"/>
-          </a:xfrm>
-          <a:prstGeom prst="ellipse">
-            <a:avLst/>
-          </a:prstGeom>
-          <a:solidFill>
-            <a:srgbClr val="D4A63A"/>
-          </a:solidFill>
-          <a:ln w="12700">
-            <a:solidFill>
-              <a:srgbClr val="D4A63A"/>
-            </a:solidFill>
-            <a:prstDash val="solid"/>
-          </a:ln>
-        </p:spPr>
-      </p:sp>
+      <p:graphicFrame>
+        <p:nvGraphicFramePr>
+          <p:cNvPr id="4" name="Chart 0" descr=""/>
+          <p:cNvGraphicFramePr/>
+          <p:nvPr/>
+        </p:nvGraphicFramePr>
+        <p:xfrm>
+          <a:off x="365760" y="1234440"/>
+          <a:ext cx="4846320" cy="3429000"/>
+        </p:xfrm>
+        <a:graphic xmlns:a="http://schemas.openxmlformats.org/drawingml/2006/main">
+          <a:graphicData uri="http://schemas.openxmlformats.org/drawingml/2006/chart">
+            <c:chart xmlns:c="http://schemas.openxmlformats.org/drawingml/2006/chart" r:id="rId1"/>
+          </a:graphicData>
+        </a:graphic>
+      </p:graphicFrame>
       <p:pic>
         <p:nvPicPr>
-          <p:cNvPr id="6" name="Image 0" descr="preencoded.png">    </p:cNvPr>
-          <p:cNvPicPr>
-            <a:picLocks noChangeAspect="1"/>
-          </p:cNvPicPr>
-          <p:nvPr/>
-        </p:nvPicPr>
-        <p:blipFill>
-          <a:blip r:embed="rId1"/>
-          <a:stretch>
-            <a:fillRect/>
-          </a:stretch>
-        </p:blipFill>
-        <p:spPr>
-          <a:xfrm>
-            <a:off x="770839" y="1593799"/>
-            <a:ext cx="241402" cy="241402"/>
-          </a:xfrm>
-          <a:prstGeom prst="rect">
-            <a:avLst/>
-          </a:prstGeom>
-        </p:spPr>
-      </p:pic>
-      <p:sp>
-        <p:nvSpPr>
-          <p:cNvPr id="7" name="Text 4"/>
-          <p:cNvSpPr txBox="1"/>
-          <p:nvPr/>
-        </p:nvSpPr>
-        <p:spPr>
-          <a:xfrm>
-            <a:off x="640080" y="2103120"/>
-            <a:ext cx="2103120" cy="274320"/>
-          </a:xfrm>
-          <a:prstGeom prst="rect">
-            <a:avLst/>
-          </a:prstGeom>
-          <a:noFill/>
-          <a:ln/>
-        </p:spPr>
-        <p:txBody>
-          <a:bodyPr wrap="square" lIns="0" tIns="0" rIns="0" bIns="0" rtlCol="0" anchor="t"/>
-          <a:lstStyle/>
-          <a:p>
-            <a:pPr indent="0" marL="0">
-              <a:buNone/>
-            </a:pPr>
-            <a:r>
-              <a:rPr lang="en-US" sz="1400" b="1" dirty="0">
-                <a:solidFill>
-                  <a:srgbClr val="FFFFFF"/>
-                </a:solidFill>
-                <a:latin typeface="Calibri" pitchFamily="34" charset="0"/>
-                <a:ea typeface="Calibri" pitchFamily="34" charset="-122"/>
-                <a:cs typeface="Calibri" pitchFamily="34" charset="-120"/>
-              </a:rPr>
-              <a:t>How I used it</a:t>
-            </a:r>
-            <a:endParaRPr lang="en-US" sz="1400" dirty="0"/>
-          </a:p>
-        </p:txBody>
-      </p:sp>
-      <p:sp>
-        <p:nvSpPr>
-          <p:cNvPr id="8" name="Shape 5"/>
-          <p:cNvSpPr/>
-          <p:nvPr/>
-        </p:nvSpPr>
-        <p:spPr>
-          <a:xfrm>
-            <a:off x="640080" y="2523490"/>
-            <a:ext cx="64008" cy="64008"/>
-          </a:xfrm>
-          <a:prstGeom prst="ellipse">
-            <a:avLst/>
-          </a:prstGeom>
-          <a:solidFill>
-            <a:srgbClr val="D4A63A"/>
-          </a:solidFill>
-          <a:ln w="12700">
-            <a:solidFill>
-              <a:srgbClr val="D4A63A"/>
-            </a:solidFill>
-            <a:prstDash val="solid"/>
-          </a:ln>
-        </p:spPr>
-      </p:sp>
-      <p:sp>
-        <p:nvSpPr>
-          <p:cNvPr id="9" name="Text 6"/>
-          <p:cNvSpPr txBox="1"/>
-          <p:nvPr/>
-        </p:nvSpPr>
-        <p:spPr>
-          <a:xfrm>
-            <a:off x="822960" y="2468880"/>
-            <a:ext cx="1965960" cy="340868"/>
-          </a:xfrm>
-          <a:prstGeom prst="rect">
-            <a:avLst/>
-          </a:prstGeom>
-          <a:noFill/>
-          <a:ln/>
-        </p:spPr>
-        <p:txBody>
-          <a:bodyPr wrap="square" lIns="0" tIns="0" rIns="0" bIns="0" rtlCol="0" anchor="t"/>
-          <a:lstStyle/>
-          <a:p>
-            <a:pPr indent="0" marL="0">
-              <a:buNone/>
-            </a:pPr>
-            <a:r>
-              <a:rPr lang="en-US" sz="1100" dirty="0">
-                <a:solidFill>
-                  <a:srgbClr val="FFFFFF"/>
-                </a:solidFill>
-                <a:latin typeface="Calibri" pitchFamily="34" charset="0"/>
-                <a:ea typeface="Calibri" pitchFamily="34" charset="-122"/>
-                <a:cs typeface="Calibri" pitchFamily="34" charset="-120"/>
-              </a:rPr>
-              <a:t>Plan first, approved before code</a:t>
-            </a:r>
-            <a:endParaRPr lang="en-US" sz="1100" dirty="0"/>
-          </a:p>
-        </p:txBody>
-      </p:sp>
-      <p:sp>
-        <p:nvSpPr>
-          <p:cNvPr id="10" name="Shape 7"/>
-          <p:cNvSpPr/>
-          <p:nvPr/>
-        </p:nvSpPr>
-        <p:spPr>
-          <a:xfrm>
-            <a:off x="640080" y="2974086"/>
-            <a:ext cx="64008" cy="64008"/>
-          </a:xfrm>
-          <a:prstGeom prst="ellipse">
-            <a:avLst/>
-          </a:prstGeom>
-          <a:solidFill>
-            <a:srgbClr val="D4A63A"/>
-          </a:solidFill>
-          <a:ln w="12700">
-            <a:solidFill>
-              <a:srgbClr val="D4A63A"/>
-            </a:solidFill>
-            <a:prstDash val="solid"/>
-          </a:ln>
-        </p:spPr>
-      </p:sp>
-      <p:sp>
-        <p:nvSpPr>
-          <p:cNvPr id="11" name="Text 8"/>
-          <p:cNvSpPr txBox="1"/>
-          <p:nvPr/>
-        </p:nvSpPr>
-        <p:spPr>
-          <a:xfrm>
-            <a:off x="822960" y="2919476"/>
-            <a:ext cx="1965960" cy="340868"/>
-          </a:xfrm>
-          <a:prstGeom prst="rect">
-            <a:avLst/>
-          </a:prstGeom>
-          <a:noFill/>
-          <a:ln/>
-        </p:spPr>
-        <p:txBody>
-          <a:bodyPr wrap="square" lIns="0" tIns="0" rIns="0" bIns="0" rtlCol="0" anchor="t"/>
-          <a:lstStyle/>
-          <a:p>
-            <a:pPr indent="0" marL="0">
-              <a:buNone/>
-            </a:pPr>
-            <a:r>
-              <a:rPr lang="en-US" sz="1100" dirty="0">
-                <a:solidFill>
-                  <a:srgbClr val="FFFFFF"/>
-                </a:solidFill>
-                <a:latin typeface="Calibri" pitchFamily="34" charset="0"/>
-                <a:ea typeface="Calibri" pitchFamily="34" charset="-122"/>
-                <a:cs typeface="Calibri" pitchFamily="34" charset="-120"/>
-              </a:rPr>
-              <a:t>Boilerplate: EF mappings, Swagger, Docker, CI</a:t>
-            </a:r>
-            <a:endParaRPr lang="en-US" sz="1100" dirty="0"/>
-          </a:p>
-        </p:txBody>
-      </p:sp>
-      <p:sp>
-        <p:nvSpPr>
-          <p:cNvPr id="12" name="Shape 9"/>
-          <p:cNvSpPr/>
-          <p:nvPr/>
-        </p:nvSpPr>
-        <p:spPr>
-          <a:xfrm>
-            <a:off x="640080" y="3424682"/>
-            <a:ext cx="64008" cy="64008"/>
-          </a:xfrm>
-          <a:prstGeom prst="ellipse">
-            <a:avLst/>
-          </a:prstGeom>
-          <a:solidFill>
-            <a:srgbClr val="D4A63A"/>
-          </a:solidFill>
-          <a:ln w="12700">
-            <a:solidFill>
-              <a:srgbClr val="D4A63A"/>
-            </a:solidFill>
-            <a:prstDash val="solid"/>
-          </a:ln>
-        </p:spPr>
-      </p:sp>
-      <p:sp>
-        <p:nvSpPr>
-          <p:cNvPr id="13" name="Text 10"/>
-          <p:cNvSpPr txBox="1"/>
-          <p:nvPr/>
-        </p:nvSpPr>
-        <p:spPr>
-          <a:xfrm>
-            <a:off x="822960" y="3370072"/>
-            <a:ext cx="1965960" cy="170434"/>
-          </a:xfrm>
-          <a:prstGeom prst="rect">
-            <a:avLst/>
-          </a:prstGeom>
-          <a:noFill/>
-          <a:ln/>
-        </p:spPr>
-        <p:txBody>
-          <a:bodyPr wrap="square" lIns="0" tIns="0" rIns="0" bIns="0" rtlCol="0" anchor="t"/>
-          <a:lstStyle/>
-          <a:p>
-            <a:pPr indent="0" marL="0">
-              <a:buNone/>
-            </a:pPr>
-            <a:r>
-              <a:rPr lang="en-US" sz="1100" dirty="0">
-                <a:solidFill>
-                  <a:srgbClr val="FFFFFF"/>
-                </a:solidFill>
-                <a:latin typeface="Calibri" pitchFamily="34" charset="0"/>
-                <a:ea typeface="Calibri" pitchFamily="34" charset="-122"/>
-                <a:cs typeface="Calibri" pitchFamily="34" charset="-120"/>
-              </a:rPr>
-              <a:t>Broad first test list</a:t>
-            </a:r>
-            <a:endParaRPr lang="en-US" sz="1100" dirty="0"/>
-          </a:p>
-        </p:txBody>
-      </p:sp>
-      <p:sp>
-        <p:nvSpPr>
-          <p:cNvPr id="14" name="Shape 11"/>
-          <p:cNvSpPr/>
-          <p:nvPr/>
-        </p:nvSpPr>
-        <p:spPr>
-          <a:xfrm>
-            <a:off x="640080" y="3704844"/>
-            <a:ext cx="64008" cy="64008"/>
-          </a:xfrm>
-          <a:prstGeom prst="ellipse">
-            <a:avLst/>
-          </a:prstGeom>
-          <a:solidFill>
-            <a:srgbClr val="D4A63A"/>
-          </a:solidFill>
-          <a:ln w="12700">
-            <a:solidFill>
-              <a:srgbClr val="D4A63A"/>
-            </a:solidFill>
-            <a:prstDash val="solid"/>
-          </a:ln>
-        </p:spPr>
-      </p:sp>
-      <p:sp>
-        <p:nvSpPr>
-          <p:cNvPr id="15" name="Text 12"/>
-          <p:cNvSpPr txBox="1"/>
-          <p:nvPr/>
-        </p:nvSpPr>
-        <p:spPr>
-          <a:xfrm>
-            <a:off x="822960" y="3650234"/>
-            <a:ext cx="1965960" cy="340868"/>
-          </a:xfrm>
-          <a:prstGeom prst="rect">
-            <a:avLst/>
-          </a:prstGeom>
-          <a:noFill/>
-          <a:ln/>
-        </p:spPr>
-        <p:txBody>
-          <a:bodyPr wrap="square" lIns="0" tIns="0" rIns="0" bIns="0" rtlCol="0" anchor="t"/>
-          <a:lstStyle/>
-          <a:p>
-            <a:pPr indent="0" marL="0">
-              <a:buNone/>
-            </a:pPr>
-            <a:r>
-              <a:rPr lang="en-US" sz="1100" dirty="0">
-                <a:solidFill>
-                  <a:srgbClr val="FFFFFF"/>
-                </a:solidFill>
-                <a:latin typeface="Calibri" pitchFamily="34" charset="0"/>
-                <a:ea typeface="Calibri" pitchFamily="34" charset="-122"/>
-                <a:cs typeface="Calibri" pitchFamily="34" charset="-120"/>
-              </a:rPr>
-              <a:t>Nothing accepted without a test or a log to prove it</a:t>
-            </a:r>
-            <a:endParaRPr lang="en-US" sz="1100" dirty="0"/>
-          </a:p>
-        </p:txBody>
-      </p:sp>
-      <p:sp>
-        <p:nvSpPr>
-          <p:cNvPr id="16" name="Shape 13"/>
-          <p:cNvSpPr/>
-          <p:nvPr/>
-        </p:nvSpPr>
-        <p:spPr>
-          <a:xfrm>
-            <a:off x="3154680" y="1325880"/>
-            <a:ext cx="5532120" cy="987552"/>
-          </a:xfrm>
-          <a:prstGeom prst="roundRect">
-            <a:avLst>
-              <a:gd name="adj" fmla="val 7407"/>
-            </a:avLst>
-          </a:prstGeom>
-          <a:solidFill>
-            <a:srgbClr val="F3F5F9"/>
-          </a:solidFill>
-          <a:ln w="12700">
-            <a:solidFill>
-              <a:srgbClr val="F3F5F9"/>
-            </a:solidFill>
-            <a:prstDash val="solid"/>
-          </a:ln>
-        </p:spPr>
-      </p:sp>
-      <p:sp>
-        <p:nvSpPr>
-          <p:cNvPr id="17" name="Shape 14"/>
-          <p:cNvSpPr/>
-          <p:nvPr/>
-        </p:nvSpPr>
-        <p:spPr>
-          <a:xfrm>
-            <a:off x="3291840" y="1527048"/>
-            <a:ext cx="457200" cy="457200"/>
-          </a:xfrm>
-          <a:prstGeom prst="ellipse">
-            <a:avLst/>
-          </a:prstGeom>
-          <a:solidFill>
-            <a:srgbClr val="B83A2E"/>
-          </a:solidFill>
-          <a:ln w="12700">
-            <a:solidFill>
-              <a:srgbClr val="B83A2E"/>
-            </a:solidFill>
-            <a:prstDash val="solid"/>
-          </a:ln>
-        </p:spPr>
-      </p:sp>
-      <p:pic>
-        <p:nvPicPr>
-          <p:cNvPr id="18" name="Image 1" descr="preencoded.png">    </p:cNvPr>
+          <p:cNvPr id="5" name="Image 0" descr="preencoded.png">    </p:cNvPr>
           <p:cNvPicPr>
             <a:picLocks noChangeAspect="1"/>
           </p:cNvPicPr>
@@ -2930,8 +2612,8 @@
         </p:blipFill>
         <p:spPr>
           <a:xfrm>
-            <a:off x="3410712" y="1645920"/>
-            <a:ext cx="219456" cy="219456"/>
+            <a:off x="5486400" y="1362456"/>
+            <a:ext cx="274320" cy="274320"/>
           </a:xfrm>
           <a:prstGeom prst="rect">
             <a:avLst/>
@@ -2940,14 +2622,14 @@
       </p:pic>
       <p:sp>
         <p:nvSpPr>
-          <p:cNvPr id="19" name="Text 15"/>
-          <p:cNvSpPr txBox="1"/>
-          <p:nvPr/>
-        </p:nvSpPr>
-        <p:spPr>
-          <a:xfrm>
-            <a:off x="3931920" y="1417320"/>
-            <a:ext cx="4663440" cy="274320"/>
+          <p:cNvPr id="6" name="Text 2"/>
+          <p:cNvSpPr txBox="1"/>
+          <p:nvPr/>
+        </p:nvSpPr>
+        <p:spPr>
+          <a:xfrm>
+            <a:off x="5897880" y="1325880"/>
+            <a:ext cx="2788920" cy="274320"/>
           </a:xfrm>
           <a:prstGeom prst="rect">
             <a:avLst/>
@@ -2971,7 +2653,7 @@
                 <a:ea typeface="Calibri" pitchFamily="34" charset="-122"/>
                 <a:cs typeface="Calibri" pitchFamily="34" charset="-120"/>
               </a:rPr>
-              <a:t>Errors stopped being Problem Details</a:t>
+              <a:t>With the lock</a:t>
             </a:r>
             <a:endParaRPr lang="en-US" sz="1250" dirty="0"/>
           </a:p>
@@ -2979,14 +2661,14 @@
       </p:sp>
       <p:sp>
         <p:nvSpPr>
-          <p:cNvPr id="20" name="Text 16"/>
-          <p:cNvSpPr txBox="1"/>
-          <p:nvPr/>
-        </p:nvSpPr>
-        <p:spPr>
-          <a:xfrm>
-            <a:off x="3931920" y="1709928"/>
-            <a:ext cx="4663440" cy="566928"/>
+          <p:cNvPr id="7" name="Text 3"/>
+          <p:cNvSpPr txBox="1"/>
+          <p:nvPr/>
+        </p:nvSpPr>
+        <p:spPr>
+          <a:xfrm>
+            <a:off x="5897880" y="1600200"/>
+            <a:ext cx="2788920" cy="530352"/>
           </a:xfrm>
           <a:prstGeom prst="rect">
             <a:avLst/>
@@ -3004,73 +2686,21 @@
             <a:r>
               <a:rPr lang="en-US" sz="1050" dirty="0">
                 <a:solidFill>
-                  <a:srgbClr val="1B2430"/>
-                </a:solidFill>
-                <a:latin typeface="Calibri" pitchFamily="34" charset="0"/>
-                <a:ea typeface="Calibri" pitchFamily="34" charset="-122"/>
-                <a:cs typeface="Calibri" pitchFamily="34" charset="-120"/>
-              </a:rPr>
-              <a:t>[Produces("application/json")] overrode 400 responses. Caught by a media-type assertion (5 of 7 cases failed). Removed.</a:t>
+                  <a:srgbClr val="5B6675"/>
+                </a:solidFill>
+                <a:latin typeface="Calibri" pitchFamily="34" charset="0"/>
+                <a:ea typeface="Calibri" pitchFamily="34" charset="-122"/>
+                <a:cs typeface="Calibri" pitchFamily="34" charset="-120"/>
+              </a:rPr>
+              <a:t>10 succeed, balance ₦0, ledger sum = balance — identical over 3 runs (~250 ms on an M1)</a:t>
             </a:r>
             <a:endParaRPr lang="en-US" sz="1050" dirty="0"/>
           </a:p>
         </p:txBody>
-      </p:sp>
-      <p:sp>
-        <p:nvSpPr>
-          <p:cNvPr id="21" name="Shape 17"/>
-          <p:cNvSpPr/>
-          <p:nvPr/>
-        </p:nvSpPr>
-        <p:spPr>
-          <a:xfrm>
-            <a:off x="3154680" y="2441448"/>
-            <a:ext cx="5532120" cy="987552"/>
-          </a:xfrm>
-          <a:prstGeom prst="roundRect">
-            <a:avLst>
-              <a:gd name="adj" fmla="val 7407"/>
-            </a:avLst>
-          </a:prstGeom>
-          <a:solidFill>
-            <a:srgbClr val="F3F5F9"/>
-          </a:solidFill>
-          <a:ln w="12700">
-            <a:solidFill>
-              <a:srgbClr val="F3F5F9"/>
-            </a:solidFill>
-            <a:prstDash val="solid"/>
-          </a:ln>
-        </p:spPr>
-      </p:sp>
-      <p:sp>
-        <p:nvSpPr>
-          <p:cNvPr id="22" name="Shape 18"/>
-          <p:cNvSpPr/>
-          <p:nvPr/>
-        </p:nvSpPr>
-        <p:spPr>
-          <a:xfrm>
-            <a:off x="3291840" y="2642616"/>
-            <a:ext cx="457200" cy="457200"/>
-          </a:xfrm>
-          <a:prstGeom prst="ellipse">
-            <a:avLst/>
-          </a:prstGeom>
-          <a:solidFill>
-            <a:srgbClr val="B83A2E"/>
-          </a:solidFill>
-          <a:ln w="12700">
-            <a:solidFill>
-              <a:srgbClr val="B83A2E"/>
-            </a:solidFill>
-            <a:prstDash val="solid"/>
-          </a:ln>
-        </p:spPr>
       </p:sp>
       <p:pic>
         <p:nvPicPr>
-          <p:cNvPr id="23" name="Image 2" descr="preencoded.png">    </p:cNvPr>
+          <p:cNvPr id="8" name="Image 1" descr="preencoded.png">    </p:cNvPr>
           <p:cNvPicPr>
             <a:picLocks noChangeAspect="1"/>
           </p:cNvPicPr>
@@ -3084,8 +2714,8 @@
         </p:blipFill>
         <p:spPr>
           <a:xfrm>
-            <a:off x="3410712" y="2761488"/>
-            <a:ext cx="219456" cy="219456"/>
+            <a:off x="5486400" y="2203704"/>
+            <a:ext cx="274320" cy="274320"/>
           </a:xfrm>
           <a:prstGeom prst="rect">
             <a:avLst/>
@@ -3094,14 +2724,14 @@
       </p:pic>
       <p:sp>
         <p:nvSpPr>
-          <p:cNvPr id="24" name="Text 19"/>
-          <p:cNvSpPr txBox="1"/>
-          <p:nvPr/>
-        </p:nvSpPr>
-        <p:spPr>
-          <a:xfrm>
-            <a:off x="3931920" y="2532888"/>
-            <a:ext cx="4663440" cy="274320"/>
+          <p:cNvPr id="9" name="Text 4"/>
+          <p:cNvSpPr txBox="1"/>
+          <p:nvPr/>
+        </p:nvSpPr>
+        <p:spPr>
+          <a:xfrm>
+            <a:off x="5897880" y="2167128"/>
+            <a:ext cx="2788920" cy="274320"/>
           </a:xfrm>
           <a:prstGeom prst="rect">
             <a:avLst/>
@@ -3125,7 +2755,7 @@
                 <a:ea typeface="Calibri" pitchFamily="34" charset="-122"/>
                 <a:cs typeface="Calibri" pitchFamily="34" charset="-120"/>
               </a:rPr>
-              <a:t>Every declined transfer logged as an ERROR</a:t>
+              <a:t>Lock removed</a:t>
             </a:r>
             <a:endParaRPr lang="en-US" sz="1250" dirty="0"/>
           </a:p>
@@ -3133,14 +2763,14 @@
       </p:sp>
       <p:sp>
         <p:nvSpPr>
-          <p:cNvPr id="25" name="Text 20"/>
-          <p:cNvSpPr txBox="1"/>
-          <p:nvPr/>
-        </p:nvSpPr>
-        <p:spPr>
-          <a:xfrm>
-            <a:off x="3931920" y="2825496"/>
-            <a:ext cx="4663440" cy="566928"/>
+          <p:cNvPr id="10" name="Text 5"/>
+          <p:cNvSpPr txBox="1"/>
+          <p:nvPr/>
+        </p:nvSpPr>
+        <p:spPr>
+          <a:xfrm>
+            <a:off x="5897880" y="2441448"/>
+            <a:ext cx="2788920" cy="530352"/>
           </a:xfrm>
           <a:prstGeom prst="rect">
             <a:avLst/>
@@ -3158,73 +2788,21 @@
             <a:r>
               <a:rPr lang="en-US" sz="1050" dirty="0">
                 <a:solidFill>
-                  <a:srgbClr val="1B2430"/>
-                </a:solidFill>
-                <a:latin typeface="Calibri" pitchFamily="34" charset="0"/>
-                <a:ea typeface="Calibri" pitchFamily="34" charset="-122"/>
-                <a:cs typeface="Calibri" pitchFamily="34" charset="-120"/>
-              </a:rPr>
-              <a:t>.NET 8 exception middleware logs all exceptions at Error — alert fatigue in a bank. Caught reading logs; fixed with an MVC filter → 0 error lines.</a:t>
+                  <a:srgbClr val="5B6675"/>
+                </a:solidFill>
+                <a:latin typeface="Calibri" pitchFamily="34" charset="0"/>
+                <a:ea typeface="Calibri" pitchFamily="34" charset="-122"/>
+                <a:cs typeface="Calibri" pitchFamily="34" charset="-120"/>
+              </a:rPr>
+              <a:t>199 "succeed" from ₦1,000 (lost updates); daily-limit test lets 40/40 through</a:t>
             </a:r>
             <a:endParaRPr lang="en-US" sz="1050" dirty="0"/>
           </a:p>
         </p:txBody>
-      </p:sp>
-      <p:sp>
-        <p:nvSpPr>
-          <p:cNvPr id="26" name="Shape 21"/>
-          <p:cNvSpPr/>
-          <p:nvPr/>
-        </p:nvSpPr>
-        <p:spPr>
-          <a:xfrm>
-            <a:off x="3154680" y="3557016"/>
-            <a:ext cx="5532120" cy="987552"/>
-          </a:xfrm>
-          <a:prstGeom prst="roundRect">
-            <a:avLst>
-              <a:gd name="adj" fmla="val 7407"/>
-            </a:avLst>
-          </a:prstGeom>
-          <a:solidFill>
-            <a:srgbClr val="F3F5F9"/>
-          </a:solidFill>
-          <a:ln w="12700">
-            <a:solidFill>
-              <a:srgbClr val="F3F5F9"/>
-            </a:solidFill>
-            <a:prstDash val="solid"/>
-          </a:ln>
-        </p:spPr>
-      </p:sp>
-      <p:sp>
-        <p:nvSpPr>
-          <p:cNvPr id="27" name="Shape 22"/>
-          <p:cNvSpPr/>
-          <p:nvPr/>
-        </p:nvSpPr>
-        <p:spPr>
-          <a:xfrm>
-            <a:off x="3291840" y="3758184"/>
-            <a:ext cx="457200" cy="457200"/>
-          </a:xfrm>
-          <a:prstGeom prst="ellipse">
-            <a:avLst/>
-          </a:prstGeom>
-          <a:solidFill>
-            <a:srgbClr val="B83A2E"/>
-          </a:solidFill>
-          <a:ln w="12700">
-            <a:solidFill>
-              <a:srgbClr val="B83A2E"/>
-            </a:solidFill>
-            <a:prstDash val="solid"/>
-          </a:ln>
-        </p:spPr>
       </p:sp>
       <p:pic>
         <p:nvPicPr>
-          <p:cNvPr id="28" name="Image 3" descr="preencoded.png">    </p:cNvPr>
+          <p:cNvPr id="11" name="Image 2" descr="preencoded.png">    </p:cNvPr>
           <p:cNvPicPr>
             <a:picLocks noChangeAspect="1"/>
           </p:cNvPicPr>
@@ -3238,8 +2816,8 @@
         </p:blipFill>
         <p:spPr>
           <a:xfrm>
-            <a:off x="3410712" y="3877056"/>
-            <a:ext cx="219456" cy="219456"/>
+            <a:off x="5486400" y="3044952"/>
+            <a:ext cx="274320" cy="274320"/>
           </a:xfrm>
           <a:prstGeom prst="rect">
             <a:avLst/>
@@ -3248,14 +2826,14 @@
       </p:pic>
       <p:sp>
         <p:nvSpPr>
-          <p:cNvPr id="29" name="Text 23"/>
-          <p:cNvSpPr txBox="1"/>
-          <p:nvPr/>
-        </p:nvSpPr>
-        <p:spPr>
-          <a:xfrm>
-            <a:off x="3931920" y="3648456"/>
-            <a:ext cx="4663440" cy="274320"/>
+          <p:cNvPr id="12" name="Text 6"/>
+          <p:cNvSpPr txBox="1"/>
+          <p:nvPr/>
+        </p:nvSpPr>
+        <p:spPr>
+          <a:xfrm>
+            <a:off x="5897880" y="3008376"/>
+            <a:ext cx="2788920" cy="274320"/>
           </a:xfrm>
           <a:prstGeom prst="rect">
             <a:avLst/>
@@ -3279,7 +2857,7 @@
                 <a:ea typeface="Calibri" pitchFamily="34" charset="-122"/>
                 <a:cs typeface="Calibri" pitchFamily="34" charset="-120"/>
               </a:rPr>
-              <a:t>Tests that checked the wrong rule</a:t>
+              <a:t>Lock order removed</a:t>
             </a:r>
             <a:endParaRPr lang="en-US" sz="1250" dirty="0"/>
           </a:p>
@@ -3287,14 +2865,14 @@
       </p:sp>
       <p:sp>
         <p:nvSpPr>
-          <p:cNvPr id="30" name="Text 24"/>
-          <p:cNvSpPr txBox="1"/>
-          <p:nvPr/>
-        </p:nvSpPr>
-        <p:spPr>
-          <a:xfrm>
-            <a:off x="3931920" y="3941064"/>
-            <a:ext cx="4663440" cy="566928"/>
+          <p:cNvPr id="13" name="Text 7"/>
+          <p:cNvSpPr txBox="1"/>
+          <p:nvPr/>
+        </p:nvSpPr>
+        <p:spPr>
+          <a:xfrm>
+            <a:off x="5897880" y="3282696"/>
+            <a:ext cx="2788920" cy="530352"/>
           </a:xfrm>
           <a:prstGeom prst="rect">
             <a:avLst/>
@@ -3312,21 +2890,123 @@
             <a:r>
               <a:rPr lang="en-US" sz="1050" dirty="0">
                 <a:solidFill>
-                  <a:srgbClr val="1B2430"/>
-                </a:solidFill>
-                <a:latin typeface="Calibri" pitchFamily="34" charset="0"/>
-                <a:ea typeface="Calibri" pitchFamily="34" charset="-122"/>
-                <a:cs typeface="Calibri" pitchFamily="34" charset="-120"/>
-              </a:rPr>
-              <a:t>"Insufficient funds" tests used amounts above the daily limit, so the limit fired first. Rewritten to overdraw by exactly 1 kobo.</a:t>
+                  <a:srgbClr val="5B6675"/>
+                </a:solidFill>
+                <a:latin typeface="Calibri" pitchFamily="34" charset="0"/>
+                <a:ea typeface="Calibri" pitchFamily="34" charset="-122"/>
+                <a:cs typeface="Calibri" pitchFamily="34" charset="-120"/>
+              </a:rPr>
+              <a:t>PostgreSQL 40P01 deadlock detected in the A⇄B test</a:t>
             </a:r>
             <a:endParaRPr lang="en-US" sz="1050" dirty="0"/>
           </a:p>
         </p:txBody>
       </p:sp>
-      <p:sp>
-        <p:nvSpPr>
-          <p:cNvPr id="31" name="Text 25"/>
+      <p:pic>
+        <p:nvPicPr>
+          <p:cNvPr id="14" name="Image 3" descr="preencoded.png">    </p:cNvPr>
+          <p:cNvPicPr>
+            <a:picLocks noChangeAspect="1"/>
+          </p:cNvPicPr>
+          <p:nvPr/>
+        </p:nvPicPr>
+        <p:blipFill>
+          <a:blip r:embed="rId5"/>
+          <a:stretch>
+            <a:fillRect/>
+          </a:stretch>
+        </p:blipFill>
+        <p:spPr>
+          <a:xfrm>
+            <a:off x="5486400" y="3886200"/>
+            <a:ext cx="274320" cy="274320"/>
+          </a:xfrm>
+          <a:prstGeom prst="rect">
+            <a:avLst/>
+          </a:prstGeom>
+        </p:spPr>
+      </p:pic>
+      <p:sp>
+        <p:nvSpPr>
+          <p:cNvPr id="15" name="Text 8"/>
+          <p:cNvSpPr txBox="1"/>
+          <p:nvPr/>
+        </p:nvSpPr>
+        <p:spPr>
+          <a:xfrm>
+            <a:off x="5897880" y="3849624"/>
+            <a:ext cx="2788920" cy="274320"/>
+          </a:xfrm>
+          <a:prstGeom prst="rect">
+            <a:avLst/>
+          </a:prstGeom>
+          <a:noFill/>
+          <a:ln/>
+        </p:spPr>
+        <p:txBody>
+          <a:bodyPr wrap="square" lIns="0" tIns="0" rIns="0" bIns="0" rtlCol="0" anchor="t"/>
+          <a:lstStyle/>
+          <a:p>
+            <a:pPr indent="0" marL="0">
+              <a:buNone/>
+            </a:pPr>
+            <a:r>
+              <a:rPr lang="en-US" sz="1250" b="1" dirty="0">
+                <a:solidFill>
+                  <a:srgbClr val="0B1F3A"/>
+                </a:solidFill>
+                <a:latin typeface="Calibri" pitchFamily="34" charset="0"/>
+                <a:ea typeface="Calibri" pitchFamily="34" charset="-122"/>
+                <a:cs typeface="Calibri" pitchFamily="34" charset="-120"/>
+              </a:rPr>
+              <a:t>Also under load</a:t>
+            </a:r>
+            <a:endParaRPr lang="en-US" sz="1250" dirty="0"/>
+          </a:p>
+        </p:txBody>
+      </p:sp>
+      <p:sp>
+        <p:nvSpPr>
+          <p:cNvPr id="16" name="Text 9"/>
+          <p:cNvSpPr txBox="1"/>
+          <p:nvPr/>
+        </p:nvSpPr>
+        <p:spPr>
+          <a:xfrm>
+            <a:off x="5897880" y="4123944"/>
+            <a:ext cx="2788920" cy="530352"/>
+          </a:xfrm>
+          <a:prstGeom prst="rect">
+            <a:avLst/>
+          </a:prstGeom>
+          <a:noFill/>
+          <a:ln/>
+        </p:spPr>
+        <p:txBody>
+          <a:bodyPr wrap="square" lIns="0" tIns="0" rIns="0" bIns="0" rtlCol="0" anchor="t"/>
+          <a:lstStyle/>
+          <a:p>
+            <a:pPr indent="0" marL="0">
+              <a:buNone/>
+            </a:pPr>
+            <a:r>
+              <a:rPr lang="en-US" sz="1050" dirty="0">
+                <a:solidFill>
+                  <a:srgbClr val="5B6675"/>
+                </a:solidFill>
+                <a:latin typeface="Calibri" pitchFamily="34" charset="0"/>
+                <a:ea typeface="Calibri" pitchFamily="34" charset="-122"/>
+                <a:cs typeface="Calibri" pitchFamily="34" charset="-120"/>
+              </a:rPr>
+              <a:t>200 opposing transfers conserve money; 20 senders → 1 wallet all land</a:t>
+            </a:r>
+            <a:endParaRPr lang="en-US" sz="1050" dirty="0"/>
+          </a:p>
+        </p:txBody>
+      </p:sp>
+      <p:sp>
+        <p:nvSpPr>
+          <p:cNvPr id="17" name="Text 10"/>
           <p:cNvSpPr txBox="1"/>
           <p:nvPr/>
         </p:nvSpPr>
@@ -3365,7 +3045,7 @@
       </p:sp>
       <p:sp>
         <p:nvSpPr>
-          <p:cNvPr id="32" name="Text 26"/>
+          <p:cNvPr id="18" name="Text 11"/>
           <p:cNvSpPr txBox="1"/>
           <p:nvPr/>
         </p:nvSpPr>
@@ -3413,6 +3093,1027 @@
 <file path=ppt/slides/slide11.xml><?xml version="1.0" encoding="utf-8"?>
 <p:sld xmlns:a="http://schemas.openxmlformats.org/drawingml/2006/main" xmlns:r="http://schemas.openxmlformats.org/officeDocument/2006/relationships" xmlns:p="http://schemas.openxmlformats.org/presentationml/2006/main">
   <p:cSld name="Slide 11">
+    <p:bg>
+      <p:bgPr>
+        <a:solidFill>
+          <a:srgbClr val="FFFFFF"/>
+        </a:solidFill>
+      </p:bgPr>
+    </p:bg>
+    <p:spTree>
+      <p:nvGrpSpPr>
+        <p:cNvPr id="1" name=""/>
+        <p:cNvGrpSpPr/>
+        <p:nvPr/>
+      </p:nvGrpSpPr>
+      <p:grpSpPr>
+        <a:xfrm>
+          <a:off x="0" y="0"/>
+          <a:ext cx="0" cy="0"/>
+          <a:chOff x="0" y="0"/>
+          <a:chExt cx="0" cy="0"/>
+        </a:xfrm>
+      </p:grpSpPr>
+      <p:sp>
+        <p:nvSpPr>
+          <p:cNvPr id="2" name="Text 0"/>
+          <p:cNvSpPr txBox="1"/>
+          <p:nvPr/>
+        </p:nvSpPr>
+        <p:spPr>
+          <a:xfrm>
+            <a:off x="457200" y="274320"/>
+            <a:ext cx="8229600" cy="228600"/>
+          </a:xfrm>
+          <a:prstGeom prst="rect">
+            <a:avLst/>
+          </a:prstGeom>
+          <a:noFill/>
+          <a:ln/>
+        </p:spPr>
+        <p:txBody>
+          <a:bodyPr wrap="square" lIns="0" tIns="0" rIns="0" bIns="0" rtlCol="0" anchor="t"/>
+          <a:lstStyle/>
+          <a:p>
+            <a:pPr indent="0" marL="0">
+              <a:buNone/>
+            </a:pPr>
+            <a:r>
+              <a:rPr lang="en-US" sz="1000" b="1" spc="200" kern="0" dirty="0">
+                <a:solidFill>
+                  <a:srgbClr val="D4A63A"/>
+                </a:solidFill>
+                <a:latin typeface="Calibri" pitchFamily="34" charset="0"/>
+                <a:ea typeface="Calibri" pitchFamily="34" charset="-122"/>
+                <a:cs typeface="Calibri" pitchFamily="34" charset="-120"/>
+              </a:rPr>
+              <a:t>AI FLUENCY &amp; JUDGEMENT</a:t>
+            </a:r>
+            <a:endParaRPr lang="en-US" sz="1000" dirty="0"/>
+          </a:p>
+        </p:txBody>
+      </p:sp>
+      <p:sp>
+        <p:nvSpPr>
+          <p:cNvPr id="3" name="Text 1"/>
+          <p:cNvSpPr txBox="1"/>
+          <p:nvPr/>
+        </p:nvSpPr>
+        <p:spPr>
+          <a:xfrm>
+            <a:off x="457200" y="502920"/>
+            <a:ext cx="8229600" cy="548640"/>
+          </a:xfrm>
+          <a:prstGeom prst="rect">
+            <a:avLst/>
+          </a:prstGeom>
+          <a:noFill/>
+          <a:ln/>
+        </p:spPr>
+        <p:txBody>
+          <a:bodyPr wrap="square" lIns="0" tIns="0" rIns="0" bIns="0" rtlCol="0" anchor="ctr"/>
+          <a:lstStyle/>
+          <a:p>
+            <a:pPr indent="0" marL="0">
+              <a:buNone/>
+            </a:pPr>
+            <a:r>
+              <a:rPr lang="en-US" sz="2400" b="1" dirty="0">
+                <a:solidFill>
+                  <a:srgbClr val="0B1F3A"/>
+                </a:solidFill>
+                <a:latin typeface="Cambria" pitchFamily="34" charset="0"/>
+                <a:ea typeface="Cambria" pitchFamily="34" charset="-122"/>
+                <a:cs typeface="Cambria" pitchFamily="34" charset="-120"/>
+              </a:rPr>
+              <a:t>AI wrote fast; checks caught its mistakes</a:t>
+            </a:r>
+            <a:endParaRPr lang="en-US" sz="2400" dirty="0"/>
+          </a:p>
+        </p:txBody>
+      </p:sp>
+      <p:sp>
+        <p:nvSpPr>
+          <p:cNvPr id="4" name="Shape 2"/>
+          <p:cNvSpPr/>
+          <p:nvPr/>
+        </p:nvSpPr>
+        <p:spPr>
+          <a:xfrm>
+            <a:off x="457200" y="1325880"/>
+            <a:ext cx="2468880" cy="3291840"/>
+          </a:xfrm>
+          <a:prstGeom prst="roundRect">
+            <a:avLst>
+              <a:gd name="adj" fmla="val 2963"/>
+            </a:avLst>
+          </a:prstGeom>
+          <a:solidFill>
+            <a:srgbClr val="0B1F3A"/>
+          </a:solidFill>
+          <a:ln w="12700">
+            <a:solidFill>
+              <a:srgbClr val="0B1F3A"/>
+            </a:solidFill>
+            <a:prstDash val="solid"/>
+          </a:ln>
+        </p:spPr>
+      </p:sp>
+      <p:sp>
+        <p:nvSpPr>
+          <p:cNvPr id="5" name="Shape 3"/>
+          <p:cNvSpPr/>
+          <p:nvPr/>
+        </p:nvSpPr>
+        <p:spPr>
+          <a:xfrm>
+            <a:off x="640080" y="1463040"/>
+            <a:ext cx="502920" cy="502920"/>
+          </a:xfrm>
+          <a:prstGeom prst="ellipse">
+            <a:avLst/>
+          </a:prstGeom>
+          <a:solidFill>
+            <a:srgbClr val="D4A63A"/>
+          </a:solidFill>
+          <a:ln w="12700">
+            <a:solidFill>
+              <a:srgbClr val="D4A63A"/>
+            </a:solidFill>
+            <a:prstDash val="solid"/>
+          </a:ln>
+        </p:spPr>
+      </p:sp>
+      <p:pic>
+        <p:nvPicPr>
+          <p:cNvPr id="6" name="Image 0" descr="preencoded.png">    </p:cNvPr>
+          <p:cNvPicPr>
+            <a:picLocks noChangeAspect="1"/>
+          </p:cNvPicPr>
+          <p:nvPr/>
+        </p:nvPicPr>
+        <p:blipFill>
+          <a:blip r:embed="rId1"/>
+          <a:stretch>
+            <a:fillRect/>
+          </a:stretch>
+        </p:blipFill>
+        <p:spPr>
+          <a:xfrm>
+            <a:off x="770839" y="1593799"/>
+            <a:ext cx="241402" cy="241402"/>
+          </a:xfrm>
+          <a:prstGeom prst="rect">
+            <a:avLst/>
+          </a:prstGeom>
+        </p:spPr>
+      </p:pic>
+      <p:sp>
+        <p:nvSpPr>
+          <p:cNvPr id="7" name="Text 4"/>
+          <p:cNvSpPr txBox="1"/>
+          <p:nvPr/>
+        </p:nvSpPr>
+        <p:spPr>
+          <a:xfrm>
+            <a:off x="640080" y="2103120"/>
+            <a:ext cx="2103120" cy="274320"/>
+          </a:xfrm>
+          <a:prstGeom prst="rect">
+            <a:avLst/>
+          </a:prstGeom>
+          <a:noFill/>
+          <a:ln/>
+        </p:spPr>
+        <p:txBody>
+          <a:bodyPr wrap="square" lIns="0" tIns="0" rIns="0" bIns="0" rtlCol="0" anchor="t"/>
+          <a:lstStyle/>
+          <a:p>
+            <a:pPr indent="0" marL="0">
+              <a:buNone/>
+            </a:pPr>
+            <a:r>
+              <a:rPr lang="en-US" sz="1400" b="1" dirty="0">
+                <a:solidFill>
+                  <a:srgbClr val="FFFFFF"/>
+                </a:solidFill>
+                <a:latin typeface="Calibri" pitchFamily="34" charset="0"/>
+                <a:ea typeface="Calibri" pitchFamily="34" charset="-122"/>
+                <a:cs typeface="Calibri" pitchFamily="34" charset="-120"/>
+              </a:rPr>
+              <a:t>How I used it</a:t>
+            </a:r>
+            <a:endParaRPr lang="en-US" sz="1400" dirty="0"/>
+          </a:p>
+        </p:txBody>
+      </p:sp>
+      <p:sp>
+        <p:nvSpPr>
+          <p:cNvPr id="8" name="Shape 5"/>
+          <p:cNvSpPr/>
+          <p:nvPr/>
+        </p:nvSpPr>
+        <p:spPr>
+          <a:xfrm>
+            <a:off x="640080" y="2523490"/>
+            <a:ext cx="64008" cy="64008"/>
+          </a:xfrm>
+          <a:prstGeom prst="ellipse">
+            <a:avLst/>
+          </a:prstGeom>
+          <a:solidFill>
+            <a:srgbClr val="D4A63A"/>
+          </a:solidFill>
+          <a:ln w="12700">
+            <a:solidFill>
+              <a:srgbClr val="D4A63A"/>
+            </a:solidFill>
+            <a:prstDash val="solid"/>
+          </a:ln>
+        </p:spPr>
+      </p:sp>
+      <p:sp>
+        <p:nvSpPr>
+          <p:cNvPr id="9" name="Text 6"/>
+          <p:cNvSpPr txBox="1"/>
+          <p:nvPr/>
+        </p:nvSpPr>
+        <p:spPr>
+          <a:xfrm>
+            <a:off x="822960" y="2468880"/>
+            <a:ext cx="1965960" cy="340868"/>
+          </a:xfrm>
+          <a:prstGeom prst="rect">
+            <a:avLst/>
+          </a:prstGeom>
+          <a:noFill/>
+          <a:ln/>
+        </p:spPr>
+        <p:txBody>
+          <a:bodyPr wrap="square" lIns="0" tIns="0" rIns="0" bIns="0" rtlCol="0" anchor="t"/>
+          <a:lstStyle/>
+          <a:p>
+            <a:pPr indent="0" marL="0">
+              <a:buNone/>
+            </a:pPr>
+            <a:r>
+              <a:rPr lang="en-US" sz="1100" dirty="0">
+                <a:solidFill>
+                  <a:srgbClr val="FFFFFF"/>
+                </a:solidFill>
+                <a:latin typeface="Calibri" pitchFamily="34" charset="0"/>
+                <a:ea typeface="Calibri" pitchFamily="34" charset="-122"/>
+                <a:cs typeface="Calibri" pitchFamily="34" charset="-120"/>
+              </a:rPr>
+              <a:t>Plan first, approved before code</a:t>
+            </a:r>
+            <a:endParaRPr lang="en-US" sz="1100" dirty="0"/>
+          </a:p>
+        </p:txBody>
+      </p:sp>
+      <p:sp>
+        <p:nvSpPr>
+          <p:cNvPr id="10" name="Shape 7"/>
+          <p:cNvSpPr/>
+          <p:nvPr/>
+        </p:nvSpPr>
+        <p:spPr>
+          <a:xfrm>
+            <a:off x="640080" y="2974086"/>
+            <a:ext cx="64008" cy="64008"/>
+          </a:xfrm>
+          <a:prstGeom prst="ellipse">
+            <a:avLst/>
+          </a:prstGeom>
+          <a:solidFill>
+            <a:srgbClr val="D4A63A"/>
+          </a:solidFill>
+          <a:ln w="12700">
+            <a:solidFill>
+              <a:srgbClr val="D4A63A"/>
+            </a:solidFill>
+            <a:prstDash val="solid"/>
+          </a:ln>
+        </p:spPr>
+      </p:sp>
+      <p:sp>
+        <p:nvSpPr>
+          <p:cNvPr id="11" name="Text 8"/>
+          <p:cNvSpPr txBox="1"/>
+          <p:nvPr/>
+        </p:nvSpPr>
+        <p:spPr>
+          <a:xfrm>
+            <a:off x="822960" y="2919476"/>
+            <a:ext cx="1965960" cy="340868"/>
+          </a:xfrm>
+          <a:prstGeom prst="rect">
+            <a:avLst/>
+          </a:prstGeom>
+          <a:noFill/>
+          <a:ln/>
+        </p:spPr>
+        <p:txBody>
+          <a:bodyPr wrap="square" lIns="0" tIns="0" rIns="0" bIns="0" rtlCol="0" anchor="t"/>
+          <a:lstStyle/>
+          <a:p>
+            <a:pPr indent="0" marL="0">
+              <a:buNone/>
+            </a:pPr>
+            <a:r>
+              <a:rPr lang="en-US" sz="1100" dirty="0">
+                <a:solidFill>
+                  <a:srgbClr val="FFFFFF"/>
+                </a:solidFill>
+                <a:latin typeface="Calibri" pitchFamily="34" charset="0"/>
+                <a:ea typeface="Calibri" pitchFamily="34" charset="-122"/>
+                <a:cs typeface="Calibri" pitchFamily="34" charset="-120"/>
+              </a:rPr>
+              <a:t>Boilerplate: EF mappings, Swagger, Docker, CI</a:t>
+            </a:r>
+            <a:endParaRPr lang="en-US" sz="1100" dirty="0"/>
+          </a:p>
+        </p:txBody>
+      </p:sp>
+      <p:sp>
+        <p:nvSpPr>
+          <p:cNvPr id="12" name="Shape 9"/>
+          <p:cNvSpPr/>
+          <p:nvPr/>
+        </p:nvSpPr>
+        <p:spPr>
+          <a:xfrm>
+            <a:off x="640080" y="3424682"/>
+            <a:ext cx="64008" cy="64008"/>
+          </a:xfrm>
+          <a:prstGeom prst="ellipse">
+            <a:avLst/>
+          </a:prstGeom>
+          <a:solidFill>
+            <a:srgbClr val="D4A63A"/>
+          </a:solidFill>
+          <a:ln w="12700">
+            <a:solidFill>
+              <a:srgbClr val="D4A63A"/>
+            </a:solidFill>
+            <a:prstDash val="solid"/>
+          </a:ln>
+        </p:spPr>
+      </p:sp>
+      <p:sp>
+        <p:nvSpPr>
+          <p:cNvPr id="13" name="Text 10"/>
+          <p:cNvSpPr txBox="1"/>
+          <p:nvPr/>
+        </p:nvSpPr>
+        <p:spPr>
+          <a:xfrm>
+            <a:off x="822960" y="3370072"/>
+            <a:ext cx="1965960" cy="170434"/>
+          </a:xfrm>
+          <a:prstGeom prst="rect">
+            <a:avLst/>
+          </a:prstGeom>
+          <a:noFill/>
+          <a:ln/>
+        </p:spPr>
+        <p:txBody>
+          <a:bodyPr wrap="square" lIns="0" tIns="0" rIns="0" bIns="0" rtlCol="0" anchor="t"/>
+          <a:lstStyle/>
+          <a:p>
+            <a:pPr indent="0" marL="0">
+              <a:buNone/>
+            </a:pPr>
+            <a:r>
+              <a:rPr lang="en-US" sz="1100" dirty="0">
+                <a:solidFill>
+                  <a:srgbClr val="FFFFFF"/>
+                </a:solidFill>
+                <a:latin typeface="Calibri" pitchFamily="34" charset="0"/>
+                <a:ea typeface="Calibri" pitchFamily="34" charset="-122"/>
+                <a:cs typeface="Calibri" pitchFamily="34" charset="-120"/>
+              </a:rPr>
+              <a:t>Broad first test list</a:t>
+            </a:r>
+            <a:endParaRPr lang="en-US" sz="1100" dirty="0"/>
+          </a:p>
+        </p:txBody>
+      </p:sp>
+      <p:sp>
+        <p:nvSpPr>
+          <p:cNvPr id="14" name="Shape 11"/>
+          <p:cNvSpPr/>
+          <p:nvPr/>
+        </p:nvSpPr>
+        <p:spPr>
+          <a:xfrm>
+            <a:off x="640080" y="3704844"/>
+            <a:ext cx="64008" cy="64008"/>
+          </a:xfrm>
+          <a:prstGeom prst="ellipse">
+            <a:avLst/>
+          </a:prstGeom>
+          <a:solidFill>
+            <a:srgbClr val="D4A63A"/>
+          </a:solidFill>
+          <a:ln w="12700">
+            <a:solidFill>
+              <a:srgbClr val="D4A63A"/>
+            </a:solidFill>
+            <a:prstDash val="solid"/>
+          </a:ln>
+        </p:spPr>
+      </p:sp>
+      <p:sp>
+        <p:nvSpPr>
+          <p:cNvPr id="15" name="Text 12"/>
+          <p:cNvSpPr txBox="1"/>
+          <p:nvPr/>
+        </p:nvSpPr>
+        <p:spPr>
+          <a:xfrm>
+            <a:off x="822960" y="3650234"/>
+            <a:ext cx="1965960" cy="340868"/>
+          </a:xfrm>
+          <a:prstGeom prst="rect">
+            <a:avLst/>
+          </a:prstGeom>
+          <a:noFill/>
+          <a:ln/>
+        </p:spPr>
+        <p:txBody>
+          <a:bodyPr wrap="square" lIns="0" tIns="0" rIns="0" bIns="0" rtlCol="0" anchor="t"/>
+          <a:lstStyle/>
+          <a:p>
+            <a:pPr indent="0" marL="0">
+              <a:buNone/>
+            </a:pPr>
+            <a:r>
+              <a:rPr lang="en-US" sz="1100" dirty="0">
+                <a:solidFill>
+                  <a:srgbClr val="FFFFFF"/>
+                </a:solidFill>
+                <a:latin typeface="Calibri" pitchFamily="34" charset="0"/>
+                <a:ea typeface="Calibri" pitchFamily="34" charset="-122"/>
+                <a:cs typeface="Calibri" pitchFamily="34" charset="-120"/>
+              </a:rPr>
+              <a:t>Nothing accepted without a test or a log to prove it</a:t>
+            </a:r>
+            <a:endParaRPr lang="en-US" sz="1100" dirty="0"/>
+          </a:p>
+        </p:txBody>
+      </p:sp>
+      <p:sp>
+        <p:nvSpPr>
+          <p:cNvPr id="16" name="Shape 13"/>
+          <p:cNvSpPr/>
+          <p:nvPr/>
+        </p:nvSpPr>
+        <p:spPr>
+          <a:xfrm>
+            <a:off x="3154680" y="1325880"/>
+            <a:ext cx="5532120" cy="987552"/>
+          </a:xfrm>
+          <a:prstGeom prst="roundRect">
+            <a:avLst>
+              <a:gd name="adj" fmla="val 7407"/>
+            </a:avLst>
+          </a:prstGeom>
+          <a:solidFill>
+            <a:srgbClr val="F3F5F9"/>
+          </a:solidFill>
+          <a:ln w="12700">
+            <a:solidFill>
+              <a:srgbClr val="F3F5F9"/>
+            </a:solidFill>
+            <a:prstDash val="solid"/>
+          </a:ln>
+        </p:spPr>
+      </p:sp>
+      <p:sp>
+        <p:nvSpPr>
+          <p:cNvPr id="17" name="Shape 14"/>
+          <p:cNvSpPr/>
+          <p:nvPr/>
+        </p:nvSpPr>
+        <p:spPr>
+          <a:xfrm>
+            <a:off x="3291840" y="1527048"/>
+            <a:ext cx="457200" cy="457200"/>
+          </a:xfrm>
+          <a:prstGeom prst="ellipse">
+            <a:avLst/>
+          </a:prstGeom>
+          <a:solidFill>
+            <a:srgbClr val="B83A2E"/>
+          </a:solidFill>
+          <a:ln w="12700">
+            <a:solidFill>
+              <a:srgbClr val="B83A2E"/>
+            </a:solidFill>
+            <a:prstDash val="solid"/>
+          </a:ln>
+        </p:spPr>
+      </p:sp>
+      <p:pic>
+        <p:nvPicPr>
+          <p:cNvPr id="18" name="Image 1" descr="preencoded.png">    </p:cNvPr>
+          <p:cNvPicPr>
+            <a:picLocks noChangeAspect="1"/>
+          </p:cNvPicPr>
+          <p:nvPr/>
+        </p:nvPicPr>
+        <p:blipFill>
+          <a:blip r:embed="rId2"/>
+          <a:stretch>
+            <a:fillRect/>
+          </a:stretch>
+        </p:blipFill>
+        <p:spPr>
+          <a:xfrm>
+            <a:off x="3410712" y="1645920"/>
+            <a:ext cx="219456" cy="219456"/>
+          </a:xfrm>
+          <a:prstGeom prst="rect">
+            <a:avLst/>
+          </a:prstGeom>
+        </p:spPr>
+      </p:pic>
+      <p:sp>
+        <p:nvSpPr>
+          <p:cNvPr id="19" name="Text 15"/>
+          <p:cNvSpPr txBox="1"/>
+          <p:nvPr/>
+        </p:nvSpPr>
+        <p:spPr>
+          <a:xfrm>
+            <a:off x="3931920" y="1417320"/>
+            <a:ext cx="4663440" cy="274320"/>
+          </a:xfrm>
+          <a:prstGeom prst="rect">
+            <a:avLst/>
+          </a:prstGeom>
+          <a:noFill/>
+          <a:ln/>
+        </p:spPr>
+        <p:txBody>
+          <a:bodyPr wrap="square" lIns="0" tIns="0" rIns="0" bIns="0" rtlCol="0" anchor="t"/>
+          <a:lstStyle/>
+          <a:p>
+            <a:pPr indent="0" marL="0">
+              <a:buNone/>
+            </a:pPr>
+            <a:r>
+              <a:rPr lang="en-US" sz="1250" b="1" dirty="0">
+                <a:solidFill>
+                  <a:srgbClr val="0B1F3A"/>
+                </a:solidFill>
+                <a:latin typeface="Calibri" pitchFamily="34" charset="0"/>
+                <a:ea typeface="Calibri" pitchFamily="34" charset="-122"/>
+                <a:cs typeface="Calibri" pitchFamily="34" charset="-120"/>
+              </a:rPr>
+              <a:t>Errors stopped being Problem Details</a:t>
+            </a:r>
+            <a:endParaRPr lang="en-US" sz="1250" dirty="0"/>
+          </a:p>
+        </p:txBody>
+      </p:sp>
+      <p:sp>
+        <p:nvSpPr>
+          <p:cNvPr id="20" name="Text 16"/>
+          <p:cNvSpPr txBox="1"/>
+          <p:nvPr/>
+        </p:nvSpPr>
+        <p:spPr>
+          <a:xfrm>
+            <a:off x="3931920" y="1709928"/>
+            <a:ext cx="4663440" cy="566928"/>
+          </a:xfrm>
+          <a:prstGeom prst="rect">
+            <a:avLst/>
+          </a:prstGeom>
+          <a:noFill/>
+          <a:ln/>
+        </p:spPr>
+        <p:txBody>
+          <a:bodyPr wrap="square" lIns="0" tIns="0" rIns="0" bIns="0" rtlCol="0" anchor="t"/>
+          <a:lstStyle/>
+          <a:p>
+            <a:pPr indent="0" marL="0">
+              <a:buNone/>
+            </a:pPr>
+            <a:r>
+              <a:rPr lang="en-US" sz="1050" dirty="0">
+                <a:solidFill>
+                  <a:srgbClr val="1B2430"/>
+                </a:solidFill>
+                <a:latin typeface="Calibri" pitchFamily="34" charset="0"/>
+                <a:ea typeface="Calibri" pitchFamily="34" charset="-122"/>
+                <a:cs typeface="Calibri" pitchFamily="34" charset="-120"/>
+              </a:rPr>
+              <a:t>[Produces("application/json")] overrode 400 responses. Caught by a media-type assertion (5 of 7 cases failed). Removed.</a:t>
+            </a:r>
+            <a:endParaRPr lang="en-US" sz="1050" dirty="0"/>
+          </a:p>
+        </p:txBody>
+      </p:sp>
+      <p:sp>
+        <p:nvSpPr>
+          <p:cNvPr id="21" name="Shape 17"/>
+          <p:cNvSpPr/>
+          <p:nvPr/>
+        </p:nvSpPr>
+        <p:spPr>
+          <a:xfrm>
+            <a:off x="3154680" y="2441448"/>
+            <a:ext cx="5532120" cy="987552"/>
+          </a:xfrm>
+          <a:prstGeom prst="roundRect">
+            <a:avLst>
+              <a:gd name="adj" fmla="val 7407"/>
+            </a:avLst>
+          </a:prstGeom>
+          <a:solidFill>
+            <a:srgbClr val="F3F5F9"/>
+          </a:solidFill>
+          <a:ln w="12700">
+            <a:solidFill>
+              <a:srgbClr val="F3F5F9"/>
+            </a:solidFill>
+            <a:prstDash val="solid"/>
+          </a:ln>
+        </p:spPr>
+      </p:sp>
+      <p:sp>
+        <p:nvSpPr>
+          <p:cNvPr id="22" name="Shape 18"/>
+          <p:cNvSpPr/>
+          <p:nvPr/>
+        </p:nvSpPr>
+        <p:spPr>
+          <a:xfrm>
+            <a:off x="3291840" y="2642616"/>
+            <a:ext cx="457200" cy="457200"/>
+          </a:xfrm>
+          <a:prstGeom prst="ellipse">
+            <a:avLst/>
+          </a:prstGeom>
+          <a:solidFill>
+            <a:srgbClr val="B83A2E"/>
+          </a:solidFill>
+          <a:ln w="12700">
+            <a:solidFill>
+              <a:srgbClr val="B83A2E"/>
+            </a:solidFill>
+            <a:prstDash val="solid"/>
+          </a:ln>
+        </p:spPr>
+      </p:sp>
+      <p:pic>
+        <p:nvPicPr>
+          <p:cNvPr id="23" name="Image 2" descr="preencoded.png">    </p:cNvPr>
+          <p:cNvPicPr>
+            <a:picLocks noChangeAspect="1"/>
+          </p:cNvPicPr>
+          <p:nvPr/>
+        </p:nvPicPr>
+        <p:blipFill>
+          <a:blip r:embed="rId3"/>
+          <a:stretch>
+            <a:fillRect/>
+          </a:stretch>
+        </p:blipFill>
+        <p:spPr>
+          <a:xfrm>
+            <a:off x="3410712" y="2761488"/>
+            <a:ext cx="219456" cy="219456"/>
+          </a:xfrm>
+          <a:prstGeom prst="rect">
+            <a:avLst/>
+          </a:prstGeom>
+        </p:spPr>
+      </p:pic>
+      <p:sp>
+        <p:nvSpPr>
+          <p:cNvPr id="24" name="Text 19"/>
+          <p:cNvSpPr txBox="1"/>
+          <p:nvPr/>
+        </p:nvSpPr>
+        <p:spPr>
+          <a:xfrm>
+            <a:off x="3931920" y="2532888"/>
+            <a:ext cx="4663440" cy="274320"/>
+          </a:xfrm>
+          <a:prstGeom prst="rect">
+            <a:avLst/>
+          </a:prstGeom>
+          <a:noFill/>
+          <a:ln/>
+        </p:spPr>
+        <p:txBody>
+          <a:bodyPr wrap="square" lIns="0" tIns="0" rIns="0" bIns="0" rtlCol="0" anchor="t"/>
+          <a:lstStyle/>
+          <a:p>
+            <a:pPr indent="0" marL="0">
+              <a:buNone/>
+            </a:pPr>
+            <a:r>
+              <a:rPr lang="en-US" sz="1250" b="1" dirty="0">
+                <a:solidFill>
+                  <a:srgbClr val="0B1F3A"/>
+                </a:solidFill>
+                <a:latin typeface="Calibri" pitchFamily="34" charset="0"/>
+                <a:ea typeface="Calibri" pitchFamily="34" charset="-122"/>
+                <a:cs typeface="Calibri" pitchFamily="34" charset="-120"/>
+              </a:rPr>
+              <a:t>Every declined transfer logged as an ERROR</a:t>
+            </a:r>
+            <a:endParaRPr lang="en-US" sz="1250" dirty="0"/>
+          </a:p>
+        </p:txBody>
+      </p:sp>
+      <p:sp>
+        <p:nvSpPr>
+          <p:cNvPr id="25" name="Text 20"/>
+          <p:cNvSpPr txBox="1"/>
+          <p:nvPr/>
+        </p:nvSpPr>
+        <p:spPr>
+          <a:xfrm>
+            <a:off x="3931920" y="2825496"/>
+            <a:ext cx="4663440" cy="566928"/>
+          </a:xfrm>
+          <a:prstGeom prst="rect">
+            <a:avLst/>
+          </a:prstGeom>
+          <a:noFill/>
+          <a:ln/>
+        </p:spPr>
+        <p:txBody>
+          <a:bodyPr wrap="square" lIns="0" tIns="0" rIns="0" bIns="0" rtlCol="0" anchor="t"/>
+          <a:lstStyle/>
+          <a:p>
+            <a:pPr indent="0" marL="0">
+              <a:buNone/>
+            </a:pPr>
+            <a:r>
+              <a:rPr lang="en-US" sz="1050" dirty="0">
+                <a:solidFill>
+                  <a:srgbClr val="1B2430"/>
+                </a:solidFill>
+                <a:latin typeface="Calibri" pitchFamily="34" charset="0"/>
+                <a:ea typeface="Calibri" pitchFamily="34" charset="-122"/>
+                <a:cs typeface="Calibri" pitchFamily="34" charset="-120"/>
+              </a:rPr>
+              <a:t>.NET 8 exception middleware logs all exceptions at Error — alert fatigue in a bank. Caught reading logs; fixed with an MVC filter → 0 error lines.</a:t>
+            </a:r>
+            <a:endParaRPr lang="en-US" sz="1050" dirty="0"/>
+          </a:p>
+        </p:txBody>
+      </p:sp>
+      <p:sp>
+        <p:nvSpPr>
+          <p:cNvPr id="26" name="Shape 21"/>
+          <p:cNvSpPr/>
+          <p:nvPr/>
+        </p:nvSpPr>
+        <p:spPr>
+          <a:xfrm>
+            <a:off x="3154680" y="3557016"/>
+            <a:ext cx="5532120" cy="987552"/>
+          </a:xfrm>
+          <a:prstGeom prst="roundRect">
+            <a:avLst>
+              <a:gd name="adj" fmla="val 7407"/>
+            </a:avLst>
+          </a:prstGeom>
+          <a:solidFill>
+            <a:srgbClr val="F3F5F9"/>
+          </a:solidFill>
+          <a:ln w="12700">
+            <a:solidFill>
+              <a:srgbClr val="F3F5F9"/>
+            </a:solidFill>
+            <a:prstDash val="solid"/>
+          </a:ln>
+        </p:spPr>
+      </p:sp>
+      <p:sp>
+        <p:nvSpPr>
+          <p:cNvPr id="27" name="Shape 22"/>
+          <p:cNvSpPr/>
+          <p:nvPr/>
+        </p:nvSpPr>
+        <p:spPr>
+          <a:xfrm>
+            <a:off x="3291840" y="3758184"/>
+            <a:ext cx="457200" cy="457200"/>
+          </a:xfrm>
+          <a:prstGeom prst="ellipse">
+            <a:avLst/>
+          </a:prstGeom>
+          <a:solidFill>
+            <a:srgbClr val="B83A2E"/>
+          </a:solidFill>
+          <a:ln w="12700">
+            <a:solidFill>
+              <a:srgbClr val="B83A2E"/>
+            </a:solidFill>
+            <a:prstDash val="solid"/>
+          </a:ln>
+        </p:spPr>
+      </p:sp>
+      <p:pic>
+        <p:nvPicPr>
+          <p:cNvPr id="28" name="Image 3" descr="preencoded.png">    </p:cNvPr>
+          <p:cNvPicPr>
+            <a:picLocks noChangeAspect="1"/>
+          </p:cNvPicPr>
+          <p:nvPr/>
+        </p:nvPicPr>
+        <p:blipFill>
+          <a:blip r:embed="rId4"/>
+          <a:stretch>
+            <a:fillRect/>
+          </a:stretch>
+        </p:blipFill>
+        <p:spPr>
+          <a:xfrm>
+            <a:off x="3410712" y="3877056"/>
+            <a:ext cx="219456" cy="219456"/>
+          </a:xfrm>
+          <a:prstGeom prst="rect">
+            <a:avLst/>
+          </a:prstGeom>
+        </p:spPr>
+      </p:pic>
+      <p:sp>
+        <p:nvSpPr>
+          <p:cNvPr id="29" name="Text 23"/>
+          <p:cNvSpPr txBox="1"/>
+          <p:nvPr/>
+        </p:nvSpPr>
+        <p:spPr>
+          <a:xfrm>
+            <a:off x="3931920" y="3648456"/>
+            <a:ext cx="4663440" cy="274320"/>
+          </a:xfrm>
+          <a:prstGeom prst="rect">
+            <a:avLst/>
+          </a:prstGeom>
+          <a:noFill/>
+          <a:ln/>
+        </p:spPr>
+        <p:txBody>
+          <a:bodyPr wrap="square" lIns="0" tIns="0" rIns="0" bIns="0" rtlCol="0" anchor="t"/>
+          <a:lstStyle/>
+          <a:p>
+            <a:pPr indent="0" marL="0">
+              <a:buNone/>
+            </a:pPr>
+            <a:r>
+              <a:rPr lang="en-US" sz="1250" b="1" dirty="0">
+                <a:solidFill>
+                  <a:srgbClr val="0B1F3A"/>
+                </a:solidFill>
+                <a:latin typeface="Calibri" pitchFamily="34" charset="0"/>
+                <a:ea typeface="Calibri" pitchFamily="34" charset="-122"/>
+                <a:cs typeface="Calibri" pitchFamily="34" charset="-120"/>
+              </a:rPr>
+              <a:t>A smoke check that passed for the wrong reason</a:t>
+            </a:r>
+            <a:endParaRPr lang="en-US" sz="1250" dirty="0"/>
+          </a:p>
+        </p:txBody>
+      </p:sp>
+      <p:sp>
+        <p:nvSpPr>
+          <p:cNvPr id="30" name="Text 24"/>
+          <p:cNvSpPr txBox="1"/>
+          <p:nvPr/>
+        </p:nvSpPr>
+        <p:spPr>
+          <a:xfrm>
+            <a:off x="3931920" y="3941064"/>
+            <a:ext cx="4663440" cy="566928"/>
+          </a:xfrm>
+          <a:prstGeom prst="rect">
+            <a:avLst/>
+          </a:prstGeom>
+          <a:noFill/>
+          <a:ln/>
+        </p:spPr>
+        <p:txBody>
+          <a:bodyPr wrap="square" lIns="0" tIns="0" rIns="0" bIns="0" rtlCol="0" anchor="t"/>
+          <a:lstStyle/>
+          <a:p>
+            <a:pPr indent="0" marL="0">
+              <a:buNone/>
+            </a:pPr>
+            <a:r>
+              <a:rPr lang="en-US" sz="1050" dirty="0">
+                <a:solidFill>
+                  <a:srgbClr val="1B2430"/>
+                </a:solidFill>
+                <a:latin typeface="Calibri" pitchFamily="34" charset="0"/>
+                <a:ea typeface="Calibri" pitchFamily="34" charset="-122"/>
+                <a:cs typeface="Calibri" pitchFamily="34" charset="-120"/>
+              </a:rPr>
+              <a:t>Inline JSON in the AI's bash script was brace-expanded by macOS bash 3.2 into 3 failed requests, and the check compared two failures. Caught via request logs; bodies now built with jq.</a:t>
+            </a:r>
+            <a:endParaRPr lang="en-US" sz="1050" dirty="0"/>
+          </a:p>
+        </p:txBody>
+      </p:sp>
+      <p:sp>
+        <p:nvSpPr>
+          <p:cNvPr id="31" name="Text 25"/>
+          <p:cNvSpPr txBox="1"/>
+          <p:nvPr/>
+        </p:nvSpPr>
+        <p:spPr>
+          <a:xfrm>
+            <a:off x="457200" y="4828032"/>
+            <a:ext cx="5486400" cy="182880"/>
+          </a:xfrm>
+          <a:prstGeom prst="rect">
+            <a:avLst/>
+          </a:prstGeom>
+          <a:noFill/>
+          <a:ln/>
+        </p:spPr>
+        <p:txBody>
+          <a:bodyPr wrap="square" lIns="0" tIns="0" rIns="0" bIns="0" rtlCol="0" anchor="t"/>
+          <a:lstStyle/>
+          <a:p>
+            <a:pPr indent="0" marL="0">
+              <a:buNone/>
+            </a:pPr>
+            <a:r>
+              <a:rPr lang="en-US" sz="800" dirty="0">
+                <a:solidFill>
+                  <a:srgbClr val="5B6675"/>
+                </a:solidFill>
+                <a:latin typeface="Calibri" pitchFamily="34" charset="0"/>
+                <a:ea typeface="Calibri" pitchFamily="34" charset="-122"/>
+                <a:cs typeface="Calibri" pitchFamily="34" charset="-120"/>
+              </a:rPr>
+              <a:t>NovaWallet Ledger Service  ·  Ikenna Odoh</a:t>
+            </a:r>
+            <a:endParaRPr lang="en-US" sz="800" dirty="0"/>
+          </a:p>
+        </p:txBody>
+      </p:sp>
+      <p:sp>
+        <p:nvSpPr>
+          <p:cNvPr id="32" name="Text 26"/>
+          <p:cNvSpPr txBox="1"/>
+          <p:nvPr/>
+        </p:nvSpPr>
+        <p:spPr>
+          <a:xfrm>
+            <a:off x="7772400" y="4828032"/>
+            <a:ext cx="914400" cy="182880"/>
+          </a:xfrm>
+          <a:prstGeom prst="rect">
+            <a:avLst/>
+          </a:prstGeom>
+          <a:noFill/>
+          <a:ln/>
+        </p:spPr>
+        <p:txBody>
+          <a:bodyPr wrap="square" lIns="0" tIns="0" rIns="0" bIns="0" rtlCol="0" anchor="t"/>
+          <a:lstStyle/>
+          <a:p>
+            <a:pPr algn="r" indent="0" marL="0">
+              <a:buNone/>
+            </a:pPr>
+            <a:r>
+              <a:rPr lang="en-US" sz="800" dirty="0">
+                <a:solidFill>
+                  <a:srgbClr val="5B6675"/>
+                </a:solidFill>
+                <a:latin typeface="Calibri" pitchFamily="34" charset="0"/>
+                <a:ea typeface="Calibri" pitchFamily="34" charset="-122"/>
+                <a:cs typeface="Calibri" pitchFamily="34" charset="-120"/>
+              </a:rPr>
+              <a:t>11</a:t>
+            </a:r>
+            <a:endParaRPr lang="en-US" sz="800" dirty="0"/>
+          </a:p>
+        </p:txBody>
+      </p:sp>
+    </p:spTree>
+  </p:cSld>
+  <p:clrMapOvr>
+    <a:masterClrMapping/>
+  </p:clrMapOvr>
+</p:sld>
+</file>
+
+<file path=ppt/slides/slide12.xml><?xml version="1.0" encoding="utf-8"?>
+<p:sld xmlns:a="http://schemas.openxmlformats.org/drawingml/2006/main" xmlns:r="http://schemas.openxmlformats.org/officeDocument/2006/relationships" xmlns:p="http://schemas.openxmlformats.org/presentationml/2006/main">
+  <p:cSld name="Slide 12">
     <p:bg>
       <p:bgPr>
         <a:solidFill>
@@ -3701,7 +4402,7 @@
                 <a:ea typeface="Calibri" pitchFamily="34" charset="-122"/>
                 <a:cs typeface="Calibri" pitchFamily="34" charset="-120"/>
               </a:rPr>
-              <a:t>Migrate on startup</a:t>
+              <a:t>Auth inside the service</a:t>
             </a:r>
             <a:endParaRPr lang="en-US" sz="1300" dirty="0"/>
           </a:p>
@@ -3740,7 +4441,7 @@
                 <a:ea typeface="Calibri" pitchFamily="34" charset="-122"/>
                 <a:cs typeface="Calibri" pitchFamily="34" charset="-120"/>
               </a:rPr>
-              <a:t>one-command demo; production uses a pipeline job</a:t>
+              <a:t>light to run; a bank would use a dedicated IdP</a:t>
             </a:r>
             <a:endParaRPr lang="en-US" sz="1100" dirty="0"/>
           </a:p>
@@ -4165,7 +4866,7 @@
                 <a:ea typeface="Calibri" pitchFamily="34" charset="-122"/>
                 <a:cs typeface="Calibri" pitchFamily="34" charset="-120"/>
               </a:rPr>
-              <a:t>Asymmetric JWT via JWKS; mTLS to NIP settlement</a:t>
+              <a:t>Dedicated IdP with OTP/MFA (RS256 via JWKS); mTLS for NIP</a:t>
             </a:r>
             <a:endParaRPr lang="en-US" sz="1200" dirty="0"/>
           </a:p>
@@ -6012,7 +6713,7 @@
                 <a:ea typeface="Cambria" pitchFamily="34" charset="-122"/>
                 <a:cs typeface="Cambria" pitchFamily="34" charset="-120"/>
               </a:rPr>
-              <a:t>91</a:t>
+              <a:t>148</a:t>
             </a:r>
             <a:endParaRPr lang="en-US" sz="4000" dirty="0"/>
           </a:p>
@@ -6051,7 +6752,7 @@
                 <a:ea typeface="Calibri" pitchFamily="34" charset="-122"/>
                 <a:cs typeface="Calibri" pitchFamily="34" charset="-120"/>
               </a:rPr>
-              <a:t>automated tests: 45 unit + 46 against real PostgreSQL, all green</a:t>
+              <a:t>automated tests: 74 unit + 74 against real PostgreSQL, all green</a:t>
             </a:r>
             <a:endParaRPr lang="en-US" sz="1150" dirty="0"/>
           </a:p>
@@ -6328,7 +7029,7 @@
                 <a:ea typeface="Calibri" pitchFamily="34" charset="-122"/>
                 <a:cs typeface="Calibri" pitchFamily="34" charset="-120"/>
               </a:rPr>
-              <a:t>Swagger/OpenAPI · rate limiting · transactional outbox (TransferCompleted) · Serilog correlation IDs · health/readiness probes · hash-chained audit trail · GitHub Actions CI with a compose smoke test · README + AI_USAGE.md</a:t>
+              <a:t>password sign-in with rotating refresh tokens · admin API (users, freezes, action log) · Swagger/OpenAPI · rate limiting · transactional outbox · Serilog correlation IDs · health probes · hash-chained audit trail · CI with a compose smoke test · README, testing guide, AI_USAGE.md</a:t>
             </a:r>
             <a:endParaRPr lang="en-US" sz="1250" dirty="0"/>
           </a:p>
@@ -6849,7 +7550,7 @@
                 <a:ea typeface="Calibri" pitchFamily="34" charset="-122"/>
                 <a:cs typeface="Calibri" pitchFamily="34" charset="-120"/>
               </a:rPr>
-              <a:t>TransferService · WalletService · DailyLimitPolicy · ILedgerStore port</a:t>
+              <a:t>TransferService · WalletService · AuthService · AdminService · ports</a:t>
             </a:r>
             <a:endParaRPr lang="en-US" sz="1050" dirty="0"/>
           </a:p>
@@ -7028,7 +7729,7 @@
                 <a:ea typeface="Calibri" pitchFamily="34" charset="-122"/>
                 <a:cs typeface="Calibri" pitchFamily="34" charset="-120"/>
               </a:rPr>
-              <a:t>EF Core + raw SQL row locks · migrations · outbox worker</a:t>
+              <a:t>EF Core + raw SQL row locks · PBKDF2 hasher · admin seeder · outbox</a:t>
             </a:r>
             <a:endParaRPr lang="en-US" sz="1050" dirty="0"/>
           </a:p>
@@ -7108,7 +7809,7 @@
                 <a:ea typeface="Calibri" pitchFamily="34" charset="-122"/>
                 <a:cs typeface="Calibri" pitchFamily="34" charset="-120"/>
               </a:rPr>
-              <a:t>Money (long kobo, checked) · Wallet · LedgerEntry · AuditRecord</a:t>
+              <a:t>Money (long kobo, checked) · Wallet · LedgerEntry · AuditRecord · User</a:t>
             </a:r>
             <a:endParaRPr lang="en-US" sz="1100" dirty="0"/>
           </a:p>
@@ -7351,7 +8052,7 @@
                 <a:ea typeface="Calibri" pitchFamily="34" charset="-122"/>
                 <a:cs typeface="Calibri" pitchFamily="34" charset="-120"/>
               </a:rPr>
-              <a:t>Append-only triggers on ledger + audit</a:t>
+              <a:t>Append-only triggers on ledger, audit and admin log</a:t>
             </a:r>
             <a:endParaRPr lang="en-US" sz="1200" dirty="0"/>
           </a:p>
@@ -11083,7 +11784,7 @@
                 <a:ea typeface="Calibri" pitchFamily="34" charset="-122"/>
                 <a:cs typeface="Calibri" pitchFamily="34" charset="-120"/>
               </a:rPr>
-              <a:t>SECURITY &amp; NIGERIAN CONTEXT</a:t>
+              <a:t>USERS &amp; ADMINISTRATION</a:t>
             </a:r>
             <a:endParaRPr lang="en-US" sz="1000" dirty="0"/>
           </a:p>
@@ -11122,7 +11823,7 @@
                 <a:ea typeface="Cambria" pitchFamily="34" charset="-122"/>
                 <a:cs typeface="Cambria" pitchFamily="34" charset="-120"/>
               </a:rPr>
-              <a:t>Built for where it would actually run</a:t>
+              <a:t>Real sign-in that can be revoked instantly</a:t>
             </a:r>
             <a:endParaRPr lang="en-US" sz="2400" dirty="0"/>
           </a:p>
@@ -11137,11 +11838,684 @@
         <p:spPr>
           <a:xfrm>
             <a:off x="457200" y="1325880"/>
-            <a:ext cx="2606040" cy="1554480"/>
+            <a:ext cx="4023360" cy="3337560"/>
           </a:xfrm>
           <a:prstGeom prst="roundRect">
             <a:avLst>
-              <a:gd name="adj" fmla="val 4706"/>
+              <a:gd name="adj" fmla="val 2192"/>
+            </a:avLst>
+          </a:prstGeom>
+          <a:solidFill>
+            <a:srgbClr val="0B1F3A"/>
+          </a:solidFill>
+          <a:ln w="12700">
+            <a:solidFill>
+              <a:srgbClr val="0B1F3A"/>
+            </a:solidFill>
+            <a:prstDash val="solid"/>
+          </a:ln>
+        </p:spPr>
+      </p:sp>
+      <p:sp>
+        <p:nvSpPr>
+          <p:cNvPr id="5" name="Text 3"/>
+          <p:cNvSpPr txBox="1"/>
+          <p:nvPr/>
+        </p:nvSpPr>
+        <p:spPr>
+          <a:xfrm>
+            <a:off x="640080" y="1463040"/>
+            <a:ext cx="3657600" cy="228600"/>
+          </a:xfrm>
+          <a:prstGeom prst="rect">
+            <a:avLst/>
+          </a:prstGeom>
+          <a:noFill/>
+          <a:ln/>
+        </p:spPr>
+        <p:txBody>
+          <a:bodyPr wrap="square" lIns="0" tIns="0" rIns="0" bIns="0" rtlCol="0" anchor="t"/>
+          <a:lstStyle/>
+          <a:p>
+            <a:pPr indent="0" marL="0">
+              <a:buNone/>
+            </a:pPr>
+            <a:r>
+              <a:rPr lang="en-US" sz="1000" b="1" spc="200" kern="0" dirty="0">
+                <a:solidFill>
+                  <a:srgbClr val="D4A63A"/>
+                </a:solidFill>
+                <a:latin typeface="Calibri" pitchFamily="34" charset="0"/>
+                <a:ea typeface="Calibri" pitchFamily="34" charset="-122"/>
+                <a:cs typeface="Calibri" pitchFamily="34" charset="-120"/>
+              </a:rPr>
+              <a:t>SESSION FLOW</a:t>
+            </a:r>
+            <a:endParaRPr lang="en-US" sz="1000" dirty="0"/>
+          </a:p>
+        </p:txBody>
+      </p:sp>
+      <p:sp>
+        <p:nvSpPr>
+          <p:cNvPr id="6" name="Shape 4"/>
+          <p:cNvSpPr/>
+          <p:nvPr/>
+        </p:nvSpPr>
+        <p:spPr>
+          <a:xfrm>
+            <a:off x="640080" y="1810512"/>
+            <a:ext cx="329184" cy="329184"/>
+          </a:xfrm>
+          <a:prstGeom prst="ellipse">
+            <a:avLst/>
+          </a:prstGeom>
+          <a:solidFill>
+            <a:srgbClr val="D4A63A"/>
+          </a:solidFill>
+          <a:ln w="12700">
+            <a:solidFill>
+              <a:srgbClr val="D4A63A"/>
+            </a:solidFill>
+            <a:prstDash val="solid"/>
+          </a:ln>
+        </p:spPr>
+      </p:sp>
+      <p:sp>
+        <p:nvSpPr>
+          <p:cNvPr id="7" name="Text 5"/>
+          <p:cNvSpPr txBox="1"/>
+          <p:nvPr/>
+        </p:nvSpPr>
+        <p:spPr>
+          <a:xfrm>
+            <a:off x="640080" y="1810512"/>
+            <a:ext cx="329184" cy="329184"/>
+          </a:xfrm>
+          <a:prstGeom prst="rect">
+            <a:avLst/>
+          </a:prstGeom>
+          <a:noFill/>
+          <a:ln/>
+        </p:spPr>
+        <p:txBody>
+          <a:bodyPr wrap="square" lIns="0" tIns="0" rIns="0" bIns="0" rtlCol="0" anchor="ctr"/>
+          <a:lstStyle/>
+          <a:p>
+            <a:pPr algn="ctr" indent="0" marL="0">
+              <a:buNone/>
+            </a:pPr>
+            <a:r>
+              <a:rPr lang="en-US" sz="1200" b="1" dirty="0">
+                <a:solidFill>
+                  <a:srgbClr val="0B1F3A"/>
+                </a:solidFill>
+                <a:latin typeface="Calibri" pitchFamily="34" charset="0"/>
+                <a:ea typeface="Calibri" pitchFamily="34" charset="-122"/>
+                <a:cs typeface="Calibri" pitchFamily="34" charset="-120"/>
+              </a:rPr>
+              <a:t>1</a:t>
+            </a:r>
+            <a:endParaRPr lang="en-US" sz="1200" dirty="0"/>
+          </a:p>
+        </p:txBody>
+      </p:sp>
+      <p:sp>
+        <p:nvSpPr>
+          <p:cNvPr id="8" name="Text 6"/>
+          <p:cNvSpPr txBox="1"/>
+          <p:nvPr/>
+        </p:nvSpPr>
+        <p:spPr>
+          <a:xfrm>
+            <a:off x="1097280" y="1792224"/>
+            <a:ext cx="3200400" cy="219456"/>
+          </a:xfrm>
+          <a:prstGeom prst="rect">
+            <a:avLst/>
+          </a:prstGeom>
+          <a:noFill/>
+          <a:ln/>
+        </p:spPr>
+        <p:txBody>
+          <a:bodyPr wrap="square" lIns="0" tIns="0" rIns="0" bIns="0" rtlCol="0" anchor="t"/>
+          <a:lstStyle/>
+          <a:p>
+            <a:pPr indent="0" marL="0">
+              <a:buNone/>
+            </a:pPr>
+            <a:r>
+              <a:rPr lang="en-US" sz="1200" b="1" dirty="0">
+                <a:solidFill>
+                  <a:srgbClr val="FFFFFF"/>
+                </a:solidFill>
+                <a:latin typeface="Calibri" pitchFamily="34" charset="0"/>
+                <a:ea typeface="Calibri" pitchFamily="34" charset="-122"/>
+                <a:cs typeface="Calibri" pitchFamily="34" charset="-120"/>
+              </a:rPr>
+              <a:t>Register</a:t>
+            </a:r>
+            <a:endParaRPr lang="en-US" sz="1200" dirty="0"/>
+          </a:p>
+        </p:txBody>
+      </p:sp>
+      <p:sp>
+        <p:nvSpPr>
+          <p:cNvPr id="9" name="Text 7"/>
+          <p:cNvSpPr txBox="1"/>
+          <p:nvPr/>
+        </p:nvSpPr>
+        <p:spPr>
+          <a:xfrm>
+            <a:off x="1097280" y="2011680"/>
+            <a:ext cx="3246120" cy="365760"/>
+          </a:xfrm>
+          <a:prstGeom prst="rect">
+            <a:avLst/>
+          </a:prstGeom>
+          <a:noFill/>
+          <a:ln/>
+        </p:spPr>
+        <p:txBody>
+          <a:bodyPr wrap="square" lIns="0" tIns="0" rIns="0" bIns="0" rtlCol="0" anchor="t"/>
+          <a:lstStyle/>
+          <a:p>
+            <a:pPr indent="0" marL="0">
+              <a:buNone/>
+            </a:pPr>
+            <a:r>
+              <a:rPr lang="en-US" sz="1000" dirty="0">
+                <a:solidFill>
+                  <a:srgbClr val="C9D3E3"/>
+                </a:solidFill>
+                <a:latin typeface="Calibri" pitchFamily="34" charset="0"/>
+                <a:ea typeface="Calibri" pitchFamily="34" charset="-122"/>
+                <a:cs typeface="Calibri" pitchFamily="34" charset="-120"/>
+              </a:rPr>
+              <a:t>always a customer; PBKDF2-SHA512 hash</a:t>
+            </a:r>
+            <a:endParaRPr lang="en-US" sz="1000" dirty="0"/>
+          </a:p>
+        </p:txBody>
+      </p:sp>
+      <p:sp>
+        <p:nvSpPr>
+          <p:cNvPr id="10" name="Shape 8"/>
+          <p:cNvSpPr/>
+          <p:nvPr/>
+        </p:nvSpPr>
+        <p:spPr>
+          <a:xfrm>
+            <a:off x="640080" y="2395728"/>
+            <a:ext cx="329184" cy="329184"/>
+          </a:xfrm>
+          <a:prstGeom prst="ellipse">
+            <a:avLst/>
+          </a:prstGeom>
+          <a:solidFill>
+            <a:srgbClr val="D4A63A"/>
+          </a:solidFill>
+          <a:ln w="12700">
+            <a:solidFill>
+              <a:srgbClr val="D4A63A"/>
+            </a:solidFill>
+            <a:prstDash val="solid"/>
+          </a:ln>
+        </p:spPr>
+      </p:sp>
+      <p:sp>
+        <p:nvSpPr>
+          <p:cNvPr id="11" name="Text 9"/>
+          <p:cNvSpPr txBox="1"/>
+          <p:nvPr/>
+        </p:nvSpPr>
+        <p:spPr>
+          <a:xfrm>
+            <a:off x="640080" y="2395728"/>
+            <a:ext cx="329184" cy="329184"/>
+          </a:xfrm>
+          <a:prstGeom prst="rect">
+            <a:avLst/>
+          </a:prstGeom>
+          <a:noFill/>
+          <a:ln/>
+        </p:spPr>
+        <p:txBody>
+          <a:bodyPr wrap="square" lIns="0" tIns="0" rIns="0" bIns="0" rtlCol="0" anchor="ctr"/>
+          <a:lstStyle/>
+          <a:p>
+            <a:pPr algn="ctr" indent="0" marL="0">
+              <a:buNone/>
+            </a:pPr>
+            <a:r>
+              <a:rPr lang="en-US" sz="1200" b="1" dirty="0">
+                <a:solidFill>
+                  <a:srgbClr val="0B1F3A"/>
+                </a:solidFill>
+                <a:latin typeface="Calibri" pitchFamily="34" charset="0"/>
+                <a:ea typeface="Calibri" pitchFamily="34" charset="-122"/>
+                <a:cs typeface="Calibri" pitchFamily="34" charset="-120"/>
+              </a:rPr>
+              <a:t>2</a:t>
+            </a:r>
+            <a:endParaRPr lang="en-US" sz="1200" dirty="0"/>
+          </a:p>
+        </p:txBody>
+      </p:sp>
+      <p:sp>
+        <p:nvSpPr>
+          <p:cNvPr id="12" name="Text 10"/>
+          <p:cNvSpPr txBox="1"/>
+          <p:nvPr/>
+        </p:nvSpPr>
+        <p:spPr>
+          <a:xfrm>
+            <a:off x="1097280" y="2377440"/>
+            <a:ext cx="3200400" cy="219456"/>
+          </a:xfrm>
+          <a:prstGeom prst="rect">
+            <a:avLst/>
+          </a:prstGeom>
+          <a:noFill/>
+          <a:ln/>
+        </p:spPr>
+        <p:txBody>
+          <a:bodyPr wrap="square" lIns="0" tIns="0" rIns="0" bIns="0" rtlCol="0" anchor="t"/>
+          <a:lstStyle/>
+          <a:p>
+            <a:pPr indent="0" marL="0">
+              <a:buNone/>
+            </a:pPr>
+            <a:r>
+              <a:rPr lang="en-US" sz="1200" b="1" dirty="0">
+                <a:solidFill>
+                  <a:srgbClr val="FFFFFF"/>
+                </a:solidFill>
+                <a:latin typeface="Calibri" pitchFamily="34" charset="0"/>
+                <a:ea typeface="Calibri" pitchFamily="34" charset="-122"/>
+                <a:cs typeface="Calibri" pitchFamily="34" charset="-120"/>
+              </a:rPr>
+              <a:t>Sign in</a:t>
+            </a:r>
+            <a:endParaRPr lang="en-US" sz="1200" dirty="0"/>
+          </a:p>
+        </p:txBody>
+      </p:sp>
+      <p:sp>
+        <p:nvSpPr>
+          <p:cNvPr id="13" name="Text 11"/>
+          <p:cNvSpPr txBox="1"/>
+          <p:nvPr/>
+        </p:nvSpPr>
+        <p:spPr>
+          <a:xfrm>
+            <a:off x="1097280" y="2596896"/>
+            <a:ext cx="3246120" cy="365760"/>
+          </a:xfrm>
+          <a:prstGeom prst="rect">
+            <a:avLst/>
+          </a:prstGeom>
+          <a:noFill/>
+          <a:ln/>
+        </p:spPr>
+        <p:txBody>
+          <a:bodyPr wrap="square" lIns="0" tIns="0" rIns="0" bIns="0" rtlCol="0" anchor="t"/>
+          <a:lstStyle/>
+          <a:p>
+            <a:pPr indent="0" marL="0">
+              <a:buNone/>
+            </a:pPr>
+            <a:r>
+              <a:rPr lang="en-US" sz="1000" dirty="0">
+                <a:solidFill>
+                  <a:srgbClr val="C9D3E3"/>
+                </a:solidFill>
+                <a:latin typeface="Calibri" pitchFamily="34" charset="0"/>
+                <a:ea typeface="Calibri" pitchFamily="34" charset="-122"/>
+                <a:cs typeface="Calibri" pitchFamily="34" charset="-120"/>
+              </a:rPr>
+              <a:t>15-min access JWT + 7-day refresh token</a:t>
+            </a:r>
+            <a:endParaRPr lang="en-US" sz="1000" dirty="0"/>
+          </a:p>
+        </p:txBody>
+      </p:sp>
+      <p:sp>
+        <p:nvSpPr>
+          <p:cNvPr id="14" name="Shape 12"/>
+          <p:cNvSpPr/>
+          <p:nvPr/>
+        </p:nvSpPr>
+        <p:spPr>
+          <a:xfrm>
+            <a:off x="640080" y="2980944"/>
+            <a:ext cx="329184" cy="329184"/>
+          </a:xfrm>
+          <a:prstGeom prst="ellipse">
+            <a:avLst/>
+          </a:prstGeom>
+          <a:solidFill>
+            <a:srgbClr val="D4A63A"/>
+          </a:solidFill>
+          <a:ln w="12700">
+            <a:solidFill>
+              <a:srgbClr val="D4A63A"/>
+            </a:solidFill>
+            <a:prstDash val="solid"/>
+          </a:ln>
+        </p:spPr>
+      </p:sp>
+      <p:sp>
+        <p:nvSpPr>
+          <p:cNvPr id="15" name="Text 13"/>
+          <p:cNvSpPr txBox="1"/>
+          <p:nvPr/>
+        </p:nvSpPr>
+        <p:spPr>
+          <a:xfrm>
+            <a:off x="640080" y="2980944"/>
+            <a:ext cx="329184" cy="329184"/>
+          </a:xfrm>
+          <a:prstGeom prst="rect">
+            <a:avLst/>
+          </a:prstGeom>
+          <a:noFill/>
+          <a:ln/>
+        </p:spPr>
+        <p:txBody>
+          <a:bodyPr wrap="square" lIns="0" tIns="0" rIns="0" bIns="0" rtlCol="0" anchor="ctr"/>
+          <a:lstStyle/>
+          <a:p>
+            <a:pPr algn="ctr" indent="0" marL="0">
+              <a:buNone/>
+            </a:pPr>
+            <a:r>
+              <a:rPr lang="en-US" sz="1200" b="1" dirty="0">
+                <a:solidFill>
+                  <a:srgbClr val="0B1F3A"/>
+                </a:solidFill>
+                <a:latin typeface="Calibri" pitchFamily="34" charset="0"/>
+                <a:ea typeface="Calibri" pitchFamily="34" charset="-122"/>
+                <a:cs typeface="Calibri" pitchFamily="34" charset="-120"/>
+              </a:rPr>
+              <a:t>3</a:t>
+            </a:r>
+            <a:endParaRPr lang="en-US" sz="1200" dirty="0"/>
+          </a:p>
+        </p:txBody>
+      </p:sp>
+      <p:sp>
+        <p:nvSpPr>
+          <p:cNvPr id="16" name="Text 14"/>
+          <p:cNvSpPr txBox="1"/>
+          <p:nvPr/>
+        </p:nvSpPr>
+        <p:spPr>
+          <a:xfrm>
+            <a:off x="1097280" y="2962656"/>
+            <a:ext cx="3200400" cy="219456"/>
+          </a:xfrm>
+          <a:prstGeom prst="rect">
+            <a:avLst/>
+          </a:prstGeom>
+          <a:noFill/>
+          <a:ln/>
+        </p:spPr>
+        <p:txBody>
+          <a:bodyPr wrap="square" lIns="0" tIns="0" rIns="0" bIns="0" rtlCol="0" anchor="t"/>
+          <a:lstStyle/>
+          <a:p>
+            <a:pPr indent="0" marL="0">
+              <a:buNone/>
+            </a:pPr>
+            <a:r>
+              <a:rPr lang="en-US" sz="1200" b="1" dirty="0">
+                <a:solidFill>
+                  <a:srgbClr val="FFFFFF"/>
+                </a:solidFill>
+                <a:latin typeface="Calibri" pitchFamily="34" charset="0"/>
+                <a:ea typeface="Calibri" pitchFamily="34" charset="-122"/>
+                <a:cs typeface="Calibri" pitchFamily="34" charset="-120"/>
+              </a:rPr>
+              <a:t>Refresh</a:t>
+            </a:r>
+            <a:endParaRPr lang="en-US" sz="1200" dirty="0"/>
+          </a:p>
+        </p:txBody>
+      </p:sp>
+      <p:sp>
+        <p:nvSpPr>
+          <p:cNvPr id="17" name="Text 15"/>
+          <p:cNvSpPr txBox="1"/>
+          <p:nvPr/>
+        </p:nvSpPr>
+        <p:spPr>
+          <a:xfrm>
+            <a:off x="1097280" y="3182112"/>
+            <a:ext cx="3246120" cy="365760"/>
+          </a:xfrm>
+          <a:prstGeom prst="rect">
+            <a:avLst/>
+          </a:prstGeom>
+          <a:noFill/>
+          <a:ln/>
+        </p:spPr>
+        <p:txBody>
+          <a:bodyPr wrap="square" lIns="0" tIns="0" rIns="0" bIns="0" rtlCol="0" anchor="t"/>
+          <a:lstStyle/>
+          <a:p>
+            <a:pPr indent="0" marL="0">
+              <a:buNone/>
+            </a:pPr>
+            <a:r>
+              <a:rPr lang="en-US" sz="1000" dirty="0">
+                <a:solidFill>
+                  <a:srgbClr val="C9D3E3"/>
+                </a:solidFill>
+                <a:latin typeface="Calibri" pitchFamily="34" charset="0"/>
+                <a:ea typeface="Calibri" pitchFamily="34" charset="-122"/>
+                <a:cs typeface="Calibri" pitchFamily="34" charset="-120"/>
+              </a:rPr>
+              <a:t>rotates; reusing an old one revokes the session</a:t>
+            </a:r>
+            <a:endParaRPr lang="en-US" sz="1000" dirty="0"/>
+          </a:p>
+        </p:txBody>
+      </p:sp>
+      <p:sp>
+        <p:nvSpPr>
+          <p:cNvPr id="18" name="Shape 16"/>
+          <p:cNvSpPr/>
+          <p:nvPr/>
+        </p:nvSpPr>
+        <p:spPr>
+          <a:xfrm>
+            <a:off x="640080" y="3566160"/>
+            <a:ext cx="329184" cy="329184"/>
+          </a:xfrm>
+          <a:prstGeom prst="ellipse">
+            <a:avLst/>
+          </a:prstGeom>
+          <a:solidFill>
+            <a:srgbClr val="D4A63A"/>
+          </a:solidFill>
+          <a:ln w="12700">
+            <a:solidFill>
+              <a:srgbClr val="D4A63A"/>
+            </a:solidFill>
+            <a:prstDash val="solid"/>
+          </a:ln>
+        </p:spPr>
+      </p:sp>
+      <p:sp>
+        <p:nvSpPr>
+          <p:cNvPr id="19" name="Text 17"/>
+          <p:cNvSpPr txBox="1"/>
+          <p:nvPr/>
+        </p:nvSpPr>
+        <p:spPr>
+          <a:xfrm>
+            <a:off x="640080" y="3566160"/>
+            <a:ext cx="329184" cy="329184"/>
+          </a:xfrm>
+          <a:prstGeom prst="rect">
+            <a:avLst/>
+          </a:prstGeom>
+          <a:noFill/>
+          <a:ln/>
+        </p:spPr>
+        <p:txBody>
+          <a:bodyPr wrap="square" lIns="0" tIns="0" rIns="0" bIns="0" rtlCol="0" anchor="ctr"/>
+          <a:lstStyle/>
+          <a:p>
+            <a:pPr algn="ctr" indent="0" marL="0">
+              <a:buNone/>
+            </a:pPr>
+            <a:r>
+              <a:rPr lang="en-US" sz="1200" b="1" dirty="0">
+                <a:solidFill>
+                  <a:srgbClr val="0B1F3A"/>
+                </a:solidFill>
+                <a:latin typeface="Calibri" pitchFamily="34" charset="0"/>
+                <a:ea typeface="Calibri" pitchFamily="34" charset="-122"/>
+                <a:cs typeface="Calibri" pitchFamily="34" charset="-120"/>
+              </a:rPr>
+              <a:t>4</a:t>
+            </a:r>
+            <a:endParaRPr lang="en-US" sz="1200" dirty="0"/>
+          </a:p>
+        </p:txBody>
+      </p:sp>
+      <p:sp>
+        <p:nvSpPr>
+          <p:cNvPr id="20" name="Text 18"/>
+          <p:cNvSpPr txBox="1"/>
+          <p:nvPr/>
+        </p:nvSpPr>
+        <p:spPr>
+          <a:xfrm>
+            <a:off x="1097280" y="3547872"/>
+            <a:ext cx="3200400" cy="219456"/>
+          </a:xfrm>
+          <a:prstGeom prst="rect">
+            <a:avLst/>
+          </a:prstGeom>
+          <a:noFill/>
+          <a:ln/>
+        </p:spPr>
+        <p:txBody>
+          <a:bodyPr wrap="square" lIns="0" tIns="0" rIns="0" bIns="0" rtlCol="0" anchor="t"/>
+          <a:lstStyle/>
+          <a:p>
+            <a:pPr indent="0" marL="0">
+              <a:buNone/>
+            </a:pPr>
+            <a:r>
+              <a:rPr lang="en-US" sz="1200" b="1" dirty="0">
+                <a:solidFill>
+                  <a:srgbClr val="FFFFFF"/>
+                </a:solidFill>
+                <a:latin typeface="Calibri" pitchFamily="34" charset="0"/>
+                <a:ea typeface="Calibri" pitchFamily="34" charset="-122"/>
+                <a:cs typeface="Calibri" pitchFamily="34" charset="-120"/>
+              </a:rPr>
+              <a:t>Every request</a:t>
+            </a:r>
+            <a:endParaRPr lang="en-US" sz="1200" dirty="0"/>
+          </a:p>
+        </p:txBody>
+      </p:sp>
+      <p:sp>
+        <p:nvSpPr>
+          <p:cNvPr id="21" name="Text 19"/>
+          <p:cNvSpPr txBox="1"/>
+          <p:nvPr/>
+        </p:nvSpPr>
+        <p:spPr>
+          <a:xfrm>
+            <a:off x="1097280" y="3767328"/>
+            <a:ext cx="3246120" cy="365760"/>
+          </a:xfrm>
+          <a:prstGeom prst="rect">
+            <a:avLst/>
+          </a:prstGeom>
+          <a:noFill/>
+          <a:ln/>
+        </p:spPr>
+        <p:txBody>
+          <a:bodyPr wrap="square" lIns="0" tIns="0" rIns="0" bIns="0" rtlCol="0" anchor="t"/>
+          <a:lstStyle/>
+          <a:p>
+            <a:pPr indent="0" marL="0">
+              <a:buNone/>
+            </a:pPr>
+            <a:r>
+              <a:rPr lang="en-US" sz="1000" dirty="0">
+                <a:solidFill>
+                  <a:srgbClr val="C9D3E3"/>
+                </a:solidFill>
+                <a:latin typeface="Calibri" pitchFamily="34" charset="0"/>
+                <a:ea typeface="Calibri" pitchFamily="34" charset="-122"/>
+                <a:cs typeface="Calibri" pitchFamily="34" charset="-120"/>
+              </a:rPr>
+              <a:t>user still active? role &amp; token version match?</a:t>
+            </a:r>
+            <a:endParaRPr lang="en-US" sz="1000" dirty="0"/>
+          </a:p>
+        </p:txBody>
+      </p:sp>
+      <p:sp>
+        <p:nvSpPr>
+          <p:cNvPr id="22" name="Text 20"/>
+          <p:cNvSpPr txBox="1"/>
+          <p:nvPr/>
+        </p:nvSpPr>
+        <p:spPr>
+          <a:xfrm>
+            <a:off x="640080" y="4160520"/>
+            <a:ext cx="3703320" cy="411480"/>
+          </a:xfrm>
+          <a:prstGeom prst="rect">
+            <a:avLst/>
+          </a:prstGeom>
+          <a:noFill/>
+          <a:ln/>
+        </p:spPr>
+        <p:txBody>
+          <a:bodyPr wrap="square" lIns="0" tIns="0" rIns="0" bIns="0" rtlCol="0" anchor="t"/>
+          <a:lstStyle/>
+          <a:p>
+            <a:pPr indent="0" marL="0">
+              <a:buNone/>
+            </a:pPr>
+            <a:r>
+              <a:rPr lang="en-US" sz="1000" i="1" dirty="0">
+                <a:solidFill>
+                  <a:srgbClr val="D4A63A"/>
+                </a:solidFill>
+                <a:latin typeface="Calibri" pitchFamily="34" charset="0"/>
+                <a:ea typeface="Calibri" pitchFamily="34" charset="-122"/>
+                <a:cs typeface="Calibri" pitchFamily="34" charset="-120"/>
+              </a:rPr>
+              <a:t>Any failure → identical 401 · 5 wrong passwords → 15-min lock · sign-in rate-limited per IP</a:t>
+            </a:r>
+            <a:endParaRPr lang="en-US" sz="1000" dirty="0"/>
+          </a:p>
+        </p:txBody>
+      </p:sp>
+      <p:sp>
+        <p:nvSpPr>
+          <p:cNvPr id="23" name="Shape 21"/>
+          <p:cNvSpPr/>
+          <p:nvPr/>
+        </p:nvSpPr>
+        <p:spPr>
+          <a:xfrm>
+            <a:off x="4709160" y="1325880"/>
+            <a:ext cx="1874520" cy="1188720"/>
+          </a:xfrm>
+          <a:prstGeom prst="roundRect">
+            <a:avLst>
+              <a:gd name="adj" fmla="val 6154"/>
             </a:avLst>
           </a:prstGeom>
           <a:solidFill>
@@ -11157,14 +12531,14 @@
       </p:sp>
       <p:sp>
         <p:nvSpPr>
-          <p:cNvPr id="5" name="Shape 3"/>
+          <p:cNvPr id="24" name="Shape 22"/>
           <p:cNvSpPr/>
           <p:nvPr/>
         </p:nvSpPr>
         <p:spPr>
           <a:xfrm>
-            <a:off x="594360" y="1463040"/>
-            <a:ext cx="411480" cy="411480"/>
+            <a:off x="4818888" y="1435608"/>
+            <a:ext cx="384048" cy="384048"/>
           </a:xfrm>
           <a:prstGeom prst="ellipse">
             <a:avLst/>
@@ -11182,7 +12556,7 @@
       </p:sp>
       <p:pic>
         <p:nvPicPr>
-          <p:cNvPr id="6" name="Image 0" descr="preencoded.png">    </p:cNvPr>
+          <p:cNvPr id="25" name="Image 0" descr="preencoded.png">    </p:cNvPr>
           <p:cNvPicPr>
             <a:picLocks noChangeAspect="1"/>
           </p:cNvPicPr>
@@ -11196,8 +12570,8 @@
         </p:blipFill>
         <p:spPr>
           <a:xfrm>
-            <a:off x="701345" y="1570025"/>
-            <a:ext cx="197510" cy="197510"/>
+            <a:off x="4918740" y="1535460"/>
+            <a:ext cx="184343" cy="184343"/>
           </a:xfrm>
           <a:prstGeom prst="rect">
             <a:avLst/>
@@ -11206,14 +12580,14 @@
       </p:pic>
       <p:sp>
         <p:nvSpPr>
-          <p:cNvPr id="7" name="Text 4"/>
-          <p:cNvSpPr txBox="1"/>
-          <p:nvPr/>
-        </p:nvSpPr>
-        <p:spPr>
-          <a:xfrm>
-            <a:off x="1115568" y="1508760"/>
-            <a:ext cx="1828800" cy="320040"/>
+          <p:cNvPr id="26" name="Text 23"/>
+          <p:cNvSpPr txBox="1"/>
+          <p:nvPr/>
+        </p:nvSpPr>
+        <p:spPr>
+          <a:xfrm>
+            <a:off x="5276088" y="1435608"/>
+            <a:ext cx="1261872" cy="384048"/>
           </a:xfrm>
           <a:prstGeom prst="rect">
             <a:avLst/>
@@ -11229,7 +12603,7 @@
               <a:buNone/>
             </a:pPr>
             <a:r>
-              <a:rPr lang="en-US" sz="1300" b="1" dirty="0">
+              <a:rPr lang="en-US" sz="1150" b="1" dirty="0">
                 <a:solidFill>
                   <a:srgbClr val="0B1F3A"/>
                 </a:solidFill>
@@ -11237,38 +12611,38 @@
                 <a:ea typeface="Calibri" pitchFamily="34" charset="-122"/>
                 <a:cs typeface="Calibri" pitchFamily="34" charset="-120"/>
               </a:rPr>
-              <a:t>Auth</a:t>
-            </a:r>
-            <a:endParaRPr lang="en-US" sz="1300" dirty="0"/>
-          </a:p>
-        </p:txBody>
-      </p:sp>
-      <p:sp>
-        <p:nvSpPr>
-          <p:cNvPr id="8" name="Text 5"/>
-          <p:cNvSpPr txBox="1"/>
-          <p:nvPr/>
-        </p:nvSpPr>
-        <p:spPr>
-          <a:xfrm>
-            <a:off x="594360" y="1984248"/>
-            <a:ext cx="2359152" cy="868680"/>
-          </a:xfrm>
-          <a:prstGeom prst="rect">
-            <a:avLst/>
-          </a:prstGeom>
-          <a:noFill/>
-          <a:ln/>
-        </p:spPr>
-        <p:txBody>
-          <a:bodyPr wrap="square" lIns="0" tIns="0" rIns="0" bIns="0" rtlCol="0" anchor="t"/>
-          <a:lstStyle/>
-          <a:p>
-            <a:pPr indent="0" marL="0">
-              <a:buNone/>
-            </a:pPr>
-            <a:r>
-              <a:rPr lang="en-US" sz="1000" dirty="0">
+              <a:t>Credit &amp; audit</a:t>
+            </a:r>
+            <a:endParaRPr lang="en-US" sz="1150" dirty="0"/>
+          </a:p>
+        </p:txBody>
+      </p:sp>
+      <p:sp>
+        <p:nvSpPr>
+          <p:cNvPr id="27" name="Text 24"/>
+          <p:cNvSpPr txBox="1"/>
+          <p:nvPr/>
+        </p:nvSpPr>
+        <p:spPr>
+          <a:xfrm>
+            <a:off x="4818888" y="1892808"/>
+            <a:ext cx="1673352" cy="585216"/>
+          </a:xfrm>
+          <a:prstGeom prst="rect">
+            <a:avLst/>
+          </a:prstGeom>
+          <a:noFill/>
+          <a:ln/>
+        </p:spPr>
+        <p:txBody>
+          <a:bodyPr wrap="square" lIns="0" tIns="0" rIns="0" bIns="0" rtlCol="0" anchor="t"/>
+          <a:lstStyle/>
+          <a:p>
+            <a:pPr indent="0" marL="0">
+              <a:buNone/>
+            </a:pPr>
+            <a:r>
+              <a:rPr lang="en-US" sz="950" dirty="0">
                 <a:solidFill>
                   <a:srgbClr val="1B2430"/>
                 </a:solidFill>
@@ -11276,26 +12650,26 @@
                 <a:ea typeface="Calibri" pitchFamily="34" charset="-122"/>
                 <a:cs typeface="Calibri" pitchFamily="34" charset="-120"/>
               </a:rPr>
-              <a:t>JWT: issuer, audience, lifetime checked; HS256 pinned (alg:none rejected); fallback policy = authenticated; operator role for credits &amp; audit</a:t>
-            </a:r>
-            <a:endParaRPr lang="en-US" sz="1000" dirty="0"/>
-          </a:p>
-        </p:txBody>
-      </p:sp>
-      <p:sp>
-        <p:nvSpPr>
-          <p:cNvPr id="9" name="Shape 6"/>
+              <a:t>simulated NIP credits; hash-chained audit trail</a:t>
+            </a:r>
+            <a:endParaRPr lang="en-US" sz="950" dirty="0"/>
+          </a:p>
+        </p:txBody>
+      </p:sp>
+      <p:sp>
+        <p:nvSpPr>
+          <p:cNvPr id="28" name="Shape 25"/>
           <p:cNvSpPr/>
           <p:nvPr/>
         </p:nvSpPr>
         <p:spPr>
           <a:xfrm>
-            <a:off x="3246120" y="1325880"/>
-            <a:ext cx="2606040" cy="1554480"/>
+            <a:off x="6720840" y="1325880"/>
+            <a:ext cx="1874520" cy="1188720"/>
           </a:xfrm>
           <a:prstGeom prst="roundRect">
             <a:avLst>
-              <a:gd name="adj" fmla="val 4706"/>
+              <a:gd name="adj" fmla="val 6154"/>
             </a:avLst>
           </a:prstGeom>
           <a:solidFill>
@@ -11311,14 +12685,14 @@
       </p:sp>
       <p:sp>
         <p:nvSpPr>
-          <p:cNvPr id="10" name="Shape 7"/>
+          <p:cNvPr id="29" name="Shape 26"/>
           <p:cNvSpPr/>
           <p:nvPr/>
         </p:nvSpPr>
         <p:spPr>
           <a:xfrm>
-            <a:off x="3383280" y="1463040"/>
-            <a:ext cx="411480" cy="411480"/>
+            <a:off x="6830568" y="1435608"/>
+            <a:ext cx="384048" cy="384048"/>
           </a:xfrm>
           <a:prstGeom prst="ellipse">
             <a:avLst/>
@@ -11336,7 +12710,7 @@
       </p:sp>
       <p:pic>
         <p:nvPicPr>
-          <p:cNvPr id="11" name="Image 1" descr="preencoded.png">    </p:cNvPr>
+          <p:cNvPr id="30" name="Image 1" descr="preencoded.png">    </p:cNvPr>
           <p:cNvPicPr>
             <a:picLocks noChangeAspect="1"/>
           </p:cNvPicPr>
@@ -11350,8 +12724,8 @@
         </p:blipFill>
         <p:spPr>
           <a:xfrm>
-            <a:off x="3490265" y="1570025"/>
-            <a:ext cx="197510" cy="197510"/>
+            <a:off x="6930420" y="1535460"/>
+            <a:ext cx="184343" cy="184343"/>
           </a:xfrm>
           <a:prstGeom prst="rect">
             <a:avLst/>
@@ -11360,14 +12734,14 @@
       </p:pic>
       <p:sp>
         <p:nvSpPr>
-          <p:cNvPr id="12" name="Text 8"/>
-          <p:cNvSpPr txBox="1"/>
-          <p:nvPr/>
-        </p:nvSpPr>
-        <p:spPr>
-          <a:xfrm>
-            <a:off x="3904488" y="1508760"/>
-            <a:ext cx="1828800" cy="320040"/>
+          <p:cNvPr id="31" name="Text 27"/>
+          <p:cNvSpPr txBox="1"/>
+          <p:nvPr/>
+        </p:nvSpPr>
+        <p:spPr>
+          <a:xfrm>
+            <a:off x="7287768" y="1435608"/>
+            <a:ext cx="1261872" cy="384048"/>
           </a:xfrm>
           <a:prstGeom prst="rect">
             <a:avLst/>
@@ -11383,7 +12757,7 @@
               <a:buNone/>
             </a:pPr>
             <a:r>
-              <a:rPr lang="en-US" sz="1300" b="1" dirty="0">
+              <a:rPr lang="en-US" sz="1150" b="1" dirty="0">
                 <a:solidFill>
                   <a:srgbClr val="0B1F3A"/>
                 </a:solidFill>
@@ -11391,38 +12765,38 @@
                 <a:ea typeface="Calibri" pitchFamily="34" charset="-122"/>
                 <a:cs typeface="Calibri" pitchFamily="34" charset="-120"/>
               </a:rPr>
-              <a:t>No probing</a:t>
-            </a:r>
-            <a:endParaRPr lang="en-US" sz="1300" dirty="0"/>
-          </a:p>
-        </p:txBody>
-      </p:sp>
-      <p:sp>
-        <p:nvSpPr>
-          <p:cNvPr id="13" name="Text 9"/>
-          <p:cNvSpPr txBox="1"/>
-          <p:nvPr/>
-        </p:nvSpPr>
-        <p:spPr>
-          <a:xfrm>
-            <a:off x="3383280" y="1984248"/>
-            <a:ext cx="2359152" cy="868680"/>
-          </a:xfrm>
-          <a:prstGeom prst="rect">
-            <a:avLst/>
-          </a:prstGeom>
-          <a:noFill/>
-          <a:ln/>
-        </p:spPr>
-        <p:txBody>
-          <a:bodyPr wrap="square" lIns="0" tIns="0" rIns="0" bIns="0" rtlCol="0" anchor="t"/>
-          <a:lstStyle/>
-          <a:p>
-            <a:pPr indent="0" marL="0">
-              <a:buNone/>
-            </a:pPr>
-            <a:r>
-              <a:rPr lang="en-US" sz="1000" dirty="0">
+              <a:t>Manage users</a:t>
+            </a:r>
+            <a:endParaRPr lang="en-US" sz="1150" dirty="0"/>
+          </a:p>
+        </p:txBody>
+      </p:sp>
+      <p:sp>
+        <p:nvSpPr>
+          <p:cNvPr id="32" name="Text 28"/>
+          <p:cNvSpPr txBox="1"/>
+          <p:nvPr/>
+        </p:nvSpPr>
+        <p:spPr>
+          <a:xfrm>
+            <a:off x="6830568" y="1892808"/>
+            <a:ext cx="1673352" cy="585216"/>
+          </a:xfrm>
+          <a:prstGeom prst="rect">
+            <a:avLst/>
+          </a:prstGeom>
+          <a:noFill/>
+          <a:ln/>
+        </p:spPr>
+        <p:txBody>
+          <a:bodyPr wrap="square" lIns="0" tIns="0" rIns="0" bIns="0" rtlCol="0" anchor="t"/>
+          <a:lstStyle/>
+          <a:p>
+            <a:pPr indent="0" marL="0">
+              <a:buNone/>
+            </a:pPr>
+            <a:r>
+              <a:rPr lang="en-US" sz="950" dirty="0">
                 <a:solidFill>
                   <a:srgbClr val="1B2430"/>
                 </a:solidFill>
@@ -11430,26 +12804,26 @@
                 <a:ea typeface="Calibri" pitchFamily="34" charset="-122"/>
                 <a:cs typeface="Calibri" pitchFamily="34" charset="-120"/>
               </a:rPr>
-              <a:t>Other customers' wallets return 404; receipts show only the sender's balance</a:t>
-            </a:r>
-            <a:endParaRPr lang="en-US" sz="1000" dirty="0"/>
-          </a:p>
-        </p:txBody>
-      </p:sp>
-      <p:sp>
-        <p:nvSpPr>
-          <p:cNvPr id="14" name="Shape 10"/>
+              <a:t>disable → tokens die on the next request; promote / demote</a:t>
+            </a:r>
+            <a:endParaRPr lang="en-US" sz="950" dirty="0"/>
+          </a:p>
+        </p:txBody>
+      </p:sp>
+      <p:sp>
+        <p:nvSpPr>
+          <p:cNvPr id="33" name="Shape 29"/>
           <p:cNvSpPr/>
           <p:nvPr/>
         </p:nvSpPr>
         <p:spPr>
           <a:xfrm>
-            <a:off x="6035040" y="1325880"/>
-            <a:ext cx="2606040" cy="1554480"/>
+            <a:off x="4709160" y="2624328"/>
+            <a:ext cx="1874520" cy="1188720"/>
           </a:xfrm>
           <a:prstGeom prst="roundRect">
             <a:avLst>
-              <a:gd name="adj" fmla="val 4706"/>
+              <a:gd name="adj" fmla="val 6154"/>
             </a:avLst>
           </a:prstGeom>
           <a:solidFill>
@@ -11465,14 +12839,14 @@
       </p:sp>
       <p:sp>
         <p:nvSpPr>
-          <p:cNvPr id="15" name="Shape 11"/>
+          <p:cNvPr id="34" name="Shape 30"/>
           <p:cNvSpPr/>
           <p:nvPr/>
         </p:nvSpPr>
         <p:spPr>
           <a:xfrm>
-            <a:off x="6172200" y="1463040"/>
-            <a:ext cx="411480" cy="411480"/>
+            <a:off x="4818888" y="2734056"/>
+            <a:ext cx="384048" cy="384048"/>
           </a:xfrm>
           <a:prstGeom prst="ellipse">
             <a:avLst/>
@@ -11490,7 +12864,7 @@
       </p:sp>
       <p:pic>
         <p:nvPicPr>
-          <p:cNvPr id="16" name="Image 2" descr="preencoded.png">    </p:cNvPr>
+          <p:cNvPr id="35" name="Image 2" descr="preencoded.png">    </p:cNvPr>
           <p:cNvPicPr>
             <a:picLocks noChangeAspect="1"/>
           </p:cNvPicPr>
@@ -11504,8 +12878,8 @@
         </p:blipFill>
         <p:spPr>
           <a:xfrm>
-            <a:off x="6279185" y="1570025"/>
-            <a:ext cx="197510" cy="197510"/>
+            <a:off x="4918740" y="2833908"/>
+            <a:ext cx="184343" cy="184343"/>
           </a:xfrm>
           <a:prstGeom prst="rect">
             <a:avLst/>
@@ -11514,14 +12888,14 @@
       </p:pic>
       <p:sp>
         <p:nvSpPr>
-          <p:cNvPr id="17" name="Text 12"/>
-          <p:cNvSpPr txBox="1"/>
-          <p:nvPr/>
-        </p:nvSpPr>
-        <p:spPr>
-          <a:xfrm>
-            <a:off x="6693408" y="1508760"/>
-            <a:ext cx="1828800" cy="320040"/>
+          <p:cNvPr id="36" name="Text 31"/>
+          <p:cNvSpPr txBox="1"/>
+          <p:nvPr/>
+        </p:nvSpPr>
+        <p:spPr>
+          <a:xfrm>
+            <a:off x="5276088" y="2734056"/>
+            <a:ext cx="1261872" cy="384048"/>
           </a:xfrm>
           <a:prstGeom prst="rect">
             <a:avLst/>
@@ -11537,7 +12911,7 @@
               <a:buNone/>
             </a:pPr>
             <a:r>
-              <a:rPr lang="en-US" sz="1300" b="1" dirty="0">
+              <a:rPr lang="en-US" sz="1150" b="1" dirty="0">
                 <a:solidFill>
                   <a:srgbClr val="0B1F3A"/>
                 </a:solidFill>
@@ -11545,38 +12919,38 @@
                 <a:ea typeface="Calibri" pitchFamily="34" charset="-122"/>
                 <a:cs typeface="Calibri" pitchFamily="34" charset="-120"/>
               </a:rPr>
-              <a:t>Input</a:t>
-            </a:r>
-            <a:endParaRPr lang="en-US" sz="1300" dirty="0"/>
-          </a:p>
-        </p:txBody>
-      </p:sp>
-      <p:sp>
-        <p:nvSpPr>
-          <p:cNvPr id="18" name="Text 13"/>
-          <p:cNvSpPr txBox="1"/>
-          <p:nvPr/>
-        </p:nvSpPr>
-        <p:spPr>
-          <a:xfrm>
-            <a:off x="6172200" y="1984248"/>
-            <a:ext cx="2359152" cy="868680"/>
-          </a:xfrm>
-          <a:prstGeom prst="rect">
-            <a:avLst/>
-          </a:prstGeom>
-          <a:noFill/>
-          <a:ln/>
-        </p:spPr>
-        <p:txBody>
-          <a:bodyPr wrap="square" lIns="0" tIns="0" rIns="0" bIns="0" rtlCol="0" anchor="t"/>
-          <a:lstStyle/>
-          <a:p>
-            <a:pPr indent="0" marL="0">
-              <a:buNone/>
-            </a:pPr>
-            <a:r>
-              <a:rPr lang="en-US" sz="1000" dirty="0">
+              <a:t>View any wallet</a:t>
+            </a:r>
+            <a:endParaRPr lang="en-US" sz="1150" dirty="0"/>
+          </a:p>
+        </p:txBody>
+      </p:sp>
+      <p:sp>
+        <p:nvSpPr>
+          <p:cNvPr id="37" name="Text 32"/>
+          <p:cNvSpPr txBox="1"/>
+          <p:nvPr/>
+        </p:nvSpPr>
+        <p:spPr>
+          <a:xfrm>
+            <a:off x="4818888" y="3191256"/>
+            <a:ext cx="1673352" cy="585216"/>
+          </a:xfrm>
+          <a:prstGeom prst="rect">
+            <a:avLst/>
+          </a:prstGeom>
+          <a:noFill/>
+          <a:ln/>
+        </p:spPr>
+        <p:txBody>
+          <a:bodyPr wrap="square" lIns="0" tIns="0" rIns="0" bIns="0" rtlCol="0" anchor="t"/>
+          <a:lstStyle/>
+          <a:p>
+            <a:pPr indent="0" marL="0">
+              <a:buNone/>
+            </a:pPr>
+            <a:r>
+              <a:rPr lang="en-US" sz="950" dirty="0">
                 <a:solidFill>
                   <a:srgbClr val="1B2430"/>
                 </a:solidFill>
@@ -11584,26 +12958,26 @@
                 <a:ea typeface="Calibri" pitchFamily="34" charset="-122"/>
                 <a:cs typeface="Calibri" pitchFamily="34" charset="-120"/>
               </a:rPr>
-              <a:t>Strict JSON (100.5 or "100" refused), unknown fields rejected, safe-charset keys &amp; IDs (no log injection)</a:t>
-            </a:r>
-            <a:endParaRPr lang="en-US" sz="1000" dirty="0"/>
-          </a:p>
-        </p:txBody>
-      </p:sp>
-      <p:sp>
-        <p:nvSpPr>
-          <p:cNvPr id="19" name="Shape 14"/>
+              <a:t>find a user, see balance and statement</a:t>
+            </a:r>
+            <a:endParaRPr lang="en-US" sz="950" dirty="0"/>
+          </a:p>
+        </p:txBody>
+      </p:sp>
+      <p:sp>
+        <p:nvSpPr>
+          <p:cNvPr id="38" name="Shape 33"/>
           <p:cNvSpPr/>
           <p:nvPr/>
         </p:nvSpPr>
         <p:spPr>
           <a:xfrm>
-            <a:off x="457200" y="3017520"/>
-            <a:ext cx="2606040" cy="1554480"/>
+            <a:off x="6720840" y="2624328"/>
+            <a:ext cx="1874520" cy="1188720"/>
           </a:xfrm>
           <a:prstGeom prst="roundRect">
             <a:avLst>
-              <a:gd name="adj" fmla="val 4706"/>
+              <a:gd name="adj" fmla="val 6154"/>
             </a:avLst>
           </a:prstGeom>
           <a:solidFill>
@@ -11619,14 +12993,14 @@
       </p:sp>
       <p:sp>
         <p:nvSpPr>
-          <p:cNvPr id="20" name="Shape 15"/>
+          <p:cNvPr id="39" name="Shape 34"/>
           <p:cNvSpPr/>
           <p:nvPr/>
         </p:nvSpPr>
         <p:spPr>
           <a:xfrm>
-            <a:off x="594360" y="3154680"/>
-            <a:ext cx="411480" cy="411480"/>
+            <a:off x="6830568" y="2734056"/>
+            <a:ext cx="384048" cy="384048"/>
           </a:xfrm>
           <a:prstGeom prst="ellipse">
             <a:avLst/>
@@ -11644,7 +13018,7 @@
       </p:sp>
       <p:pic>
         <p:nvPicPr>
-          <p:cNvPr id="21" name="Image 3" descr="preencoded.png">    </p:cNvPr>
+          <p:cNvPr id="40" name="Image 3" descr="preencoded.png">    </p:cNvPr>
           <p:cNvPicPr>
             <a:picLocks noChangeAspect="1"/>
           </p:cNvPicPr>
@@ -11658,8 +13032,8 @@
         </p:blipFill>
         <p:spPr>
           <a:xfrm>
-            <a:off x="701345" y="3261665"/>
-            <a:ext cx="197510" cy="197510"/>
+            <a:off x="6930420" y="2833908"/>
+            <a:ext cx="184343" cy="184343"/>
           </a:xfrm>
           <a:prstGeom prst="rect">
             <a:avLst/>
@@ -11668,14 +13042,14 @@
       </p:pic>
       <p:sp>
         <p:nvSpPr>
-          <p:cNvPr id="22" name="Text 16"/>
-          <p:cNvSpPr txBox="1"/>
-          <p:nvPr/>
-        </p:nvSpPr>
-        <p:spPr>
-          <a:xfrm>
-            <a:off x="1115568" y="3200400"/>
-            <a:ext cx="1828800" cy="320040"/>
+          <p:cNvPr id="41" name="Text 35"/>
+          <p:cNvSpPr txBox="1"/>
+          <p:nvPr/>
+        </p:nvSpPr>
+        <p:spPr>
+          <a:xfrm>
+            <a:off x="7287768" y="2734056"/>
+            <a:ext cx="1261872" cy="384048"/>
           </a:xfrm>
           <a:prstGeom prst="rect">
             <a:avLst/>
@@ -11691,7 +13065,7 @@
               <a:buNone/>
             </a:pPr>
             <a:r>
-              <a:rPr lang="en-US" sz="1300" b="1" dirty="0">
+              <a:rPr lang="en-US" sz="1150" b="1" dirty="0">
                 <a:solidFill>
                   <a:srgbClr val="0B1F3A"/>
                 </a:solidFill>
@@ -11699,38 +13073,38 @@
                 <a:ea typeface="Calibri" pitchFamily="34" charset="-122"/>
                 <a:cs typeface="Calibri" pitchFamily="34" charset="-120"/>
               </a:rPr>
-              <a:t>NDPA 2023</a:t>
-            </a:r>
-            <a:endParaRPr lang="en-US" sz="1300" dirty="0"/>
-          </a:p>
-        </p:txBody>
-      </p:sp>
-      <p:sp>
-        <p:nvSpPr>
-          <p:cNvPr id="23" name="Text 17"/>
-          <p:cNvSpPr txBox="1"/>
-          <p:nvPr/>
-        </p:nvSpPr>
-        <p:spPr>
-          <a:xfrm>
-            <a:off x="594360" y="3675888"/>
-            <a:ext cx="2359152" cy="868680"/>
-          </a:xfrm>
-          <a:prstGeom prst="rect">
-            <a:avLst/>
-          </a:prstGeom>
-          <a:noFill/>
-          <a:ln/>
-        </p:spPr>
-        <p:txBody>
-          <a:bodyPr wrap="square" lIns="0" tIns="0" rIns="0" bIns="0" rtlCol="0" anchor="t"/>
-          <a:lstStyle/>
-          <a:p>
-            <a:pPr indent="0" marL="0">
-              <a:buNone/>
-            </a:pPr>
-            <a:r>
-              <a:rPr lang="en-US" sz="1000" dirty="0">
+              <a:t>Freeze wallet</a:t>
+            </a:r>
+            <a:endParaRPr lang="en-US" sz="1150" dirty="0"/>
+          </a:p>
+        </p:txBody>
+      </p:sp>
+      <p:sp>
+        <p:nvSpPr>
+          <p:cNvPr id="42" name="Text 36"/>
+          <p:cNvSpPr txBox="1"/>
+          <p:nvPr/>
+        </p:nvSpPr>
+        <p:spPr>
+          <a:xfrm>
+            <a:off x="6830568" y="3191256"/>
+            <a:ext cx="1673352" cy="585216"/>
+          </a:xfrm>
+          <a:prstGeom prst="rect">
+            <a:avLst/>
+          </a:prstGeom>
+          <a:noFill/>
+          <a:ln/>
+        </p:spPr>
+        <p:txBody>
+          <a:bodyPr wrap="square" lIns="0" tIns="0" rIns="0" bIns="0" rtlCol="0" anchor="t"/>
+          <a:lstStyle/>
+          <a:p>
+            <a:pPr indent="0" marL="0">
+              <a:buNone/>
+            </a:pPr>
+            <a:r>
+              <a:rPr lang="en-US" sz="950" dirty="0">
                 <a:solidFill>
                   <a:srgbClr val="1B2430"/>
                 </a:solidFill>
@@ -11738,34 +13112,34 @@
                 <a:ea typeface="Calibri" pitchFamily="34" charset="-122"/>
                 <a:cs typeface="Calibri" pitchFamily="34" charset="-120"/>
               </a:rPr>
-              <a:t>No BVN/NIN/names stored — opaque customer ID; request bodies never logged</a:t>
-            </a:r>
-            <a:endParaRPr lang="en-US" sz="1000" dirty="0"/>
-          </a:p>
-        </p:txBody>
-      </p:sp>
-      <p:sp>
-        <p:nvSpPr>
-          <p:cNvPr id="24" name="Shape 18"/>
+              <a:t>debit hold: sends refused, credits still land</a:t>
+            </a:r>
+            <a:endParaRPr lang="en-US" sz="950" dirty="0"/>
+          </a:p>
+        </p:txBody>
+      </p:sp>
+      <p:sp>
+        <p:nvSpPr>
+          <p:cNvPr id="43" name="Shape 37"/>
           <p:cNvSpPr/>
           <p:nvPr/>
         </p:nvSpPr>
         <p:spPr>
           <a:xfrm>
-            <a:off x="3246120" y="3017520"/>
-            <a:ext cx="2606040" cy="1554480"/>
+            <a:off x="4709160" y="3977640"/>
+            <a:ext cx="3886200" cy="685800"/>
           </a:xfrm>
           <a:prstGeom prst="roundRect">
             <a:avLst>
-              <a:gd name="adj" fmla="val 4706"/>
+              <a:gd name="adj" fmla="val 10667"/>
             </a:avLst>
           </a:prstGeom>
           <a:solidFill>
-            <a:srgbClr val="F3F5F9"/>
+            <a:srgbClr val="F6ECD3"/>
           </a:solidFill>
           <a:ln w="12700">
             <a:solidFill>
-              <a:srgbClr val="F3F5F9"/>
+              <a:srgbClr val="F6ECD3"/>
             </a:solidFill>
             <a:prstDash val="solid"/>
           </a:ln>
@@ -11773,63 +13147,14 @@
       </p:sp>
       <p:sp>
         <p:nvSpPr>
-          <p:cNvPr id="25" name="Shape 19"/>
-          <p:cNvSpPr/>
-          <p:nvPr/>
-        </p:nvSpPr>
-        <p:spPr>
-          <a:xfrm>
-            <a:off x="3383280" y="3154680"/>
-            <a:ext cx="411480" cy="411480"/>
-          </a:xfrm>
-          <a:prstGeom prst="ellipse">
-            <a:avLst/>
-          </a:prstGeom>
-          <a:solidFill>
-            <a:srgbClr val="0B1F3A"/>
-          </a:solidFill>
-          <a:ln w="12700">
-            <a:solidFill>
-              <a:srgbClr val="0B1F3A"/>
-            </a:solidFill>
-            <a:prstDash val="solid"/>
-          </a:ln>
-        </p:spPr>
-      </p:sp>
-      <p:pic>
-        <p:nvPicPr>
-          <p:cNvPr id="26" name="Image 4" descr="preencoded.png">    </p:cNvPr>
-          <p:cNvPicPr>
-            <a:picLocks noChangeAspect="1"/>
-          </p:cNvPicPr>
-          <p:nvPr/>
-        </p:nvPicPr>
-        <p:blipFill>
-          <a:blip r:embed="rId5"/>
-          <a:stretch>
-            <a:fillRect/>
-          </a:stretch>
-        </p:blipFill>
-        <p:spPr>
-          <a:xfrm>
-            <a:off x="3490265" y="3261665"/>
-            <a:ext cx="197510" cy="197510"/>
-          </a:xfrm>
-          <a:prstGeom prst="rect">
-            <a:avLst/>
-          </a:prstGeom>
-        </p:spPr>
-      </p:pic>
-      <p:sp>
-        <p:nvSpPr>
-          <p:cNvPr id="27" name="Text 20"/>
-          <p:cNvSpPr txBox="1"/>
-          <p:nvPr/>
-        </p:nvSpPr>
-        <p:spPr>
-          <a:xfrm>
-            <a:off x="3904488" y="3200400"/>
-            <a:ext cx="1828800" cy="320040"/>
+          <p:cNvPr id="44" name="Text 38"/>
+          <p:cNvSpPr txBox="1"/>
+          <p:nvPr/>
+        </p:nvSpPr>
+        <p:spPr>
+          <a:xfrm>
+            <a:off x="4846320" y="4023360"/>
+            <a:ext cx="3611880" cy="594360"/>
           </a:xfrm>
           <a:prstGeom prst="rect">
             <a:avLst/>
@@ -11845,46 +13170,7 @@
               <a:buNone/>
             </a:pPr>
             <a:r>
-              <a:rPr lang="en-US" sz="1300" b="1" dirty="0">
-                <a:solidFill>
-                  <a:srgbClr val="0B1F3A"/>
-                </a:solidFill>
-                <a:latin typeface="Calibri" pitchFamily="34" charset="0"/>
-                <a:ea typeface="Calibri" pitchFamily="34" charset="-122"/>
-                <a:cs typeface="Calibri" pitchFamily="34" charset="-120"/>
-              </a:rPr>
-              <a:t>USSD &amp; NIP</a:t>
-            </a:r>
-            <a:endParaRPr lang="en-US" sz="1300" dirty="0"/>
-          </a:p>
-        </p:txBody>
-      </p:sp>
-      <p:sp>
-        <p:nvSpPr>
-          <p:cNvPr id="28" name="Text 21"/>
-          <p:cNvSpPr txBox="1"/>
-          <p:nvPr/>
-        </p:nvSpPr>
-        <p:spPr>
-          <a:xfrm>
-            <a:off x="3383280" y="3675888"/>
-            <a:ext cx="2359152" cy="868680"/>
-          </a:xfrm>
-          <a:prstGeom prst="rect">
-            <a:avLst/>
-          </a:prstGeom>
-          <a:noFill/>
-          <a:ln/>
-        </p:spPr>
-        <p:txBody>
-          <a:bodyPr wrap="square" lIns="0" tIns="0" rIns="0" bIns="0" rtlCol="0" anchor="t"/>
-          <a:lstStyle/>
-          <a:p>
-            <a:pPr indent="0" marL="0">
-              <a:buNone/>
-            </a:pPr>
-            <a:r>
-              <a:rPr lang="en-US" sz="1000" dirty="0">
+              <a:rPr lang="en-US" sz="950" dirty="0">
                 <a:solidFill>
                   <a:srgbClr val="1B2430"/>
                 </a:solidFill>
@@ -11892,169 +13178,15 @@
                 <a:ea typeface="Calibri" pitchFamily="34" charset="-122"/>
                 <a:cs typeface="Calibri" pitchFamily="34" charset="-120"/>
               </a:rPr>
-              <a:t>Retries made harmless by idempotency; NIP session ID de-duplicates credits; gateway can pass X-Correlation-ID</a:t>
-            </a:r>
-            <a:endParaRPr lang="en-US" sz="1000" dirty="0"/>
-          </a:p>
-        </p:txBody>
-      </p:sp>
-      <p:sp>
-        <p:nvSpPr>
-          <p:cNvPr id="29" name="Shape 22"/>
-          <p:cNvSpPr/>
-          <p:nvPr/>
-        </p:nvSpPr>
-        <p:spPr>
-          <a:xfrm>
-            <a:off x="6035040" y="3017520"/>
-            <a:ext cx="2606040" cy="1554480"/>
-          </a:xfrm>
-          <a:prstGeom prst="roundRect">
-            <a:avLst>
-              <a:gd name="adj" fmla="val 4706"/>
-            </a:avLst>
-          </a:prstGeom>
-          <a:solidFill>
-            <a:srgbClr val="F3F5F9"/>
-          </a:solidFill>
-          <a:ln w="12700">
-            <a:solidFill>
-              <a:srgbClr val="F3F5F9"/>
-            </a:solidFill>
-            <a:prstDash val="solid"/>
-          </a:ln>
-        </p:spPr>
-      </p:sp>
-      <p:sp>
-        <p:nvSpPr>
-          <p:cNvPr id="30" name="Shape 23"/>
-          <p:cNvSpPr/>
-          <p:nvPr/>
-        </p:nvSpPr>
-        <p:spPr>
-          <a:xfrm>
-            <a:off x="6172200" y="3154680"/>
-            <a:ext cx="411480" cy="411480"/>
-          </a:xfrm>
-          <a:prstGeom prst="ellipse">
-            <a:avLst/>
-          </a:prstGeom>
-          <a:solidFill>
-            <a:srgbClr val="0B1F3A"/>
-          </a:solidFill>
-          <a:ln w="12700">
-            <a:solidFill>
-              <a:srgbClr val="0B1F3A"/>
-            </a:solidFill>
-            <a:prstDash val="solid"/>
-          </a:ln>
-        </p:spPr>
-      </p:sp>
-      <p:pic>
-        <p:nvPicPr>
-          <p:cNvPr id="31" name="Image 5" descr="preencoded.png">    </p:cNvPr>
-          <p:cNvPicPr>
-            <a:picLocks noChangeAspect="1"/>
-          </p:cNvPicPr>
-          <p:nvPr/>
-        </p:nvPicPr>
-        <p:blipFill>
-          <a:blip r:embed="rId6"/>
-          <a:stretch>
-            <a:fillRect/>
-          </a:stretch>
-        </p:blipFill>
-        <p:spPr>
-          <a:xfrm>
-            <a:off x="6279185" y="3261665"/>
-            <a:ext cx="197510" cy="197510"/>
-          </a:xfrm>
-          <a:prstGeom prst="rect">
-            <a:avLst/>
-          </a:prstGeom>
-        </p:spPr>
-      </p:pic>
-      <p:sp>
-        <p:nvSpPr>
-          <p:cNvPr id="32" name="Text 24"/>
-          <p:cNvSpPr txBox="1"/>
-          <p:nvPr/>
-        </p:nvSpPr>
-        <p:spPr>
-          <a:xfrm>
-            <a:off x="6693408" y="3200400"/>
-            <a:ext cx="1828800" cy="320040"/>
-          </a:xfrm>
-          <a:prstGeom prst="rect">
-            <a:avLst/>
-          </a:prstGeom>
-          <a:noFill/>
-          <a:ln/>
-        </p:spPr>
-        <p:txBody>
-          <a:bodyPr wrap="square" lIns="0" tIns="0" rIns="0" bIns="0" rtlCol="0" anchor="ctr"/>
-          <a:lstStyle/>
-          <a:p>
-            <a:pPr indent="0" marL="0">
-              <a:buNone/>
-            </a:pPr>
-            <a:r>
-              <a:rPr lang="en-US" sz="1300" b="1" dirty="0">
-                <a:solidFill>
-                  <a:srgbClr val="0B1F3A"/>
-                </a:solidFill>
-                <a:latin typeface="Calibri" pitchFamily="34" charset="0"/>
-                <a:ea typeface="Calibri" pitchFamily="34" charset="-122"/>
-                <a:cs typeface="Calibri" pitchFamily="34" charset="-120"/>
-              </a:rPr>
-              <a:t>CBN &amp; abuse</a:t>
-            </a:r>
-            <a:endParaRPr lang="en-US" sz="1300" dirty="0"/>
-          </a:p>
-        </p:txBody>
-      </p:sp>
-      <p:sp>
-        <p:nvSpPr>
-          <p:cNvPr id="33" name="Text 25"/>
-          <p:cNvSpPr txBox="1"/>
-          <p:nvPr/>
-        </p:nvSpPr>
-        <p:spPr>
-          <a:xfrm>
-            <a:off x="6172200" y="3675888"/>
-            <a:ext cx="2359152" cy="868680"/>
-          </a:xfrm>
-          <a:prstGeom prst="rect">
-            <a:avLst/>
-          </a:prstGeom>
-          <a:noFill/>
-          <a:ln/>
-        </p:spPr>
-        <p:txBody>
-          <a:bodyPr wrap="square" lIns="0" tIns="0" rIns="0" bIns="0" rtlCol="0" anchor="t"/>
-          <a:lstStyle/>
-          <a:p>
-            <a:pPr indent="0" marL="0">
-              <a:buNone/>
-            </a:pPr>
-            <a:r>
-              <a:rPr lang="en-US" sz="1000" dirty="0">
-                <a:solidFill>
-                  <a:srgbClr val="1B2430"/>
-                </a:solidFill>
-                <a:latin typeface="Calibri" pitchFamily="34" charset="0"/>
-                <a:ea typeface="Calibri" pitchFamily="34" charset="-122"/>
-                <a:cs typeface="Calibri" pitchFamily="34" charset="-120"/>
-              </a:rPr>
-              <a:t>Per-customer rate limit (429 + Retry-After); configurable daily limit; tiered-KYC limits are next</a:t>
-            </a:r>
-            <a:endParaRPr lang="en-US" sz="1000" dirty="0"/>
-          </a:p>
-        </p:txBody>
-      </p:sp>
-      <p:sp>
-        <p:nvSpPr>
-          <p:cNvPr id="34" name="Text 26"/>
+              <a:t>Every admin action goes to an append-only log. No self-disable or self-demotion; the last admin can't be removed. First admin is seeded from config.</a:t>
+            </a:r>
+            <a:endParaRPr lang="en-US" sz="950" dirty="0"/>
+          </a:p>
+        </p:txBody>
+      </p:sp>
+      <p:sp>
+        <p:nvSpPr>
+          <p:cNvPr id="45" name="Text 39"/>
           <p:cNvSpPr txBox="1"/>
           <p:nvPr/>
         </p:nvSpPr>
@@ -12093,7 +13225,7 @@
       </p:sp>
       <p:sp>
         <p:nvSpPr>
-          <p:cNvPr id="35" name="Text 27"/>
+          <p:cNvPr id="46" name="Text 40"/>
           <p:cNvSpPr txBox="1"/>
           <p:nvPr/>
         </p:nvSpPr>
@@ -12195,7 +13327,7 @@
                 <a:ea typeface="Calibri" pitchFamily="34" charset="-122"/>
                 <a:cs typeface="Calibri" pitchFamily="34" charset="-120"/>
               </a:rPr>
-              <a:t>EVIDENCE</a:t>
+              <a:t>SECURITY &amp; NIGERIAN CONTEXT</a:t>
             </a:r>
             <a:endParaRPr lang="en-US" sz="1000" dirty="0"/>
           </a:p>
@@ -12234,31 +13366,221 @@
                 <a:ea typeface="Cambria" pitchFamily="34" charset="-122"/>
                 <a:cs typeface="Cambria" pitchFamily="34" charset="-120"/>
               </a:rPr>
-              <a:t>The tests fail when the safety is removed</a:t>
+              <a:t>Built for where it would actually run</a:t>
             </a:r>
             <a:endParaRPr lang="en-US" sz="2400" dirty="0"/>
           </a:p>
         </p:txBody>
       </p:sp>
-      <p:graphicFrame>
-        <p:nvGraphicFramePr>
-          <p:cNvPr id="4" name="Chart 0" descr=""/>
-          <p:cNvGraphicFramePr/>
-          <p:nvPr/>
-        </p:nvGraphicFramePr>
-        <p:xfrm>
-          <a:off x="365760" y="1234440"/>
-          <a:ext cx="4846320" cy="3429000"/>
-        </p:xfrm>
-        <a:graphic xmlns:a="http://schemas.openxmlformats.org/drawingml/2006/main">
-          <a:graphicData uri="http://schemas.openxmlformats.org/drawingml/2006/chart">
-            <c:chart xmlns:c="http://schemas.openxmlformats.org/drawingml/2006/chart" r:id="rId1"/>
-          </a:graphicData>
-        </a:graphic>
-      </p:graphicFrame>
+      <p:sp>
+        <p:nvSpPr>
+          <p:cNvPr id="4" name="Shape 2"/>
+          <p:cNvSpPr/>
+          <p:nvPr/>
+        </p:nvSpPr>
+        <p:spPr>
+          <a:xfrm>
+            <a:off x="457200" y="1325880"/>
+            <a:ext cx="2606040" cy="1554480"/>
+          </a:xfrm>
+          <a:prstGeom prst="roundRect">
+            <a:avLst>
+              <a:gd name="adj" fmla="val 4706"/>
+            </a:avLst>
+          </a:prstGeom>
+          <a:solidFill>
+            <a:srgbClr val="F3F5F9"/>
+          </a:solidFill>
+          <a:ln w="12700">
+            <a:solidFill>
+              <a:srgbClr val="F3F5F9"/>
+            </a:solidFill>
+            <a:prstDash val="solid"/>
+          </a:ln>
+        </p:spPr>
+      </p:sp>
+      <p:sp>
+        <p:nvSpPr>
+          <p:cNvPr id="5" name="Shape 3"/>
+          <p:cNvSpPr/>
+          <p:nvPr/>
+        </p:nvSpPr>
+        <p:spPr>
+          <a:xfrm>
+            <a:off x="594360" y="1463040"/>
+            <a:ext cx="411480" cy="411480"/>
+          </a:xfrm>
+          <a:prstGeom prst="ellipse">
+            <a:avLst/>
+          </a:prstGeom>
+          <a:solidFill>
+            <a:srgbClr val="0B1F3A"/>
+          </a:solidFill>
+          <a:ln w="12700">
+            <a:solidFill>
+              <a:srgbClr val="0B1F3A"/>
+            </a:solidFill>
+            <a:prstDash val="solid"/>
+          </a:ln>
+        </p:spPr>
+      </p:sp>
       <p:pic>
         <p:nvPicPr>
-          <p:cNvPr id="5" name="Image 0" descr="preencoded.png">    </p:cNvPr>
+          <p:cNvPr id="6" name="Image 0" descr="preencoded.png">    </p:cNvPr>
+          <p:cNvPicPr>
+            <a:picLocks noChangeAspect="1"/>
+          </p:cNvPicPr>
+          <p:nvPr/>
+        </p:nvPicPr>
+        <p:blipFill>
+          <a:blip r:embed="rId1"/>
+          <a:stretch>
+            <a:fillRect/>
+          </a:stretch>
+        </p:blipFill>
+        <p:spPr>
+          <a:xfrm>
+            <a:off x="701345" y="1570025"/>
+            <a:ext cx="197510" cy="197510"/>
+          </a:xfrm>
+          <a:prstGeom prst="rect">
+            <a:avLst/>
+          </a:prstGeom>
+        </p:spPr>
+      </p:pic>
+      <p:sp>
+        <p:nvSpPr>
+          <p:cNvPr id="7" name="Text 4"/>
+          <p:cNvSpPr txBox="1"/>
+          <p:nvPr/>
+        </p:nvSpPr>
+        <p:spPr>
+          <a:xfrm>
+            <a:off x="1115568" y="1508760"/>
+            <a:ext cx="1828800" cy="320040"/>
+          </a:xfrm>
+          <a:prstGeom prst="rect">
+            <a:avLst/>
+          </a:prstGeom>
+          <a:noFill/>
+          <a:ln/>
+        </p:spPr>
+        <p:txBody>
+          <a:bodyPr wrap="square" lIns="0" tIns="0" rIns="0" bIns="0" rtlCol="0" anchor="ctr"/>
+          <a:lstStyle/>
+          <a:p>
+            <a:pPr indent="0" marL="0">
+              <a:buNone/>
+            </a:pPr>
+            <a:r>
+              <a:rPr lang="en-US" sz="1300" b="1" dirty="0">
+                <a:solidFill>
+                  <a:srgbClr val="0B1F3A"/>
+                </a:solidFill>
+                <a:latin typeface="Calibri" pitchFamily="34" charset="0"/>
+                <a:ea typeface="Calibri" pitchFamily="34" charset="-122"/>
+                <a:cs typeface="Calibri" pitchFamily="34" charset="-120"/>
+              </a:rPr>
+              <a:t>Auth</a:t>
+            </a:r>
+            <a:endParaRPr lang="en-US" sz="1300" dirty="0"/>
+          </a:p>
+        </p:txBody>
+      </p:sp>
+      <p:sp>
+        <p:nvSpPr>
+          <p:cNvPr id="8" name="Text 5"/>
+          <p:cNvSpPr txBox="1"/>
+          <p:nvPr/>
+        </p:nvSpPr>
+        <p:spPr>
+          <a:xfrm>
+            <a:off x="594360" y="1984248"/>
+            <a:ext cx="2359152" cy="868680"/>
+          </a:xfrm>
+          <a:prstGeom prst="rect">
+            <a:avLst/>
+          </a:prstGeom>
+          <a:noFill/>
+          <a:ln/>
+        </p:spPr>
+        <p:txBody>
+          <a:bodyPr wrap="square" lIns="0" tIns="0" rIns="0" bIns="0" rtlCol="0" anchor="t"/>
+          <a:lstStyle/>
+          <a:p>
+            <a:pPr indent="0" marL="0">
+              <a:buNone/>
+            </a:pPr>
+            <a:r>
+              <a:rPr lang="en-US" sz="1000" dirty="0">
+                <a:solidFill>
+                  <a:srgbClr val="1B2430"/>
+                </a:solidFill>
+                <a:latin typeface="Calibri" pitchFamily="34" charset="0"/>
+                <a:ea typeface="Calibri" pitchFamily="34" charset="-122"/>
+                <a:cs typeface="Calibri" pitchFamily="34" charset="-120"/>
+              </a:rPr>
+              <a:t>JWT signature, issuer, audience, expiry; HS256 pinned (alg:none rejected); user status + token version checked per request; admin role checked twice</a:t>
+            </a:r>
+            <a:endParaRPr lang="en-US" sz="1000" dirty="0"/>
+          </a:p>
+        </p:txBody>
+      </p:sp>
+      <p:sp>
+        <p:nvSpPr>
+          <p:cNvPr id="9" name="Shape 6"/>
+          <p:cNvSpPr/>
+          <p:nvPr/>
+        </p:nvSpPr>
+        <p:spPr>
+          <a:xfrm>
+            <a:off x="3246120" y="1325880"/>
+            <a:ext cx="2606040" cy="1554480"/>
+          </a:xfrm>
+          <a:prstGeom prst="roundRect">
+            <a:avLst>
+              <a:gd name="adj" fmla="val 4706"/>
+            </a:avLst>
+          </a:prstGeom>
+          <a:solidFill>
+            <a:srgbClr val="F3F5F9"/>
+          </a:solidFill>
+          <a:ln w="12700">
+            <a:solidFill>
+              <a:srgbClr val="F3F5F9"/>
+            </a:solidFill>
+            <a:prstDash val="solid"/>
+          </a:ln>
+        </p:spPr>
+      </p:sp>
+      <p:sp>
+        <p:nvSpPr>
+          <p:cNvPr id="10" name="Shape 7"/>
+          <p:cNvSpPr/>
+          <p:nvPr/>
+        </p:nvSpPr>
+        <p:spPr>
+          <a:xfrm>
+            <a:off x="3383280" y="1463040"/>
+            <a:ext cx="411480" cy="411480"/>
+          </a:xfrm>
+          <a:prstGeom prst="ellipse">
+            <a:avLst/>
+          </a:prstGeom>
+          <a:solidFill>
+            <a:srgbClr val="0B1F3A"/>
+          </a:solidFill>
+          <a:ln w="12700">
+            <a:solidFill>
+              <a:srgbClr val="0B1F3A"/>
+            </a:solidFill>
+            <a:prstDash val="solid"/>
+          </a:ln>
+        </p:spPr>
+      </p:sp>
+      <p:pic>
+        <p:nvPicPr>
+          <p:cNvPr id="11" name="Image 1" descr="preencoded.png">    </p:cNvPr>
           <p:cNvPicPr>
             <a:picLocks noChangeAspect="1"/>
           </p:cNvPicPr>
@@ -12272,8 +13594,8 @@
         </p:blipFill>
         <p:spPr>
           <a:xfrm>
-            <a:off x="5486400" y="1362456"/>
-            <a:ext cx="274320" cy="274320"/>
+            <a:off x="3490265" y="1570025"/>
+            <a:ext cx="197510" cy="197510"/>
           </a:xfrm>
           <a:prstGeom prst="rect">
             <a:avLst/>
@@ -12282,30 +13604,30 @@
       </p:pic>
       <p:sp>
         <p:nvSpPr>
-          <p:cNvPr id="6" name="Text 2"/>
-          <p:cNvSpPr txBox="1"/>
-          <p:nvPr/>
-        </p:nvSpPr>
-        <p:spPr>
-          <a:xfrm>
-            <a:off x="5897880" y="1325880"/>
-            <a:ext cx="2788920" cy="274320"/>
-          </a:xfrm>
-          <a:prstGeom prst="rect">
-            <a:avLst/>
-          </a:prstGeom>
-          <a:noFill/>
-          <a:ln/>
-        </p:spPr>
-        <p:txBody>
-          <a:bodyPr wrap="square" lIns="0" tIns="0" rIns="0" bIns="0" rtlCol="0" anchor="t"/>
-          <a:lstStyle/>
-          <a:p>
-            <a:pPr indent="0" marL="0">
-              <a:buNone/>
-            </a:pPr>
-            <a:r>
-              <a:rPr lang="en-US" sz="1250" b="1" dirty="0">
+          <p:cNvPr id="12" name="Text 8"/>
+          <p:cNvSpPr txBox="1"/>
+          <p:nvPr/>
+        </p:nvSpPr>
+        <p:spPr>
+          <a:xfrm>
+            <a:off x="3904488" y="1508760"/>
+            <a:ext cx="1828800" cy="320040"/>
+          </a:xfrm>
+          <a:prstGeom prst="rect">
+            <a:avLst/>
+          </a:prstGeom>
+          <a:noFill/>
+          <a:ln/>
+        </p:spPr>
+        <p:txBody>
+          <a:bodyPr wrap="square" lIns="0" tIns="0" rIns="0" bIns="0" rtlCol="0" anchor="ctr"/>
+          <a:lstStyle/>
+          <a:p>
+            <a:pPr indent="0" marL="0">
+              <a:buNone/>
+            </a:pPr>
+            <a:r>
+              <a:rPr lang="en-US" sz="1300" b="1" dirty="0">
                 <a:solidFill>
                   <a:srgbClr val="0B1F3A"/>
                 </a:solidFill>
@@ -12313,54 +13635,106 @@
                 <a:ea typeface="Calibri" pitchFamily="34" charset="-122"/>
                 <a:cs typeface="Calibri" pitchFamily="34" charset="-120"/>
               </a:rPr>
-              <a:t>With the lock</a:t>
-            </a:r>
-            <a:endParaRPr lang="en-US" sz="1250" dirty="0"/>
-          </a:p>
-        </p:txBody>
-      </p:sp>
-      <p:sp>
-        <p:nvSpPr>
-          <p:cNvPr id="7" name="Text 3"/>
-          <p:cNvSpPr txBox="1"/>
-          <p:nvPr/>
-        </p:nvSpPr>
-        <p:spPr>
-          <a:xfrm>
-            <a:off x="5897880" y="1600200"/>
-            <a:ext cx="2788920" cy="530352"/>
-          </a:xfrm>
-          <a:prstGeom prst="rect">
-            <a:avLst/>
-          </a:prstGeom>
-          <a:noFill/>
-          <a:ln/>
-        </p:spPr>
-        <p:txBody>
-          <a:bodyPr wrap="square" lIns="0" tIns="0" rIns="0" bIns="0" rtlCol="0" anchor="t"/>
-          <a:lstStyle/>
-          <a:p>
-            <a:pPr indent="0" marL="0">
-              <a:buNone/>
-            </a:pPr>
-            <a:r>
-              <a:rPr lang="en-US" sz="1050" dirty="0">
-                <a:solidFill>
-                  <a:srgbClr val="5B6675"/>
-                </a:solidFill>
-                <a:latin typeface="Calibri" pitchFamily="34" charset="0"/>
-                <a:ea typeface="Calibri" pitchFamily="34" charset="-122"/>
-                <a:cs typeface="Calibri" pitchFamily="34" charset="-120"/>
-              </a:rPr>
-              <a:t>10 succeed, balance ₦0, ledger sum = balance — identical over 3 runs (~250 ms on an M1)</a:t>
-            </a:r>
-            <a:endParaRPr lang="en-US" sz="1050" dirty="0"/>
-          </a:p>
-        </p:txBody>
+              <a:t>No probing</a:t>
+            </a:r>
+            <a:endParaRPr lang="en-US" sz="1300" dirty="0"/>
+          </a:p>
+        </p:txBody>
+      </p:sp>
+      <p:sp>
+        <p:nvSpPr>
+          <p:cNvPr id="13" name="Text 9"/>
+          <p:cNvSpPr txBox="1"/>
+          <p:nvPr/>
+        </p:nvSpPr>
+        <p:spPr>
+          <a:xfrm>
+            <a:off x="3383280" y="1984248"/>
+            <a:ext cx="2359152" cy="868680"/>
+          </a:xfrm>
+          <a:prstGeom prst="rect">
+            <a:avLst/>
+          </a:prstGeom>
+          <a:noFill/>
+          <a:ln/>
+        </p:spPr>
+        <p:txBody>
+          <a:bodyPr wrap="square" lIns="0" tIns="0" rIns="0" bIns="0" rtlCol="0" anchor="t"/>
+          <a:lstStyle/>
+          <a:p>
+            <a:pPr indent="0" marL="0">
+              <a:buNone/>
+            </a:pPr>
+            <a:r>
+              <a:rPr lang="en-US" sz="1000" dirty="0">
+                <a:solidFill>
+                  <a:srgbClr val="1B2430"/>
+                </a:solidFill>
+                <a:latin typeface="Calibri" pitchFamily="34" charset="0"/>
+                <a:ea typeface="Calibri" pitchFamily="34" charset="-122"/>
+                <a:cs typeface="Calibri" pitchFamily="34" charset="-120"/>
+              </a:rPr>
+              <a:t>Other customers' wallets return 404; receipts show only the sender's balance</a:t>
+            </a:r>
+            <a:endParaRPr lang="en-US" sz="1000" dirty="0"/>
+          </a:p>
+        </p:txBody>
+      </p:sp>
+      <p:sp>
+        <p:nvSpPr>
+          <p:cNvPr id="14" name="Shape 10"/>
+          <p:cNvSpPr/>
+          <p:nvPr/>
+        </p:nvSpPr>
+        <p:spPr>
+          <a:xfrm>
+            <a:off x="6035040" y="1325880"/>
+            <a:ext cx="2606040" cy="1554480"/>
+          </a:xfrm>
+          <a:prstGeom prst="roundRect">
+            <a:avLst>
+              <a:gd name="adj" fmla="val 4706"/>
+            </a:avLst>
+          </a:prstGeom>
+          <a:solidFill>
+            <a:srgbClr val="F3F5F9"/>
+          </a:solidFill>
+          <a:ln w="12700">
+            <a:solidFill>
+              <a:srgbClr val="F3F5F9"/>
+            </a:solidFill>
+            <a:prstDash val="solid"/>
+          </a:ln>
+        </p:spPr>
+      </p:sp>
+      <p:sp>
+        <p:nvSpPr>
+          <p:cNvPr id="15" name="Shape 11"/>
+          <p:cNvSpPr/>
+          <p:nvPr/>
+        </p:nvSpPr>
+        <p:spPr>
+          <a:xfrm>
+            <a:off x="6172200" y="1463040"/>
+            <a:ext cx="411480" cy="411480"/>
+          </a:xfrm>
+          <a:prstGeom prst="ellipse">
+            <a:avLst/>
+          </a:prstGeom>
+          <a:solidFill>
+            <a:srgbClr val="0B1F3A"/>
+          </a:solidFill>
+          <a:ln w="12700">
+            <a:solidFill>
+              <a:srgbClr val="0B1F3A"/>
+            </a:solidFill>
+            <a:prstDash val="solid"/>
+          </a:ln>
+        </p:spPr>
       </p:sp>
       <p:pic>
         <p:nvPicPr>
-          <p:cNvPr id="8" name="Image 1" descr="preencoded.png">    </p:cNvPr>
+          <p:cNvPr id="16" name="Image 2" descr="preencoded.png">    </p:cNvPr>
           <p:cNvPicPr>
             <a:picLocks noChangeAspect="1"/>
           </p:cNvPicPr>
@@ -12374,8 +13748,8 @@
         </p:blipFill>
         <p:spPr>
           <a:xfrm>
-            <a:off x="5486400" y="2203704"/>
-            <a:ext cx="274320" cy="274320"/>
+            <a:off x="6279185" y="1570025"/>
+            <a:ext cx="197510" cy="197510"/>
           </a:xfrm>
           <a:prstGeom prst="rect">
             <a:avLst/>
@@ -12384,30 +13758,30 @@
       </p:pic>
       <p:sp>
         <p:nvSpPr>
-          <p:cNvPr id="9" name="Text 4"/>
-          <p:cNvSpPr txBox="1"/>
-          <p:nvPr/>
-        </p:nvSpPr>
-        <p:spPr>
-          <a:xfrm>
-            <a:off x="5897880" y="2167128"/>
-            <a:ext cx="2788920" cy="274320"/>
-          </a:xfrm>
-          <a:prstGeom prst="rect">
-            <a:avLst/>
-          </a:prstGeom>
-          <a:noFill/>
-          <a:ln/>
-        </p:spPr>
-        <p:txBody>
-          <a:bodyPr wrap="square" lIns="0" tIns="0" rIns="0" bIns="0" rtlCol="0" anchor="t"/>
-          <a:lstStyle/>
-          <a:p>
-            <a:pPr indent="0" marL="0">
-              <a:buNone/>
-            </a:pPr>
-            <a:r>
-              <a:rPr lang="en-US" sz="1250" b="1" dirty="0">
+          <p:cNvPr id="17" name="Text 12"/>
+          <p:cNvSpPr txBox="1"/>
+          <p:nvPr/>
+        </p:nvSpPr>
+        <p:spPr>
+          <a:xfrm>
+            <a:off x="6693408" y="1508760"/>
+            <a:ext cx="1828800" cy="320040"/>
+          </a:xfrm>
+          <a:prstGeom prst="rect">
+            <a:avLst/>
+          </a:prstGeom>
+          <a:noFill/>
+          <a:ln/>
+        </p:spPr>
+        <p:txBody>
+          <a:bodyPr wrap="square" lIns="0" tIns="0" rIns="0" bIns="0" rtlCol="0" anchor="ctr"/>
+          <a:lstStyle/>
+          <a:p>
+            <a:pPr indent="0" marL="0">
+              <a:buNone/>
+            </a:pPr>
+            <a:r>
+              <a:rPr lang="en-US" sz="1300" b="1" dirty="0">
                 <a:solidFill>
                   <a:srgbClr val="0B1F3A"/>
                 </a:solidFill>
@@ -12415,54 +13789,106 @@
                 <a:ea typeface="Calibri" pitchFamily="34" charset="-122"/>
                 <a:cs typeface="Calibri" pitchFamily="34" charset="-120"/>
               </a:rPr>
-              <a:t>Lock removed</a:t>
-            </a:r>
-            <a:endParaRPr lang="en-US" sz="1250" dirty="0"/>
-          </a:p>
-        </p:txBody>
-      </p:sp>
-      <p:sp>
-        <p:nvSpPr>
-          <p:cNvPr id="10" name="Text 5"/>
-          <p:cNvSpPr txBox="1"/>
-          <p:nvPr/>
-        </p:nvSpPr>
-        <p:spPr>
-          <a:xfrm>
-            <a:off x="5897880" y="2441448"/>
-            <a:ext cx="2788920" cy="530352"/>
-          </a:xfrm>
-          <a:prstGeom prst="rect">
-            <a:avLst/>
-          </a:prstGeom>
-          <a:noFill/>
-          <a:ln/>
-        </p:spPr>
-        <p:txBody>
-          <a:bodyPr wrap="square" lIns="0" tIns="0" rIns="0" bIns="0" rtlCol="0" anchor="t"/>
-          <a:lstStyle/>
-          <a:p>
-            <a:pPr indent="0" marL="0">
-              <a:buNone/>
-            </a:pPr>
-            <a:r>
-              <a:rPr lang="en-US" sz="1050" dirty="0">
-                <a:solidFill>
-                  <a:srgbClr val="5B6675"/>
-                </a:solidFill>
-                <a:latin typeface="Calibri" pitchFamily="34" charset="0"/>
-                <a:ea typeface="Calibri" pitchFamily="34" charset="-122"/>
-                <a:cs typeface="Calibri" pitchFamily="34" charset="-120"/>
-              </a:rPr>
-              <a:t>199 "succeed" from ₦1,000 (lost updates); daily-limit test lets 40/40 through</a:t>
-            </a:r>
-            <a:endParaRPr lang="en-US" sz="1050" dirty="0"/>
-          </a:p>
-        </p:txBody>
+              <a:t>Input</a:t>
+            </a:r>
+            <a:endParaRPr lang="en-US" sz="1300" dirty="0"/>
+          </a:p>
+        </p:txBody>
+      </p:sp>
+      <p:sp>
+        <p:nvSpPr>
+          <p:cNvPr id="18" name="Text 13"/>
+          <p:cNvSpPr txBox="1"/>
+          <p:nvPr/>
+        </p:nvSpPr>
+        <p:spPr>
+          <a:xfrm>
+            <a:off x="6172200" y="1984248"/>
+            <a:ext cx="2359152" cy="868680"/>
+          </a:xfrm>
+          <a:prstGeom prst="rect">
+            <a:avLst/>
+          </a:prstGeom>
+          <a:noFill/>
+          <a:ln/>
+        </p:spPr>
+        <p:txBody>
+          <a:bodyPr wrap="square" lIns="0" tIns="0" rIns="0" bIns="0" rtlCol="0" anchor="t"/>
+          <a:lstStyle/>
+          <a:p>
+            <a:pPr indent="0" marL="0">
+              <a:buNone/>
+            </a:pPr>
+            <a:r>
+              <a:rPr lang="en-US" sz="1000" dirty="0">
+                <a:solidFill>
+                  <a:srgbClr val="1B2430"/>
+                </a:solidFill>
+                <a:latin typeface="Calibri" pitchFamily="34" charset="0"/>
+                <a:ea typeface="Calibri" pitchFamily="34" charset="-122"/>
+                <a:cs typeface="Calibri" pitchFamily="34" charset="-120"/>
+              </a:rPr>
+              <a:t>Strict JSON (100.5 or "100" refused), unknown fields rejected, safe-charset keys &amp; IDs (no log injection)</a:t>
+            </a:r>
+            <a:endParaRPr lang="en-US" sz="1000" dirty="0"/>
+          </a:p>
+        </p:txBody>
+      </p:sp>
+      <p:sp>
+        <p:nvSpPr>
+          <p:cNvPr id="19" name="Shape 14"/>
+          <p:cNvSpPr/>
+          <p:nvPr/>
+        </p:nvSpPr>
+        <p:spPr>
+          <a:xfrm>
+            <a:off x="457200" y="3017520"/>
+            <a:ext cx="2606040" cy="1554480"/>
+          </a:xfrm>
+          <a:prstGeom prst="roundRect">
+            <a:avLst>
+              <a:gd name="adj" fmla="val 4706"/>
+            </a:avLst>
+          </a:prstGeom>
+          <a:solidFill>
+            <a:srgbClr val="F3F5F9"/>
+          </a:solidFill>
+          <a:ln w="12700">
+            <a:solidFill>
+              <a:srgbClr val="F3F5F9"/>
+            </a:solidFill>
+            <a:prstDash val="solid"/>
+          </a:ln>
+        </p:spPr>
+      </p:sp>
+      <p:sp>
+        <p:nvSpPr>
+          <p:cNvPr id="20" name="Shape 15"/>
+          <p:cNvSpPr/>
+          <p:nvPr/>
+        </p:nvSpPr>
+        <p:spPr>
+          <a:xfrm>
+            <a:off x="594360" y="3154680"/>
+            <a:ext cx="411480" cy="411480"/>
+          </a:xfrm>
+          <a:prstGeom prst="ellipse">
+            <a:avLst/>
+          </a:prstGeom>
+          <a:solidFill>
+            <a:srgbClr val="0B1F3A"/>
+          </a:solidFill>
+          <a:ln w="12700">
+            <a:solidFill>
+              <a:srgbClr val="0B1F3A"/>
+            </a:solidFill>
+            <a:prstDash val="solid"/>
+          </a:ln>
+        </p:spPr>
       </p:sp>
       <p:pic>
         <p:nvPicPr>
-          <p:cNvPr id="11" name="Image 2" descr="preencoded.png">    </p:cNvPr>
+          <p:cNvPr id="21" name="Image 3" descr="preencoded.png">    </p:cNvPr>
           <p:cNvPicPr>
             <a:picLocks noChangeAspect="1"/>
           </p:cNvPicPr>
@@ -12476,8 +13902,8 @@
         </p:blipFill>
         <p:spPr>
           <a:xfrm>
-            <a:off x="5486400" y="3044952"/>
-            <a:ext cx="274320" cy="274320"/>
+            <a:off x="701345" y="3261665"/>
+            <a:ext cx="197510" cy="197510"/>
           </a:xfrm>
           <a:prstGeom prst="rect">
             <a:avLst/>
@@ -12486,30 +13912,30 @@
       </p:pic>
       <p:sp>
         <p:nvSpPr>
-          <p:cNvPr id="12" name="Text 6"/>
-          <p:cNvSpPr txBox="1"/>
-          <p:nvPr/>
-        </p:nvSpPr>
-        <p:spPr>
-          <a:xfrm>
-            <a:off x="5897880" y="3008376"/>
-            <a:ext cx="2788920" cy="274320"/>
-          </a:xfrm>
-          <a:prstGeom prst="rect">
-            <a:avLst/>
-          </a:prstGeom>
-          <a:noFill/>
-          <a:ln/>
-        </p:spPr>
-        <p:txBody>
-          <a:bodyPr wrap="square" lIns="0" tIns="0" rIns="0" bIns="0" rtlCol="0" anchor="t"/>
-          <a:lstStyle/>
-          <a:p>
-            <a:pPr indent="0" marL="0">
-              <a:buNone/>
-            </a:pPr>
-            <a:r>
-              <a:rPr lang="en-US" sz="1250" b="1" dirty="0">
+          <p:cNvPr id="22" name="Text 16"/>
+          <p:cNvSpPr txBox="1"/>
+          <p:nvPr/>
+        </p:nvSpPr>
+        <p:spPr>
+          <a:xfrm>
+            <a:off x="1115568" y="3200400"/>
+            <a:ext cx="1828800" cy="320040"/>
+          </a:xfrm>
+          <a:prstGeom prst="rect">
+            <a:avLst/>
+          </a:prstGeom>
+          <a:noFill/>
+          <a:ln/>
+        </p:spPr>
+        <p:txBody>
+          <a:bodyPr wrap="square" lIns="0" tIns="0" rIns="0" bIns="0" rtlCol="0" anchor="ctr"/>
+          <a:lstStyle/>
+          <a:p>
+            <a:pPr indent="0" marL="0">
+              <a:buNone/>
+            </a:pPr>
+            <a:r>
+              <a:rPr lang="en-US" sz="1300" b="1" dirty="0">
                 <a:solidFill>
                   <a:srgbClr val="0B1F3A"/>
                 </a:solidFill>
@@ -12517,54 +13943,106 @@
                 <a:ea typeface="Calibri" pitchFamily="34" charset="-122"/>
                 <a:cs typeface="Calibri" pitchFamily="34" charset="-120"/>
               </a:rPr>
-              <a:t>Lock order removed</a:t>
-            </a:r>
-            <a:endParaRPr lang="en-US" sz="1250" dirty="0"/>
-          </a:p>
-        </p:txBody>
-      </p:sp>
-      <p:sp>
-        <p:nvSpPr>
-          <p:cNvPr id="13" name="Text 7"/>
-          <p:cNvSpPr txBox="1"/>
-          <p:nvPr/>
-        </p:nvSpPr>
-        <p:spPr>
-          <a:xfrm>
-            <a:off x="5897880" y="3282696"/>
-            <a:ext cx="2788920" cy="530352"/>
-          </a:xfrm>
-          <a:prstGeom prst="rect">
-            <a:avLst/>
-          </a:prstGeom>
-          <a:noFill/>
-          <a:ln/>
-        </p:spPr>
-        <p:txBody>
-          <a:bodyPr wrap="square" lIns="0" tIns="0" rIns="0" bIns="0" rtlCol="0" anchor="t"/>
-          <a:lstStyle/>
-          <a:p>
-            <a:pPr indent="0" marL="0">
-              <a:buNone/>
-            </a:pPr>
-            <a:r>
-              <a:rPr lang="en-US" sz="1050" dirty="0">
-                <a:solidFill>
-                  <a:srgbClr val="5B6675"/>
-                </a:solidFill>
-                <a:latin typeface="Calibri" pitchFamily="34" charset="0"/>
-                <a:ea typeface="Calibri" pitchFamily="34" charset="-122"/>
-                <a:cs typeface="Calibri" pitchFamily="34" charset="-120"/>
-              </a:rPr>
-              <a:t>PostgreSQL 40P01 deadlock detected in the A⇄B test</a:t>
-            </a:r>
-            <a:endParaRPr lang="en-US" sz="1050" dirty="0"/>
-          </a:p>
-        </p:txBody>
+              <a:t>NDPA 2023</a:t>
+            </a:r>
+            <a:endParaRPr lang="en-US" sz="1300" dirty="0"/>
+          </a:p>
+        </p:txBody>
+      </p:sp>
+      <p:sp>
+        <p:nvSpPr>
+          <p:cNvPr id="23" name="Text 17"/>
+          <p:cNvSpPr txBox="1"/>
+          <p:nvPr/>
+        </p:nvSpPr>
+        <p:spPr>
+          <a:xfrm>
+            <a:off x="594360" y="3675888"/>
+            <a:ext cx="2359152" cy="868680"/>
+          </a:xfrm>
+          <a:prstGeom prst="rect">
+            <a:avLst/>
+          </a:prstGeom>
+          <a:noFill/>
+          <a:ln/>
+        </p:spPr>
+        <p:txBody>
+          <a:bodyPr wrap="square" lIns="0" tIns="0" rIns="0" bIns="0" rtlCol="0" anchor="t"/>
+          <a:lstStyle/>
+          <a:p>
+            <a:pPr indent="0" marL="0">
+              <a:buNone/>
+            </a:pPr>
+            <a:r>
+              <a:rPr lang="en-US" sz="1000" dirty="0">
+                <a:solidFill>
+                  <a:srgbClr val="1B2430"/>
+                </a:solidFill>
+                <a:latin typeface="Calibri" pitchFamily="34" charset="0"/>
+                <a:ea typeface="Calibri" pitchFamily="34" charset="-122"/>
+                <a:cs typeface="Calibri" pitchFamily="34" charset="-120"/>
+              </a:rPr>
+              <a:t>Only email, optional name and a password hash; no BVN/NIN; tokens carry no PII; bodies never logged</a:t>
+            </a:r>
+            <a:endParaRPr lang="en-US" sz="1000" dirty="0"/>
+          </a:p>
+        </p:txBody>
+      </p:sp>
+      <p:sp>
+        <p:nvSpPr>
+          <p:cNvPr id="24" name="Shape 18"/>
+          <p:cNvSpPr/>
+          <p:nvPr/>
+        </p:nvSpPr>
+        <p:spPr>
+          <a:xfrm>
+            <a:off x="3246120" y="3017520"/>
+            <a:ext cx="2606040" cy="1554480"/>
+          </a:xfrm>
+          <a:prstGeom prst="roundRect">
+            <a:avLst>
+              <a:gd name="adj" fmla="val 4706"/>
+            </a:avLst>
+          </a:prstGeom>
+          <a:solidFill>
+            <a:srgbClr val="F3F5F9"/>
+          </a:solidFill>
+          <a:ln w="12700">
+            <a:solidFill>
+              <a:srgbClr val="F3F5F9"/>
+            </a:solidFill>
+            <a:prstDash val="solid"/>
+          </a:ln>
+        </p:spPr>
+      </p:sp>
+      <p:sp>
+        <p:nvSpPr>
+          <p:cNvPr id="25" name="Shape 19"/>
+          <p:cNvSpPr/>
+          <p:nvPr/>
+        </p:nvSpPr>
+        <p:spPr>
+          <a:xfrm>
+            <a:off x="3383280" y="3154680"/>
+            <a:ext cx="411480" cy="411480"/>
+          </a:xfrm>
+          <a:prstGeom prst="ellipse">
+            <a:avLst/>
+          </a:prstGeom>
+          <a:solidFill>
+            <a:srgbClr val="0B1F3A"/>
+          </a:solidFill>
+          <a:ln w="12700">
+            <a:solidFill>
+              <a:srgbClr val="0B1F3A"/>
+            </a:solidFill>
+            <a:prstDash val="solid"/>
+          </a:ln>
+        </p:spPr>
       </p:sp>
       <p:pic>
         <p:nvPicPr>
-          <p:cNvPr id="14" name="Image 3" descr="preencoded.png">    </p:cNvPr>
+          <p:cNvPr id="26" name="Image 4" descr="preencoded.png">    </p:cNvPr>
           <p:cNvPicPr>
             <a:picLocks noChangeAspect="1"/>
           </p:cNvPicPr>
@@ -12578,8 +14056,8 @@
         </p:blipFill>
         <p:spPr>
           <a:xfrm>
-            <a:off x="5486400" y="3886200"/>
-            <a:ext cx="274320" cy="274320"/>
+            <a:off x="3490265" y="3261665"/>
+            <a:ext cx="197510" cy="197510"/>
           </a:xfrm>
           <a:prstGeom prst="rect">
             <a:avLst/>
@@ -12588,30 +14066,30 @@
       </p:pic>
       <p:sp>
         <p:nvSpPr>
-          <p:cNvPr id="15" name="Text 8"/>
-          <p:cNvSpPr txBox="1"/>
-          <p:nvPr/>
-        </p:nvSpPr>
-        <p:spPr>
-          <a:xfrm>
-            <a:off x="5897880" y="3849624"/>
-            <a:ext cx="2788920" cy="274320"/>
-          </a:xfrm>
-          <a:prstGeom prst="rect">
-            <a:avLst/>
-          </a:prstGeom>
-          <a:noFill/>
-          <a:ln/>
-        </p:spPr>
-        <p:txBody>
-          <a:bodyPr wrap="square" lIns="0" tIns="0" rIns="0" bIns="0" rtlCol="0" anchor="t"/>
-          <a:lstStyle/>
-          <a:p>
-            <a:pPr indent="0" marL="0">
-              <a:buNone/>
-            </a:pPr>
-            <a:r>
-              <a:rPr lang="en-US" sz="1250" b="1" dirty="0">
+          <p:cNvPr id="27" name="Text 20"/>
+          <p:cNvSpPr txBox="1"/>
+          <p:nvPr/>
+        </p:nvSpPr>
+        <p:spPr>
+          <a:xfrm>
+            <a:off x="3904488" y="3200400"/>
+            <a:ext cx="1828800" cy="320040"/>
+          </a:xfrm>
+          <a:prstGeom prst="rect">
+            <a:avLst/>
+          </a:prstGeom>
+          <a:noFill/>
+          <a:ln/>
+        </p:spPr>
+        <p:txBody>
+          <a:bodyPr wrap="square" lIns="0" tIns="0" rIns="0" bIns="0" rtlCol="0" anchor="ctr"/>
+          <a:lstStyle/>
+          <a:p>
+            <a:pPr indent="0" marL="0">
+              <a:buNone/>
+            </a:pPr>
+            <a:r>
+              <a:rPr lang="en-US" sz="1300" b="1" dirty="0">
                 <a:solidFill>
                   <a:srgbClr val="0B1F3A"/>
                 </a:solidFill>
@@ -12619,54 +14097,208 @@
                 <a:ea typeface="Calibri" pitchFamily="34" charset="-122"/>
                 <a:cs typeface="Calibri" pitchFamily="34" charset="-120"/>
               </a:rPr>
-              <a:t>Also under load</a:t>
-            </a:r>
-            <a:endParaRPr lang="en-US" sz="1250" dirty="0"/>
-          </a:p>
-        </p:txBody>
-      </p:sp>
-      <p:sp>
-        <p:nvSpPr>
-          <p:cNvPr id="16" name="Text 9"/>
-          <p:cNvSpPr txBox="1"/>
-          <p:nvPr/>
-        </p:nvSpPr>
-        <p:spPr>
-          <a:xfrm>
-            <a:off x="5897880" y="4123944"/>
-            <a:ext cx="2788920" cy="530352"/>
-          </a:xfrm>
-          <a:prstGeom prst="rect">
-            <a:avLst/>
-          </a:prstGeom>
-          <a:noFill/>
-          <a:ln/>
-        </p:spPr>
-        <p:txBody>
-          <a:bodyPr wrap="square" lIns="0" tIns="0" rIns="0" bIns="0" rtlCol="0" anchor="t"/>
-          <a:lstStyle/>
-          <a:p>
-            <a:pPr indent="0" marL="0">
-              <a:buNone/>
-            </a:pPr>
-            <a:r>
-              <a:rPr lang="en-US" sz="1050" dirty="0">
-                <a:solidFill>
-                  <a:srgbClr val="5B6675"/>
-                </a:solidFill>
-                <a:latin typeface="Calibri" pitchFamily="34" charset="0"/>
-                <a:ea typeface="Calibri" pitchFamily="34" charset="-122"/>
-                <a:cs typeface="Calibri" pitchFamily="34" charset="-120"/>
-              </a:rPr>
-              <a:t>200 opposing transfers conserve money; 20 senders → 1 wallet all land</a:t>
-            </a:r>
-            <a:endParaRPr lang="en-US" sz="1050" dirty="0"/>
-          </a:p>
-        </p:txBody>
-      </p:sp>
-      <p:sp>
-        <p:nvSpPr>
-          <p:cNvPr id="17" name="Text 10"/>
+              <a:t>USSD &amp; NIP</a:t>
+            </a:r>
+            <a:endParaRPr lang="en-US" sz="1300" dirty="0"/>
+          </a:p>
+        </p:txBody>
+      </p:sp>
+      <p:sp>
+        <p:nvSpPr>
+          <p:cNvPr id="28" name="Text 21"/>
+          <p:cNvSpPr txBox="1"/>
+          <p:nvPr/>
+        </p:nvSpPr>
+        <p:spPr>
+          <a:xfrm>
+            <a:off x="3383280" y="3675888"/>
+            <a:ext cx="2359152" cy="868680"/>
+          </a:xfrm>
+          <a:prstGeom prst="rect">
+            <a:avLst/>
+          </a:prstGeom>
+          <a:noFill/>
+          <a:ln/>
+        </p:spPr>
+        <p:txBody>
+          <a:bodyPr wrap="square" lIns="0" tIns="0" rIns="0" bIns="0" rtlCol="0" anchor="t"/>
+          <a:lstStyle/>
+          <a:p>
+            <a:pPr indent="0" marL="0">
+              <a:buNone/>
+            </a:pPr>
+            <a:r>
+              <a:rPr lang="en-US" sz="1000" dirty="0">
+                <a:solidFill>
+                  <a:srgbClr val="1B2430"/>
+                </a:solidFill>
+                <a:latin typeface="Calibri" pitchFamily="34" charset="0"/>
+                <a:ea typeface="Calibri" pitchFamily="34" charset="-122"/>
+                <a:cs typeface="Calibri" pitchFamily="34" charset="-120"/>
+              </a:rPr>
+              <a:t>Retries made harmless by idempotency; NIP session ID de-duplicates credits; gateway can pass X-Correlation-ID</a:t>
+            </a:r>
+            <a:endParaRPr lang="en-US" sz="1000" dirty="0"/>
+          </a:p>
+        </p:txBody>
+      </p:sp>
+      <p:sp>
+        <p:nvSpPr>
+          <p:cNvPr id="29" name="Shape 22"/>
+          <p:cNvSpPr/>
+          <p:nvPr/>
+        </p:nvSpPr>
+        <p:spPr>
+          <a:xfrm>
+            <a:off x="6035040" y="3017520"/>
+            <a:ext cx="2606040" cy="1554480"/>
+          </a:xfrm>
+          <a:prstGeom prst="roundRect">
+            <a:avLst>
+              <a:gd name="adj" fmla="val 4706"/>
+            </a:avLst>
+          </a:prstGeom>
+          <a:solidFill>
+            <a:srgbClr val="F3F5F9"/>
+          </a:solidFill>
+          <a:ln w="12700">
+            <a:solidFill>
+              <a:srgbClr val="F3F5F9"/>
+            </a:solidFill>
+            <a:prstDash val="solid"/>
+          </a:ln>
+        </p:spPr>
+      </p:sp>
+      <p:sp>
+        <p:nvSpPr>
+          <p:cNvPr id="30" name="Shape 23"/>
+          <p:cNvSpPr/>
+          <p:nvPr/>
+        </p:nvSpPr>
+        <p:spPr>
+          <a:xfrm>
+            <a:off x="6172200" y="3154680"/>
+            <a:ext cx="411480" cy="411480"/>
+          </a:xfrm>
+          <a:prstGeom prst="ellipse">
+            <a:avLst/>
+          </a:prstGeom>
+          <a:solidFill>
+            <a:srgbClr val="0B1F3A"/>
+          </a:solidFill>
+          <a:ln w="12700">
+            <a:solidFill>
+              <a:srgbClr val="0B1F3A"/>
+            </a:solidFill>
+            <a:prstDash val="solid"/>
+          </a:ln>
+        </p:spPr>
+      </p:sp>
+      <p:pic>
+        <p:nvPicPr>
+          <p:cNvPr id="31" name="Image 5" descr="preencoded.png">    </p:cNvPr>
+          <p:cNvPicPr>
+            <a:picLocks noChangeAspect="1"/>
+          </p:cNvPicPr>
+          <p:nvPr/>
+        </p:nvPicPr>
+        <p:blipFill>
+          <a:blip r:embed="rId6"/>
+          <a:stretch>
+            <a:fillRect/>
+          </a:stretch>
+        </p:blipFill>
+        <p:spPr>
+          <a:xfrm>
+            <a:off x="6279185" y="3261665"/>
+            <a:ext cx="197510" cy="197510"/>
+          </a:xfrm>
+          <a:prstGeom prst="rect">
+            <a:avLst/>
+          </a:prstGeom>
+        </p:spPr>
+      </p:pic>
+      <p:sp>
+        <p:nvSpPr>
+          <p:cNvPr id="32" name="Text 24"/>
+          <p:cNvSpPr txBox="1"/>
+          <p:nvPr/>
+        </p:nvSpPr>
+        <p:spPr>
+          <a:xfrm>
+            <a:off x="6693408" y="3200400"/>
+            <a:ext cx="1828800" cy="320040"/>
+          </a:xfrm>
+          <a:prstGeom prst="rect">
+            <a:avLst/>
+          </a:prstGeom>
+          <a:noFill/>
+          <a:ln/>
+        </p:spPr>
+        <p:txBody>
+          <a:bodyPr wrap="square" lIns="0" tIns="0" rIns="0" bIns="0" rtlCol="0" anchor="ctr"/>
+          <a:lstStyle/>
+          <a:p>
+            <a:pPr indent="0" marL="0">
+              <a:buNone/>
+            </a:pPr>
+            <a:r>
+              <a:rPr lang="en-US" sz="1300" b="1" dirty="0">
+                <a:solidFill>
+                  <a:srgbClr val="0B1F3A"/>
+                </a:solidFill>
+                <a:latin typeface="Calibri" pitchFamily="34" charset="0"/>
+                <a:ea typeface="Calibri" pitchFamily="34" charset="-122"/>
+                <a:cs typeface="Calibri" pitchFamily="34" charset="-120"/>
+              </a:rPr>
+              <a:t>CBN &amp; abuse</a:t>
+            </a:r>
+            <a:endParaRPr lang="en-US" sz="1300" dirty="0"/>
+          </a:p>
+        </p:txBody>
+      </p:sp>
+      <p:sp>
+        <p:nvSpPr>
+          <p:cNvPr id="33" name="Text 25"/>
+          <p:cNvSpPr txBox="1"/>
+          <p:nvPr/>
+        </p:nvSpPr>
+        <p:spPr>
+          <a:xfrm>
+            <a:off x="6172200" y="3675888"/>
+            <a:ext cx="2359152" cy="868680"/>
+          </a:xfrm>
+          <a:prstGeom prst="rect">
+            <a:avLst/>
+          </a:prstGeom>
+          <a:noFill/>
+          <a:ln/>
+        </p:spPr>
+        <p:txBody>
+          <a:bodyPr wrap="square" lIns="0" tIns="0" rIns="0" bIns="0" rtlCol="0" anchor="t"/>
+          <a:lstStyle/>
+          <a:p>
+            <a:pPr indent="0" marL="0">
+              <a:buNone/>
+            </a:pPr>
+            <a:r>
+              <a:rPr lang="en-US" sz="1000" dirty="0">
+                <a:solidFill>
+                  <a:srgbClr val="1B2430"/>
+                </a:solidFill>
+                <a:latin typeface="Calibri" pitchFamily="34" charset="0"/>
+                <a:ea typeface="Calibri" pitchFamily="34" charset="-122"/>
+                <a:cs typeface="Calibri" pitchFamily="34" charset="-120"/>
+              </a:rPr>
+              <a:t>Per-customer rate limit (429 + Retry-After); configurable daily limit; tiered-KYC limits are next</a:t>
+            </a:r>
+            <a:endParaRPr lang="en-US" sz="1000" dirty="0"/>
+          </a:p>
+        </p:txBody>
+      </p:sp>
+      <p:sp>
+        <p:nvSpPr>
+          <p:cNvPr id="34" name="Text 26"/>
           <p:cNvSpPr txBox="1"/>
           <p:nvPr/>
         </p:nvSpPr>
@@ -12705,7 +14337,7 @@
       </p:sp>
       <p:sp>
         <p:nvSpPr>
-          <p:cNvPr id="18" name="Text 11"/>
+          <p:cNvPr id="35" name="Text 27"/>
           <p:cNvSpPr txBox="1"/>
           <p:nvPr/>
         </p:nvSpPr>

--- a/docs/Ikenna_Odoh_NovaWallet_Case_Study.pptx
+++ b/docs/Ikenna_Odoh_NovaWallet_Case_Study.pptx
@@ -1308,7 +1308,7 @@
           <a:p>
             <a:r>
               <a:rPr lang="en-US" dirty="0"/>
-              <a:t>The headline: 200 transfers fired at the same instant against a thousand-naira wallet — exactly ten succeed, every time, balance lands on zero, and the ledger agrees. 148 tests in total, half of them against real Postgres. All four stretch goals are in, plus real sign-in and an admin flow.</a:t>
+              <a:t>The headline: 200 transfers fired at the same instant against a thousand-naira wallet — exactly ten succeed, every time, balance lands on zero, and the ledger agrees. 150 tests in total, about half of them against real Postgres. All four stretch goals are in, plus real sign-in and an admin flow.</a:t>
             </a:r>
             <a:endParaRPr lang="en-US" dirty="0"/>
           </a:p>
@@ -6713,7 +6713,7 @@
                 <a:ea typeface="Cambria" pitchFamily="34" charset="-122"/>
                 <a:cs typeface="Cambria" pitchFamily="34" charset="-120"/>
               </a:rPr>
-              <a:t>148</a:t>
+              <a:t>150</a:t>
             </a:r>
             <a:endParaRPr lang="en-US" sz="4000" dirty="0"/>
           </a:p>
@@ -6752,7 +6752,7 @@
                 <a:ea typeface="Calibri" pitchFamily="34" charset="-122"/>
                 <a:cs typeface="Calibri" pitchFamily="34" charset="-120"/>
               </a:rPr>
-              <a:t>automated tests: 74 unit + 74 against real PostgreSQL, all green</a:t>
+              <a:t>automated tests: 74 unit + 76 against real PostgreSQL, all green</a:t>
             </a:r>
             <a:endParaRPr lang="en-US" sz="1150" dirty="0"/>
           </a:p>
@@ -7029,7 +7029,7 @@
                 <a:ea typeface="Calibri" pitchFamily="34" charset="-122"/>
                 <a:cs typeface="Calibri" pitchFamily="34" charset="-120"/>
               </a:rPr>
-              <a:t>password sign-in with rotating refresh tokens · admin API (users, freezes, action log) · Swagger/OpenAPI · rate limiting · transactional outbox · Serilog correlation IDs · health probes · hash-chained audit trail · CI with a compose smoke test · README, testing guide, AI_USAGE.md</a:t>
+              <a:t>password sign-in with rotating refresh tokens · admin API (users, freezes, action log) · every response { statusCode, message, data } (errors also RFC 7807) · Swagger · rate limiting · transactional outbox · Serilog correlation IDs · health probes · hash-chained audit trail · CI with a compose smoke test · README, testing guide, AI_USAGE.md</a:t>
             </a:r>
             <a:endParaRPr lang="en-US" sz="1250" dirty="0"/>
           </a:p>

--- a/docs/Ikenna_Odoh_NovaWallet_Case_Study.pptx
+++ b/docs/Ikenna_Odoh_NovaWallet_Case_Study.pptx
@@ -1308,7 +1308,7 @@
           <a:p>
             <a:r>
               <a:rPr lang="en-US" dirty="0"/>
-              <a:t>The headline: 200 transfers fired at the same instant against a thousand-naira wallet — exactly ten succeed, every time, balance lands on zero, and the ledger agrees. 150 tests in total, about half of them against real Postgres. All four stretch goals are in, plus real sign-in and an admin flow.</a:t>
+              <a:t>The headline: 200 transfers fired at the same instant against a thousand-naira wallet — exactly ten succeed, every time, balance lands on zero, and the ledger agrees. 148 tests in total, half of them against real Postgres. All four stretch goals are in, plus real sign-in and an admin flow.</a:t>
             </a:r>
             <a:endParaRPr lang="en-US" dirty="0"/>
           </a:p>
@@ -6713,7 +6713,7 @@
                 <a:ea typeface="Cambria" pitchFamily="34" charset="-122"/>
                 <a:cs typeface="Cambria" pitchFamily="34" charset="-120"/>
               </a:rPr>
-              <a:t>150</a:t>
+              <a:t>148</a:t>
             </a:r>
             <a:endParaRPr lang="en-US" sz="4000" dirty="0"/>
           </a:p>
@@ -6752,7 +6752,7 @@
                 <a:ea typeface="Calibri" pitchFamily="34" charset="-122"/>
                 <a:cs typeface="Calibri" pitchFamily="34" charset="-120"/>
               </a:rPr>
-              <a:t>automated tests: 74 unit + 76 against real PostgreSQL, all green</a:t>
+              <a:t>automated tests: 74 unit + 74 against real PostgreSQL, all green</a:t>
             </a:r>
             <a:endParaRPr lang="en-US" sz="1150" dirty="0"/>
           </a:p>
@@ -7029,7 +7029,7 @@
                 <a:ea typeface="Calibri" pitchFamily="34" charset="-122"/>
                 <a:cs typeface="Calibri" pitchFamily="34" charset="-120"/>
               </a:rPr>
-              <a:t>password sign-in with rotating refresh tokens · admin API (users, freezes, action log) · every response { statusCode, message, data } (errors also RFC 7807) · Swagger · rate limiting · transactional outbox · Serilog correlation IDs · health probes · hash-chained audit trail · CI with a compose smoke test · README, testing guide, AI_USAGE.md</a:t>
+              <a:t>password sign-in with rotating refresh tokens · admin API (users, freezes, action log) · Swagger/OpenAPI · rate limiting · transactional outbox · Serilog correlation IDs · health probes · hash-chained audit trail · CI with a compose smoke test · README, testing guide, AI_USAGE.md</a:t>
             </a:r>
             <a:endParaRPr lang="en-US" sz="1250" dirty="0"/>
           </a:p>

--- a/docs/Ikenna_Odoh_NovaWallet_Case_Study.pptx
+++ b/docs/Ikenna_Odoh_NovaWallet_Case_Study.pptx
@@ -1308,7 +1308,7 @@
           <a:p>
             <a:r>
               <a:rPr lang="en-US" dirty="0"/>
-              <a:t>The headline: 200 transfers fired at the same instant against a thousand-naira wallet — exactly ten succeed, every time, balance lands on zero, and the ledger agrees. 148 tests in total, half of them against real Postgres. All four stretch goals are in, plus real sign-in and an admin flow.</a:t>
+              <a:t>The headline: 200 transfers fired at the same instant against a thousand-naira wallet — exactly ten succeed, every time, balance lands on zero, and the ledger agrees. 151 tests in total, about half of them against real Postgres. All four stretch goals are in, plus real sign-in and an admin flow.</a:t>
             </a:r>
             <a:endParaRPr lang="en-US" dirty="0"/>
           </a:p>
@@ -6713,7 +6713,7 @@
                 <a:ea typeface="Cambria" pitchFamily="34" charset="-122"/>
                 <a:cs typeface="Cambria" pitchFamily="34" charset="-120"/>
               </a:rPr>
-              <a:t>148</a:t>
+              <a:t>151</a:t>
             </a:r>
             <a:endParaRPr lang="en-US" sz="4000" dirty="0"/>
           </a:p>
@@ -6752,7 +6752,7 @@
                 <a:ea typeface="Calibri" pitchFamily="34" charset="-122"/>
                 <a:cs typeface="Calibri" pitchFamily="34" charset="-120"/>
               </a:rPr>
-              <a:t>automated tests: 74 unit + 74 against real PostgreSQL, all green</a:t>
+              <a:t>automated tests: 75 unit + 76 against real PostgreSQL, all green</a:t>
             </a:r>
             <a:endParaRPr lang="en-US" sz="1150" dirty="0"/>
           </a:p>
@@ -8939,7 +8939,7 @@
                 <a:ea typeface="Calibri" pitchFamily="34" charset="-122"/>
                 <a:cs typeface="Calibri" pitchFamily="34" charset="-120"/>
               </a:rPr>
-              <a:t>owner · funds · daily limit — all while holding the locks</a:t>
+              <a:t>source = your own wallet · funds · daily limit — under the locks</a:t>
             </a:r>
             <a:endParaRPr lang="en-US" sz="1000" dirty="0"/>
           </a:p>
@@ -13674,7 +13674,7 @@
                 <a:ea typeface="Calibri" pitchFamily="34" charset="-122"/>
                 <a:cs typeface="Calibri" pitchFamily="34" charset="-120"/>
               </a:rPr>
-              <a:t>Other customers' wallets return 404; receipts show only the sender's balance</a:t>
+              <a:t>Source wallet comes from the token; others' wallets return 404; receipts show only the sender's balance</a:t>
             </a:r>
             <a:endParaRPr lang="en-US" sz="1000" dirty="0"/>
           </a:p>

--- a/docs/Ikenna_Odoh_NovaWallet_Case_Study.pptx
+++ b/docs/Ikenna_Odoh_NovaWallet_Case_Study.pptx
@@ -1308,7 +1308,7 @@
           <a:p>
             <a:r>
               <a:rPr lang="en-US" dirty="0"/>
-              <a:t>The headline: 200 transfers fired at the same instant against a thousand-naira wallet — exactly ten succeed, every time, balance lands on zero, and the ledger agrees. 151 tests in total, about half of them against real Postgres. All four stretch goals are in, plus real sign-in and an admin flow.</a:t>
+              <a:t>The headline: 200 transfers fired at the same instant against a thousand-naira wallet — exactly ten succeed, every time, balance lands on zero, and the ledger agrees. 153 tests in total, about half of them against real Postgres. All four stretch goals are in, plus real sign-in and an admin flow.</a:t>
             </a:r>
             <a:endParaRPr lang="en-US" dirty="0"/>
           </a:p>
@@ -6713,7 +6713,7 @@
                 <a:ea typeface="Cambria" pitchFamily="34" charset="-122"/>
                 <a:cs typeface="Cambria" pitchFamily="34" charset="-120"/>
               </a:rPr>
-              <a:t>151</a:t>
+              <a:t>153</a:t>
             </a:r>
             <a:endParaRPr lang="en-US" sz="4000" dirty="0"/>
           </a:p>
@@ -6752,7 +6752,7 @@
                 <a:ea typeface="Calibri" pitchFamily="34" charset="-122"/>
                 <a:cs typeface="Calibri" pitchFamily="34" charset="-120"/>
               </a:rPr>
-              <a:t>automated tests: 75 unit + 76 against real PostgreSQL, all green</a:t>
+              <a:t>automated tests: 75 unit + 78 against real PostgreSQL, all green</a:t>
             </a:r>
             <a:endParaRPr lang="en-US" sz="1150" dirty="0"/>
           </a:p>

--- a/docs/Ikenna_Odoh_NovaWallet_Case_Study.pptx
+++ b/docs/Ikenna_Odoh_NovaWallet_Case_Study.pptx
@@ -1308,7 +1308,7 @@
           <a:p>
             <a:r>
               <a:rPr lang="en-US" dirty="0"/>
-              <a:t>The headline: 200 transfers fired at the same instant against a thousand-naira wallet — exactly ten succeed, every time, balance lands on zero, and the ledger agrees. 153 tests in total, about half of them against real Postgres. All four stretch goals are in, plus real sign-in and an admin flow.</a:t>
+              <a:t>The headline: 200 transfers fired at the same instant against a thousand-naira wallet — exactly ten succeed, every time, balance lands on zero, and the ledger agrees. 156 tests in total, about half of them against real Postgres. All four stretch goals are in, plus real sign-in and an admin flow.</a:t>
             </a:r>
             <a:endParaRPr lang="en-US" dirty="0"/>
           </a:p>
@@ -6713,7 +6713,7 @@
                 <a:ea typeface="Cambria" pitchFamily="34" charset="-122"/>
                 <a:cs typeface="Cambria" pitchFamily="34" charset="-120"/>
               </a:rPr>
-              <a:t>153</a:t>
+              <a:t>156</a:t>
             </a:r>
             <a:endParaRPr lang="en-US" sz="4000" dirty="0"/>
           </a:p>
@@ -6752,7 +6752,7 @@
                 <a:ea typeface="Calibri" pitchFamily="34" charset="-122"/>
                 <a:cs typeface="Calibri" pitchFamily="34" charset="-120"/>
               </a:rPr>
-              <a:t>automated tests: 75 unit + 78 against real PostgreSQL, all green</a:t>
+              <a:t>automated tests: 75 unit + 81 against real PostgreSQL, all green</a:t>
             </a:r>
             <a:endParaRPr lang="en-US" sz="1150" dirty="0"/>
           </a:p>
@@ -12919,7 +12919,7 @@
                 <a:ea typeface="Calibri" pitchFamily="34" charset="-122"/>
                 <a:cs typeface="Calibri" pitchFamily="34" charset="-120"/>
               </a:rPr>
-              <a:t>View any wallet</a:t>
+              <a:t>View &amp; browse wallets</a:t>
             </a:r>
             <a:endParaRPr lang="en-US" sz="1150" dirty="0"/>
           </a:p>
@@ -12958,7 +12958,7 @@
                 <a:ea typeface="Calibri" pitchFamily="34" charset="-122"/>
                 <a:cs typeface="Calibri" pitchFamily="34" charset="-120"/>
               </a:rPr>
-              <a:t>find a user, see balance and statement</a:t>
+              <a:t>look up any wallet; filter the full list by status</a:t>
             </a:r>
             <a:endParaRPr lang="en-US" sz="950" dirty="0"/>
           </a:p>
